--- a/Pesquisa_Comunidade_Arandu_2025_GSlides.pptx
+++ b/Pesquisa_Comunidade_Arandu_2025_GSlides.pptx
@@ -18,9 +18,11 @@
     <p:sldId id="266" r:id="rId12"/>
     <p:sldId id="267" r:id="rId13"/>
     <p:sldId id="268" r:id="rId14"/>
+    <p:sldId id="269" r:id="rId15"/>
+    <p:sldId id="270" r:id="rId16"/>
   </p:sldIdLst>
   <p:notesMasterIdLst>
-    <p:notesMasterId r:id="rId15"/>
+    <p:notesMasterId r:id="rId17"/>
   </p:notesMasterIdLst>
   <p:sldSz cx="9144000" cy="5143500"/>
   <p:notesSz cx="5143500" cy="9144000"/>
@@ -117,3219 +119,6 @@
     </a:lvl9pPr>
   </p:defaultTextStyle>
 </p:presentation>
-</file>
-
-<file path=ppt/charts/chart1.xml><?xml version="1.0" encoding="utf-8"?>
-<c:chartSpace xmlns:c="http://schemas.openxmlformats.org/drawingml/2006/chart" xmlns:a="http://schemas.openxmlformats.org/drawingml/2006/main" xmlns:r="http://schemas.openxmlformats.org/officeDocument/2006/relationships">
-  <c:date1904 val="0"/>
-  <c:roundedCorners val="1"/>
-  <c:chart>
-    <c:title>
-      <c:tx>
-        <c:rich>
-          <a:bodyPr/>
-          <a:lstStyle/>
-          <a:p>
-            <a:pPr>
-              <a:defRPr sz="1200" b="0" i="0" u="none" strike="noStrike">
-                <a:solidFill>
-                  <a:srgbClr val="1B2420"/>
-                </a:solidFill>
-                <a:latin typeface="Arial"/>
-              </a:defRPr>
-            </a:pPr>
-            <a:r>
-              <a:rPr sz="1200" b="0" i="0" u="none" strike="noStrike">
-                <a:solidFill>
-                  <a:srgbClr val="1B2420"/>
-                </a:solidFill>
-                <a:latin typeface="Arial"/>
-              </a:rPr>
-              <a:t>Distribuição por Faixa Etária (%)</a:t>
-            </a:r>
-          </a:p>
-        </c:rich>
-      </c:tx>
-      <c:layout/>
-      <c:overlay val="0"/>
-    </c:title>
-    <c:autoTitleDeleted val="0"/>
-    <c:plotArea>
-      <c:layout/>
-      <c:barChart>
-        <c:barDir val="col"/>
-        <c:grouping val="clustered"/>
-        <c:varyColors val="0"/>
-        <c:ser>
-          <c:idx val="0"/>
-          <c:order val="0"/>
-          <c:tx>
-            <c:strRef>
-              <c:f>Sheet1!$B$1</c:f>
-              <c:strCache>
-                <c:ptCount val="1"/>
-                <c:pt idx="0">
-                  <c:v>%</c:v>
-                </c:pt>
-              </c:strCache>
-            </c:strRef>
-          </c:tx>
-          <c:spPr>
-            <a:solidFill>
-              <a:srgbClr val="52B788"/>
-            </a:solidFill>
-            <a:effectLst/>
-          </c:spPr>
-          <c:invertIfNegative val="0"/>
-          <c:dLbls>
-            <c:numFmt formatCode="0.0&quot;%&quot;" sourceLinked="0"/>
-            <c:txPr>
-              <a:bodyPr/>
-              <a:lstStyle/>
-              <a:p>
-                <a:pPr>
-                  <a:defRPr b="0" i="0" strike="noStrike" sz="900" u="none">
-                    <a:solidFill>
-                      <a:srgbClr val="8A7070"/>
-                    </a:solidFill>
-                    <a:latin typeface="Arial"/>
-                  </a:defRPr>
-                </a:pPr>
-              </a:p>
-            </c:txPr>
-            <c:showLegendKey val="0"/>
-            <c:showVal val="1"/>
-            <c:showCatName val="0"/>
-            <c:showSerName val="0"/>
-            <c:showPercent val="0"/>
-            <c:showBubbleSize val="0"/>
-            <c:showLeaderLines val="0"/>
-          </c:dLbls>
-          <c:cat>
-            <c:multiLvlStrRef>
-              <c:f>Sheet1!$A$2:$A$9</c:f>
-              <c:multiLvlStrCache>
-                <c:ptCount val="8"/>
-                <c:lvl>
-                  <c:pt idx="0">
-                    <c:v>Até 29</c:v>
-                  </c:pt>
-                  <c:pt idx="1">
-                    <c:v>30–34</c:v>
-                  </c:pt>
-                  <c:pt idx="2">
-                    <c:v>35–39</c:v>
-                  </c:pt>
-                  <c:pt idx="3">
-                    <c:v>40–44</c:v>
-                  </c:pt>
-                  <c:pt idx="4">
-                    <c:v>45–49</c:v>
-                  </c:pt>
-                  <c:pt idx="5">
-                    <c:v>50–54</c:v>
-                  </c:pt>
-                  <c:pt idx="6">
-                    <c:v>55–59</c:v>
-                  </c:pt>
-                  <c:pt idx="7">
-                    <c:v>60+</c:v>
-                  </c:pt>
-                </c:lvl>
-              </c:multiLvlStrCache>
-            </c:multiLvlStrRef>
-          </c:cat>
-          <c:val>
-            <c:numRef>
-              <c:f>Sheet1!$B$2:$B$9</c:f>
-              <c:numCache>
-                <c:formatCode>General</c:formatCode>
-                <c:ptCount val="8"/>
-                <c:pt idx="0">
-                  <c:v>0.7</c:v>
-                </c:pt>
-                <c:pt idx="1">
-                  <c:v>7.7</c:v>
-                </c:pt>
-                <c:pt idx="2">
-                  <c:v>17.5</c:v>
-                </c:pt>
-                <c:pt idx="3">
-                  <c:v>37.1</c:v>
-                </c:pt>
-                <c:pt idx="4">
-                  <c:v>21</c:v>
-                </c:pt>
-                <c:pt idx="5">
-                  <c:v>11.9</c:v>
-                </c:pt>
-                <c:pt idx="6">
-                  <c:v>2.8</c:v>
-                </c:pt>
-                <c:pt idx="7">
-                  <c:v>0.7</c:v>
-                </c:pt>
-              </c:numCache>
-            </c:numRef>
-          </c:val>
-        </c:ser>
-        <c:dLbls>
-          <c:numFmt formatCode="0.0&quot;%&quot;" sourceLinked="0"/>
-          <c:txPr>
-            <a:bodyPr/>
-            <a:lstStyle/>
-            <a:p>
-              <a:pPr>
-                <a:defRPr b="0" i="0" strike="noStrike" sz="900" u="none">
-                  <a:solidFill>
-                    <a:srgbClr val="8A7070"/>
-                  </a:solidFill>
-                  <a:latin typeface="Arial"/>
-                </a:defRPr>
-              </a:pPr>
-            </a:p>
-          </c:txPr>
-          <c:showLegendKey val="0"/>
-          <c:showVal val="1"/>
-          <c:showCatName val="0"/>
-          <c:showSerName val="0"/>
-          <c:showPercent val="0"/>
-          <c:showBubbleSize val="0"/>
-          <c:showLeaderLines val="0"/>
-        </c:dLbls>
-        <c:gapWidth val="45"/>
-        <c:overlap val="0"/>
-        <c:axId val="2094734554"/>
-        <c:axId val="2094734552"/>
-        <c:axId val="2094734556"/>
-      </c:barChart>
-      <c:catAx>
-        <c:axId val="2094734554"/>
-        <c:scaling>
-          <c:orientation val="minMax"/>
-        </c:scaling>
-        <c:delete val="0"/>
-        <c:axPos val="b"/>
-        <c:numFmt formatCode="General" sourceLinked="1"/>
-        <c:majorTickMark val="out"/>
-        <c:minorTickMark val="none"/>
-        <c:tickLblPos val="low"/>
-        <c:spPr>
-          <a:ln w="12700" cap="flat">
-            <a:solidFill>
-              <a:srgbClr val="888888"/>
-            </a:solidFill>
-            <a:prstDash val="solid"/>
-            <a:round/>
-          </a:ln>
-        </c:spPr>
-        <c:txPr>
-          <a:bodyPr/>
-          <a:lstStyle/>
-          <a:p>
-            <a:pPr>
-              <a:defRPr sz="1000" b="0" i="0" u="none" strike="noStrike">
-                <a:solidFill>
-                  <a:srgbClr val="8A7070"/>
-                </a:solidFill>
-                <a:latin typeface="Arial"/>
-              </a:defRPr>
-            </a:pPr>
-            <a:endParaRPr lang="en-US"/>
-          </a:p>
-        </c:txPr>
-        <c:crossAx val="2094734552"/>
-        <c:crosses val="autoZero"/>
-        <c:auto val="1"/>
-        <c:lblAlgn val="ctr"/>
-        <c:noMultiLvlLbl val="1"/>
-      </c:catAx>
-      <c:valAx>
-        <c:axId val="2094734552"/>
-        <c:scaling>
-          <c:orientation val="minMax"/>
-        </c:scaling>
-        <c:delete val="1"/>
-        <c:axPos val="l"/>
-        <c:numFmt formatCode="General" sourceLinked="0"/>
-        <c:majorTickMark val="out"/>
-        <c:minorTickMark val="none"/>
-        <c:tickLblPos val="nextTo"/>
-        <c:spPr>
-          <a:ln w="12700" cap="flat">
-            <a:solidFill>
-              <a:srgbClr val="888888"/>
-            </a:solidFill>
-            <a:prstDash val="solid"/>
-            <a:round/>
-          </a:ln>
-        </c:spPr>
-        <c:txPr>
-          <a:bodyPr/>
-          <a:lstStyle/>
-          <a:p>
-            <a:pPr>
-              <a:defRPr sz="1200" b="0" i="0" u="none" strike="noStrike">
-                <a:solidFill>
-                  <a:srgbClr val="000000"/>
-                </a:solidFill>
-                <a:latin typeface="Arial"/>
-              </a:defRPr>
-            </a:pPr>
-            <a:endParaRPr lang="en-US"/>
-          </a:p>
-        </c:txPr>
-        <c:crossAx val="2094734554"/>
-        <c:crosses val="autoZero"/>
-        <c:crossBetween val="between"/>
-      </c:valAx>
-      <c:spPr>
-        <a:noFill/>
-        <a:ln>
-          <a:noFill/>
-        </a:ln>
-        <a:effectLst/>
-      </c:spPr>
-    </c:plotArea>
-    <c:plotVisOnly val="1"/>
-    <c:dispBlanksAs val="span"/>
-  </c:chart>
-  <c:spPr>
-    <a:noFill/>
-    <a:ln>
-      <a:noFill/>
-    </a:ln>
-    <a:effectLst/>
-  </c:spPr>
-  <c:externalData r:id="rId1">
-    <c:autoUpdate val="0"/>
-  </c:externalData>
-</c:chartSpace>
-</file>
-
-<file path=ppt/charts/chart2.xml><?xml version="1.0" encoding="utf-8"?>
-<c:chartSpace xmlns:c="http://schemas.openxmlformats.org/drawingml/2006/chart" xmlns:a="http://schemas.openxmlformats.org/drawingml/2006/main" xmlns:r="http://schemas.openxmlformats.org/officeDocument/2006/relationships">
-  <c:date1904 val="0"/>
-  <c:roundedCorners val="1"/>
-  <c:chart>
-    <c:title>
-      <c:tx>
-        <c:rich>
-          <a:bodyPr/>
-          <a:lstStyle/>
-          <a:p>
-            <a:pPr>
-              <a:defRPr sz="1200" b="0" i="0" u="none" strike="noStrike">
-                <a:solidFill>
-                  <a:srgbClr val="1B2420"/>
-                </a:solidFill>
-                <a:latin typeface="Arial"/>
-              </a:defRPr>
-            </a:pPr>
-            <a:r>
-              <a:rPr sz="1200" b="0" i="0" u="none" strike="noStrike">
-                <a:solidFill>
-                  <a:srgbClr val="1B2420"/>
-                </a:solidFill>
-                <a:latin typeface="Arial"/>
-              </a:rPr>
-              <a:t>Formato da Família</a:t>
-            </a:r>
-          </a:p>
-        </c:rich>
-      </c:tx>
-      <c:layout/>
-      <c:overlay val="0"/>
-    </c:title>
-    <c:autoTitleDeleted val="0"/>
-    <c:plotArea>
-      <c:layout/>
-      <c:barChart>
-        <c:barDir val="bar"/>
-        <c:grouping val="clustered"/>
-        <c:varyColors val="0"/>
-        <c:ser>
-          <c:idx val="0"/>
-          <c:order val="0"/>
-          <c:tx>
-            <c:strRef>
-              <c:f>Sheet1!$B$1</c:f>
-              <c:strCache>
-                <c:ptCount val="1"/>
-                <c:pt idx="0">
-                  <c:v>%</c:v>
-                </c:pt>
-              </c:strCache>
-            </c:strRef>
-          </c:tx>
-          <c:spPr>
-            <a:solidFill>
-              <a:srgbClr val="A83048"/>
-            </a:solidFill>
-            <a:effectLst/>
-          </c:spPr>
-          <c:invertIfNegative val="0"/>
-          <c:dLbls>
-            <c:numFmt formatCode="0.0&quot;%&quot;" sourceLinked="0"/>
-            <c:txPr>
-              <a:bodyPr/>
-              <a:lstStyle/>
-              <a:p>
-                <a:pPr>
-                  <a:defRPr b="0" i="0" strike="noStrike" sz="900" u="none">
-                    <a:solidFill>
-                      <a:srgbClr val="8A7070"/>
-                    </a:solidFill>
-                    <a:latin typeface="Arial"/>
-                  </a:defRPr>
-                </a:pPr>
-              </a:p>
-            </c:txPr>
-            <c:showLegendKey val="0"/>
-            <c:showVal val="1"/>
-            <c:showCatName val="0"/>
-            <c:showSerName val="0"/>
-            <c:showPercent val="0"/>
-            <c:showBubbleSize val="0"/>
-            <c:showLeaderLines val="0"/>
-          </c:dLbls>
-          <c:cat>
-            <c:multiLvlStrRef>
-              <c:f>Sheet1!$A$2:$A$6</c:f>
-              <c:multiLvlStrCache>
-                <c:ptCount val="5"/>
-                <c:lvl>
-                  <c:pt idx="0">
-                    <c:v>Casal com filhos</c:v>
-                  </c:pt>
-                  <c:pt idx="1">
-                    <c:v>Monoparental</c:v>
-                  </c:pt>
-                  <c:pt idx="2">
-                    <c:v>Família recomposta</c:v>
-                  </c:pt>
-                  <c:pt idx="3">
-                    <c:v>Estendida</c:v>
-                  </c:pt>
-                  <c:pt idx="4">
-                    <c:v>Outros</c:v>
-                  </c:pt>
-                </c:lvl>
-              </c:multiLvlStrCache>
-            </c:multiLvlStrRef>
-          </c:cat>
-          <c:val>
-            <c:numRef>
-              <c:f>Sheet1!$B$2:$B$6</c:f>
-              <c:numCache>
-                <c:formatCode>General</c:formatCode>
-                <c:ptCount val="5"/>
-                <c:pt idx="0">
-                  <c:v>67.8</c:v>
-                </c:pt>
-                <c:pt idx="1">
-                  <c:v>16.1</c:v>
-                </c:pt>
-                <c:pt idx="2">
-                  <c:v>9.8</c:v>
-                </c:pt>
-                <c:pt idx="3">
-                  <c:v>3.5</c:v>
-                </c:pt>
-                <c:pt idx="4">
-                  <c:v>2.8</c:v>
-                </c:pt>
-              </c:numCache>
-            </c:numRef>
-          </c:val>
-        </c:ser>
-        <c:dLbls>
-          <c:numFmt formatCode="0.0&quot;%&quot;" sourceLinked="0"/>
-          <c:txPr>
-            <a:bodyPr/>
-            <a:lstStyle/>
-            <a:p>
-              <a:pPr>
-                <a:defRPr b="0" i="0" strike="noStrike" sz="900" u="none">
-                  <a:solidFill>
-                    <a:srgbClr val="8A7070"/>
-                  </a:solidFill>
-                  <a:latin typeface="Arial"/>
-                </a:defRPr>
-              </a:pPr>
-            </a:p>
-          </c:txPr>
-          <c:showLegendKey val="0"/>
-          <c:showVal val="1"/>
-          <c:showCatName val="0"/>
-          <c:showSerName val="0"/>
-          <c:showPercent val="0"/>
-          <c:showBubbleSize val="0"/>
-          <c:showLeaderLines val="0"/>
-        </c:dLbls>
-        <c:gapWidth val="150"/>
-        <c:overlap val="0"/>
-        <c:axId val="2094734554"/>
-        <c:axId val="2094734552"/>
-        <c:axId val="2094734556"/>
-      </c:barChart>
-      <c:catAx>
-        <c:axId val="2094734554"/>
-        <c:scaling>
-          <c:orientation val="minMax"/>
-        </c:scaling>
-        <c:delete val="0"/>
-        <c:axPos val="l"/>
-        <c:numFmt formatCode="General" sourceLinked="1"/>
-        <c:majorTickMark val="out"/>
-        <c:minorTickMark val="none"/>
-        <c:tickLblPos val="nextTo"/>
-        <c:spPr>
-          <a:ln w="12700" cap="flat">
-            <a:solidFill>
-              <a:srgbClr val="888888"/>
-            </a:solidFill>
-            <a:prstDash val="solid"/>
-            <a:round/>
-          </a:ln>
-        </c:spPr>
-        <c:txPr>
-          <a:bodyPr/>
-          <a:lstStyle/>
-          <a:p>
-            <a:pPr>
-              <a:defRPr sz="1000" b="0" i="0" u="none" strike="noStrike">
-                <a:solidFill>
-                  <a:srgbClr val="8A7070"/>
-                </a:solidFill>
-                <a:latin typeface="Arial"/>
-              </a:defRPr>
-            </a:pPr>
-            <a:endParaRPr lang="en-US"/>
-          </a:p>
-        </c:txPr>
-        <c:crossAx val="2094734552"/>
-        <c:crosses val="autoZero"/>
-        <c:auto val="1"/>
-        <c:lblAlgn val="ctr"/>
-        <c:noMultiLvlLbl val="1"/>
-      </c:catAx>
-      <c:valAx>
-        <c:axId val="2094734552"/>
-        <c:scaling>
-          <c:orientation val="minMax"/>
-        </c:scaling>
-        <c:delete val="1"/>
-        <c:axPos val="b"/>
-        <c:numFmt formatCode="General" sourceLinked="0"/>
-        <c:majorTickMark val="out"/>
-        <c:minorTickMark val="none"/>
-        <c:tickLblPos val="low"/>
-        <c:spPr>
-          <a:ln w="12700" cap="flat">
-            <a:solidFill>
-              <a:srgbClr val="888888"/>
-            </a:solidFill>
-            <a:prstDash val="solid"/>
-            <a:round/>
-          </a:ln>
-        </c:spPr>
-        <c:txPr>
-          <a:bodyPr/>
-          <a:lstStyle/>
-          <a:p>
-            <a:pPr>
-              <a:defRPr sz="1200" b="0" i="0" u="none" strike="noStrike">
-                <a:solidFill>
-                  <a:srgbClr val="000000"/>
-                </a:solidFill>
-                <a:latin typeface="Arial"/>
-              </a:defRPr>
-            </a:pPr>
-            <a:endParaRPr lang="en-US"/>
-          </a:p>
-        </c:txPr>
-        <c:crossAx val="2094734554"/>
-        <c:crosses val="autoZero"/>
-        <c:crossBetween val="between"/>
-      </c:valAx>
-      <c:spPr>
-        <a:noFill/>
-        <a:ln>
-          <a:noFill/>
-        </a:ln>
-        <a:effectLst/>
-      </c:spPr>
-    </c:plotArea>
-    <c:plotVisOnly val="1"/>
-    <c:dispBlanksAs val="span"/>
-  </c:chart>
-  <c:spPr>
-    <a:noFill/>
-    <a:ln>
-      <a:noFill/>
-    </a:ln>
-    <a:effectLst/>
-  </c:spPr>
-  <c:externalData r:id="rId1">
-    <c:autoUpdate val="0"/>
-  </c:externalData>
-</c:chartSpace>
-</file>
-
-<file path=ppt/charts/chart3.xml><?xml version="1.0" encoding="utf-8"?>
-<c:chartSpace xmlns:c="http://schemas.openxmlformats.org/drawingml/2006/chart" xmlns:a="http://schemas.openxmlformats.org/drawingml/2006/main" xmlns:r="http://schemas.openxmlformats.org/officeDocument/2006/relationships">
-  <c:date1904 val="0"/>
-  <c:roundedCorners val="1"/>
-  <c:chart>
-    <c:title>
-      <c:tx>
-        <c:rich>
-          <a:bodyPr/>
-          <a:lstStyle/>
-          <a:p>
-            <a:pPr>
-              <a:defRPr sz="1200" b="0" i="0" u="none" strike="noStrike">
-                <a:solidFill>
-                  <a:srgbClr val="1B2420"/>
-                </a:solidFill>
-                <a:latin typeface="Arial"/>
-              </a:defRPr>
-            </a:pPr>
-            <a:r>
-              <a:rPr sz="1200" b="0" i="0" u="none" strike="noStrike">
-                <a:solidFill>
-                  <a:srgbClr val="1B2420"/>
-                </a:solidFill>
-                <a:latin typeface="Arial"/>
-              </a:rPr>
-              <a:t>Renda Familiar Mensal (SM = R$1.518)</a:t>
-            </a:r>
-          </a:p>
-        </c:rich>
-      </c:tx>
-      <c:layout/>
-      <c:overlay val="0"/>
-    </c:title>
-    <c:autoTitleDeleted val="0"/>
-    <c:plotArea>
-      <c:layout/>
-      <c:barChart>
-        <c:barDir val="bar"/>
-        <c:grouping val="clustered"/>
-        <c:varyColors val="0"/>
-        <c:ser>
-          <c:idx val="0"/>
-          <c:order val="0"/>
-          <c:tx>
-            <c:strRef>
-              <c:f>Sheet1!$B$1</c:f>
-              <c:strCache>
-                <c:ptCount val="1"/>
-                <c:pt idx="0">
-                  <c:v>%</c:v>
-                </c:pt>
-              </c:strCache>
-            </c:strRef>
-          </c:tx>
-          <c:spPr>
-            <a:solidFill>
-              <a:srgbClr val="D4821A"/>
-            </a:solidFill>
-            <a:effectLst/>
-          </c:spPr>
-          <c:invertIfNegative val="0"/>
-          <c:dLbls>
-            <c:numFmt formatCode="0.0&quot;%&quot;" sourceLinked="0"/>
-            <c:txPr>
-              <a:bodyPr/>
-              <a:lstStyle/>
-              <a:p>
-                <a:pPr>
-                  <a:defRPr b="0" i="0" strike="noStrike" sz="900" u="none">
-                    <a:solidFill>
-                      <a:srgbClr val="8A7070"/>
-                    </a:solidFill>
-                    <a:latin typeface="Arial"/>
-                  </a:defRPr>
-                </a:pPr>
-              </a:p>
-            </c:txPr>
-            <c:showLegendKey val="0"/>
-            <c:showVal val="1"/>
-            <c:showCatName val="0"/>
-            <c:showSerName val="0"/>
-            <c:showPercent val="0"/>
-            <c:showBubbleSize val="0"/>
-            <c:showLeaderLines val="0"/>
-          </c:dLbls>
-          <c:cat>
-            <c:multiLvlStrRef>
-              <c:f>Sheet1!$A$2:$A$7</c:f>
-              <c:multiLvlStrCache>
-                <c:ptCount val="6"/>
-                <c:lvl>
-                  <c:pt idx="0">
-                    <c:v>Até 3SM</c:v>
-                  </c:pt>
-                  <c:pt idx="1">
-                    <c:v>3 a 5SM</c:v>
-                  </c:pt>
-                  <c:pt idx="2">
-                    <c:v>5 a 10SM</c:v>
-                  </c:pt>
-                  <c:pt idx="3">
-                    <c:v>10 a 15SM</c:v>
-                  </c:pt>
-                  <c:pt idx="4">
-                    <c:v>15 a 25SM</c:v>
-                  </c:pt>
-                  <c:pt idx="5">
-                    <c:v>Acima 25SM</c:v>
-                  </c:pt>
-                </c:lvl>
-              </c:multiLvlStrCache>
-            </c:multiLvlStrRef>
-          </c:cat>
-          <c:val>
-            <c:numRef>
-              <c:f>Sheet1!$B$2:$B$7</c:f>
-              <c:numCache>
-                <c:formatCode>General</c:formatCode>
-                <c:ptCount val="6"/>
-                <c:pt idx="0">
-                  <c:v>9.8</c:v>
-                </c:pt>
-                <c:pt idx="1">
-                  <c:v>30.8</c:v>
-                </c:pt>
-                <c:pt idx="2">
-                  <c:v>26.6</c:v>
-                </c:pt>
-                <c:pt idx="3">
-                  <c:v>14.7</c:v>
-                </c:pt>
-                <c:pt idx="4">
-                  <c:v>8.4</c:v>
-                </c:pt>
-                <c:pt idx="5">
-                  <c:v>6.3</c:v>
-                </c:pt>
-              </c:numCache>
-            </c:numRef>
-          </c:val>
-        </c:ser>
-        <c:dLbls>
-          <c:numFmt formatCode="0.0&quot;%&quot;" sourceLinked="0"/>
-          <c:txPr>
-            <a:bodyPr/>
-            <a:lstStyle/>
-            <a:p>
-              <a:pPr>
-                <a:defRPr b="0" i="0" strike="noStrike" sz="900" u="none">
-                  <a:solidFill>
-                    <a:srgbClr val="8A7070"/>
-                  </a:solidFill>
-                  <a:latin typeface="Arial"/>
-                </a:defRPr>
-              </a:pPr>
-            </a:p>
-          </c:txPr>
-          <c:showLegendKey val="0"/>
-          <c:showVal val="1"/>
-          <c:showCatName val="0"/>
-          <c:showSerName val="0"/>
-          <c:showPercent val="0"/>
-          <c:showBubbleSize val="0"/>
-          <c:showLeaderLines val="0"/>
-        </c:dLbls>
-        <c:gapWidth val="150"/>
-        <c:overlap val="0"/>
-        <c:axId val="2094734554"/>
-        <c:axId val="2094734552"/>
-        <c:axId val="2094734556"/>
-      </c:barChart>
-      <c:catAx>
-        <c:axId val="2094734554"/>
-        <c:scaling>
-          <c:orientation val="minMax"/>
-        </c:scaling>
-        <c:delete val="0"/>
-        <c:axPos val="l"/>
-        <c:numFmt formatCode="General" sourceLinked="1"/>
-        <c:majorTickMark val="out"/>
-        <c:minorTickMark val="none"/>
-        <c:tickLblPos val="nextTo"/>
-        <c:spPr>
-          <a:ln w="12700" cap="flat">
-            <a:solidFill>
-              <a:srgbClr val="888888"/>
-            </a:solidFill>
-            <a:prstDash val="solid"/>
-            <a:round/>
-          </a:ln>
-        </c:spPr>
-        <c:txPr>
-          <a:bodyPr/>
-          <a:lstStyle/>
-          <a:p>
-            <a:pPr>
-              <a:defRPr sz="1000" b="0" i="0" u="none" strike="noStrike">
-                <a:solidFill>
-                  <a:srgbClr val="8A7070"/>
-                </a:solidFill>
-                <a:latin typeface="Arial"/>
-              </a:defRPr>
-            </a:pPr>
-            <a:endParaRPr lang="en-US"/>
-          </a:p>
-        </c:txPr>
-        <c:crossAx val="2094734552"/>
-        <c:crosses val="autoZero"/>
-        <c:auto val="1"/>
-        <c:lblAlgn val="ctr"/>
-        <c:noMultiLvlLbl val="1"/>
-      </c:catAx>
-      <c:valAx>
-        <c:axId val="2094734552"/>
-        <c:scaling>
-          <c:orientation val="minMax"/>
-        </c:scaling>
-        <c:delete val="1"/>
-        <c:axPos val="b"/>
-        <c:numFmt formatCode="General" sourceLinked="0"/>
-        <c:majorTickMark val="out"/>
-        <c:minorTickMark val="none"/>
-        <c:tickLblPos val="low"/>
-        <c:spPr>
-          <a:ln w="12700" cap="flat">
-            <a:solidFill>
-              <a:srgbClr val="888888"/>
-            </a:solidFill>
-            <a:prstDash val="solid"/>
-            <a:round/>
-          </a:ln>
-        </c:spPr>
-        <c:txPr>
-          <a:bodyPr/>
-          <a:lstStyle/>
-          <a:p>
-            <a:pPr>
-              <a:defRPr sz="1200" b="0" i="0" u="none" strike="noStrike">
-                <a:solidFill>
-                  <a:srgbClr val="000000"/>
-                </a:solidFill>
-                <a:latin typeface="Arial"/>
-              </a:defRPr>
-            </a:pPr>
-            <a:endParaRPr lang="en-US"/>
-          </a:p>
-        </c:txPr>
-        <c:crossAx val="2094734554"/>
-        <c:crosses val="autoZero"/>
-        <c:crossBetween val="between"/>
-      </c:valAx>
-      <c:spPr>
-        <a:noFill/>
-        <a:ln>
-          <a:noFill/>
-        </a:ln>
-        <a:effectLst/>
-      </c:spPr>
-    </c:plotArea>
-    <c:plotVisOnly val="1"/>
-    <c:dispBlanksAs val="span"/>
-  </c:chart>
-  <c:spPr>
-    <a:noFill/>
-    <a:ln>
-      <a:noFill/>
-    </a:ln>
-    <a:effectLst/>
-  </c:spPr>
-  <c:externalData r:id="rId1">
-    <c:autoUpdate val="0"/>
-  </c:externalData>
-</c:chartSpace>
-</file>
-
-<file path=ppt/charts/chart4.xml><?xml version="1.0" encoding="utf-8"?>
-<c:chartSpace xmlns:c="http://schemas.openxmlformats.org/drawingml/2006/chart" xmlns:a="http://schemas.openxmlformats.org/drawingml/2006/main" xmlns:r="http://schemas.openxmlformats.org/officeDocument/2006/relationships">
-  <c:date1904 val="0"/>
-  <c:roundedCorners val="1"/>
-  <c:chart>
-    <c:title>
-      <c:tx>
-        <c:rich>
-          <a:bodyPr/>
-          <a:lstStyle/>
-          <a:p>
-            <a:pPr>
-              <a:defRPr sz="1200" b="0" i="0" u="none" strike="noStrike">
-                <a:solidFill>
-                  <a:srgbClr val="1B2420"/>
-                </a:solidFill>
-                <a:latin typeface="Arial"/>
-              </a:defRPr>
-            </a:pPr>
-            <a:r>
-              <a:rPr sz="1200" b="0" i="0" u="none" strike="noStrike">
-                <a:solidFill>
-                  <a:srgbClr val="1B2420"/>
-                </a:solidFill>
-                <a:latin typeface="Arial"/>
-              </a:rPr>
-              <a:t>Ano de Entrada na Arandu (N de respondentes)</a:t>
-            </a:r>
-          </a:p>
-        </c:rich>
-      </c:tx>
-      <c:layout/>
-      <c:overlay val="0"/>
-    </c:title>
-    <c:autoTitleDeleted val="0"/>
-    <c:plotArea>
-      <c:layout/>
-      <c:barChart>
-        <c:barDir val="col"/>
-        <c:grouping val="clustered"/>
-        <c:varyColors val="0"/>
-        <c:ser>
-          <c:idx val="0"/>
-          <c:order val="0"/>
-          <c:tx>
-            <c:strRef>
-              <c:f>Sheet1!$B$1</c:f>
-              <c:strCache>
-                <c:ptCount val="1"/>
-                <c:pt idx="0">
-                  <c:v>N</c:v>
-                </c:pt>
-              </c:strCache>
-            </c:strRef>
-          </c:tx>
-          <c:spPr>
-            <a:solidFill>
-              <a:srgbClr val="2D6A4F"/>
-            </a:solidFill>
-            <a:effectLst/>
-          </c:spPr>
-          <c:invertIfNegative val="0"/>
-          <c:dLbls>
-            <c:numFmt formatCode="#,##0" sourceLinked="0"/>
-            <c:txPr>
-              <a:bodyPr/>
-              <a:lstStyle/>
-              <a:p>
-                <a:pPr>
-                  <a:defRPr b="0" i="0" strike="noStrike" sz="900" u="none">
-                    <a:solidFill>
-                      <a:srgbClr val="8A7070"/>
-                    </a:solidFill>
-                    <a:latin typeface="Arial"/>
-                  </a:defRPr>
-                </a:pPr>
-              </a:p>
-            </c:txPr>
-            <c:showLegendKey val="0"/>
-            <c:showVal val="1"/>
-            <c:showCatName val="0"/>
-            <c:showSerName val="0"/>
-            <c:showPercent val="0"/>
-            <c:showBubbleSize val="0"/>
-            <c:showLeaderLines val="0"/>
-          </c:dLbls>
-          <c:cat>
-            <c:multiLvlStrRef>
-              <c:f>Sheet1!$A$2:$A$12</c:f>
-              <c:multiLvlStrCache>
-                <c:ptCount val="11"/>
-                <c:lvl>
-                  <c:pt idx="0">
-                    <c:v>Antes
-2015</c:v>
-                  </c:pt>
-                  <c:pt idx="1">
-                    <c:v>2016</c:v>
-                  </c:pt>
-                  <c:pt idx="2">
-                    <c:v>2017</c:v>
-                  </c:pt>
-                  <c:pt idx="3">
-                    <c:v>2018</c:v>
-                  </c:pt>
-                  <c:pt idx="4">
-                    <c:v>2019</c:v>
-                  </c:pt>
-                  <c:pt idx="5">
-                    <c:v>2020</c:v>
-                  </c:pt>
-                  <c:pt idx="6">
-                    <c:v>2021</c:v>
-                  </c:pt>
-                  <c:pt idx="7">
-                    <c:v>2022</c:v>
-                  </c:pt>
-                  <c:pt idx="8">
-                    <c:v>2023</c:v>
-                  </c:pt>
-                  <c:pt idx="9">
-                    <c:v>2024</c:v>
-                  </c:pt>
-                  <c:pt idx="10">
-                    <c:v>2025</c:v>
-                  </c:pt>
-                </c:lvl>
-              </c:multiLvlStrCache>
-            </c:multiLvlStrRef>
-          </c:cat>
-          <c:val>
-            <c:numRef>
-              <c:f>Sheet1!$B$2:$B$12</c:f>
-              <c:numCache>
-                <c:formatCode>General</c:formatCode>
-                <c:ptCount val="11"/>
-                <c:pt idx="0">
-                  <c:v>15</c:v>
-                </c:pt>
-                <c:pt idx="1">
-                  <c:v>3</c:v>
-                </c:pt>
-                <c:pt idx="2">
-                  <c:v>5</c:v>
-                </c:pt>
-                <c:pt idx="3">
-                  <c:v>4</c:v>
-                </c:pt>
-                <c:pt idx="4">
-                  <c:v>6</c:v>
-                </c:pt>
-                <c:pt idx="5">
-                  <c:v>12</c:v>
-                </c:pt>
-                <c:pt idx="6">
-                  <c:v>14</c:v>
-                </c:pt>
-                <c:pt idx="7">
-                  <c:v>17</c:v>
-                </c:pt>
-                <c:pt idx="8">
-                  <c:v>12</c:v>
-                </c:pt>
-                <c:pt idx="9">
-                  <c:v>17</c:v>
-                </c:pt>
-                <c:pt idx="10">
-                  <c:v>38</c:v>
-                </c:pt>
-              </c:numCache>
-            </c:numRef>
-          </c:val>
-        </c:ser>
-        <c:dLbls>
-          <c:numFmt formatCode="#,##0" sourceLinked="0"/>
-          <c:txPr>
-            <a:bodyPr/>
-            <a:lstStyle/>
-            <a:p>
-              <a:pPr>
-                <a:defRPr b="0" i="0" strike="noStrike" sz="900" u="none">
-                  <a:solidFill>
-                    <a:srgbClr val="8A7070"/>
-                  </a:solidFill>
-                  <a:latin typeface="Arial"/>
-                </a:defRPr>
-              </a:pPr>
-            </a:p>
-          </c:txPr>
-          <c:showLegendKey val="0"/>
-          <c:showVal val="1"/>
-          <c:showCatName val="0"/>
-          <c:showSerName val="0"/>
-          <c:showPercent val="0"/>
-          <c:showBubbleSize val="0"/>
-          <c:showLeaderLines val="0"/>
-        </c:dLbls>
-        <c:gapWidth val="40"/>
-        <c:overlap val="0"/>
-        <c:axId val="2094734554"/>
-        <c:axId val="2094734552"/>
-        <c:axId val="2094734556"/>
-      </c:barChart>
-      <c:catAx>
-        <c:axId val="2094734554"/>
-        <c:scaling>
-          <c:orientation val="minMax"/>
-        </c:scaling>
-        <c:delete val="0"/>
-        <c:axPos val="b"/>
-        <c:numFmt formatCode="General" sourceLinked="1"/>
-        <c:majorTickMark val="out"/>
-        <c:minorTickMark val="none"/>
-        <c:tickLblPos val="low"/>
-        <c:spPr>
-          <a:ln w="12700" cap="flat">
-            <a:solidFill>
-              <a:srgbClr val="888888"/>
-            </a:solidFill>
-            <a:prstDash val="solid"/>
-            <a:round/>
-          </a:ln>
-        </c:spPr>
-        <c:txPr>
-          <a:bodyPr/>
-          <a:lstStyle/>
-          <a:p>
-            <a:pPr>
-              <a:defRPr sz="900" b="0" i="0" u="none" strike="noStrike">
-                <a:solidFill>
-                  <a:srgbClr val="8A7070"/>
-                </a:solidFill>
-                <a:latin typeface="Arial"/>
-              </a:defRPr>
-            </a:pPr>
-            <a:endParaRPr lang="en-US"/>
-          </a:p>
-        </c:txPr>
-        <c:crossAx val="2094734552"/>
-        <c:crosses val="autoZero"/>
-        <c:auto val="1"/>
-        <c:lblAlgn val="ctr"/>
-        <c:noMultiLvlLbl val="1"/>
-      </c:catAx>
-      <c:valAx>
-        <c:axId val="2094734552"/>
-        <c:scaling>
-          <c:orientation val="minMax"/>
-        </c:scaling>
-        <c:delete val="1"/>
-        <c:axPos val="l"/>
-        <c:numFmt formatCode="General" sourceLinked="0"/>
-        <c:majorTickMark val="out"/>
-        <c:minorTickMark val="none"/>
-        <c:tickLblPos val="nextTo"/>
-        <c:spPr>
-          <a:ln w="12700" cap="flat">
-            <a:solidFill>
-              <a:srgbClr val="888888"/>
-            </a:solidFill>
-            <a:prstDash val="solid"/>
-            <a:round/>
-          </a:ln>
-        </c:spPr>
-        <c:txPr>
-          <a:bodyPr/>
-          <a:lstStyle/>
-          <a:p>
-            <a:pPr>
-              <a:defRPr sz="1200" b="0" i="0" u="none" strike="noStrike">
-                <a:solidFill>
-                  <a:srgbClr val="000000"/>
-                </a:solidFill>
-                <a:latin typeface="Arial"/>
-              </a:defRPr>
-            </a:pPr>
-            <a:endParaRPr lang="en-US"/>
-          </a:p>
-        </c:txPr>
-        <c:crossAx val="2094734554"/>
-        <c:crosses val="autoZero"/>
-        <c:crossBetween val="between"/>
-      </c:valAx>
-      <c:spPr>
-        <a:noFill/>
-        <a:ln>
-          <a:noFill/>
-        </a:ln>
-        <a:effectLst/>
-      </c:spPr>
-    </c:plotArea>
-    <c:plotVisOnly val="1"/>
-    <c:dispBlanksAs val="span"/>
-  </c:chart>
-  <c:spPr>
-    <a:noFill/>
-    <a:ln>
-      <a:noFill/>
-    </a:ln>
-    <a:effectLst/>
-  </c:spPr>
-  <c:externalData r:id="rId1">
-    <c:autoUpdate val="0"/>
-  </c:externalData>
-</c:chartSpace>
-</file>
-
-<file path=ppt/charts/chart5.xml><?xml version="1.0" encoding="utf-8"?>
-<c:chartSpace xmlns:c="http://schemas.openxmlformats.org/drawingml/2006/chart" xmlns:a="http://schemas.openxmlformats.org/drawingml/2006/main" xmlns:r="http://schemas.openxmlformats.org/officeDocument/2006/relationships">
-  <c:date1904 val="0"/>
-  <c:roundedCorners val="1"/>
-  <c:chart>
-    <c:autoTitleDeleted val="1"/>
-    <c:plotArea>
-      <c:layout/>
-      <c:barChart>
-        <c:barDir val="bar"/>
-        <c:grouping val="stacked"/>
-        <c:varyColors val="0"/>
-        <c:ser>
-          <c:idx val="0"/>
-          <c:order val="0"/>
-          <c:tx>
-            <c:strRef>
-              <c:f>Sheet1!$B$1</c:f>
-              <c:strCache>
-                <c:ptCount val="1"/>
-                <c:pt idx="0">
-                  <c:v>Adaptando (0,7%)</c:v>
-                </c:pt>
-              </c:strCache>
-            </c:strRef>
-          </c:tx>
-          <c:spPr>
-            <a:solidFill>
-              <a:srgbClr val="FCA311"/>
-            </a:solidFill>
-            <a:effectLst/>
-          </c:spPr>
-          <c:invertIfNegative val="0"/>
-          <c:dLbls>
-            <c:numFmt formatCode="0.0&quot;%&quot;" sourceLinked="0"/>
-            <c:txPr>
-              <a:bodyPr/>
-              <a:lstStyle/>
-              <a:p>
-                <a:pPr>
-                  <a:defRPr b="0" i="0" strike="noStrike" sz="1000" u="none">
-                    <a:solidFill>
-                      <a:srgbClr val="FFFFFF"/>
-                    </a:solidFill>
-                    <a:latin typeface="Arial"/>
-                  </a:defRPr>
-                </a:pPr>
-              </a:p>
-            </c:txPr>
-            <c:dLblPos val="ctr"/>
-            <c:showLegendKey val="0"/>
-            <c:showVal val="1"/>
-            <c:showCatName val="0"/>
-            <c:showSerName val="0"/>
-            <c:showPercent val="0"/>
-            <c:showBubbleSize val="0"/>
-            <c:showLeaderLines val="0"/>
-          </c:dLbls>
-          <c:cat>
-            <c:multiLvlStrRef>
-              <c:f>Sheet1!$A$2:$A$2</c:f>
-              <c:multiLvlStrCache>
-                <c:ptCount val="1"/>
-                <c:lvl>
-                  <c:pt idx="0">
-                    <c:v>Distribuição</c:v>
-                  </c:pt>
-                </c:lvl>
-              </c:multiLvlStrCache>
-            </c:multiLvlStrRef>
-          </c:cat>
-          <c:val>
-            <c:numRef>
-              <c:f>Sheet1!$B$2:$B$2</c:f>
-              <c:numCache>
-                <c:formatCode>General</c:formatCode>
-                <c:ptCount val="1"/>
-                <c:pt idx="0">
-                  <c:v>0.7</c:v>
-                </c:pt>
-              </c:numCache>
-            </c:numRef>
-          </c:val>
-        </c:ser>
-        <c:ser>
-          <c:idx val="1"/>
-          <c:order val="1"/>
-          <c:tx>
-            <c:strRef>
-              <c:f>Sheet1!$C$1</c:f>
-              <c:strCache>
-                <c:ptCount val="1"/>
-                <c:pt idx="0">
-                  <c:v>Inserindo (32,2%)</c:v>
-                </c:pt>
-              </c:strCache>
-            </c:strRef>
-          </c:tx>
-          <c:spPr>
-            <a:solidFill>
-              <a:srgbClr val="C04060"/>
-            </a:solidFill>
-            <a:effectLst/>
-          </c:spPr>
-          <c:invertIfNegative val="0"/>
-          <c:dLbls>
-            <c:numFmt formatCode="0.0&quot;%&quot;" sourceLinked="0"/>
-            <c:txPr>
-              <a:bodyPr/>
-              <a:lstStyle/>
-              <a:p>
-                <a:pPr>
-                  <a:defRPr b="0" i="0" strike="noStrike" sz="1000" u="none">
-                    <a:solidFill>
-                      <a:srgbClr val="FFFFFF"/>
-                    </a:solidFill>
-                    <a:latin typeface="Arial"/>
-                  </a:defRPr>
-                </a:pPr>
-              </a:p>
-            </c:txPr>
-            <c:dLblPos val="ctr"/>
-            <c:showLegendKey val="0"/>
-            <c:showVal val="1"/>
-            <c:showCatName val="0"/>
-            <c:showSerName val="0"/>
-            <c:showPercent val="0"/>
-            <c:showBubbleSize val="0"/>
-            <c:showLeaderLines val="0"/>
-          </c:dLbls>
-          <c:cat>
-            <c:multiLvlStrRef>
-              <c:f>Sheet1!$A$2:$A$2</c:f>
-              <c:multiLvlStrCache>
-                <c:ptCount val="1"/>
-                <c:lvl>
-                  <c:pt idx="0">
-                    <c:v>Distribuição</c:v>
-                  </c:pt>
-                </c:lvl>
-              </c:multiLvlStrCache>
-            </c:multiLvlStrRef>
-          </c:cat>
-          <c:val>
-            <c:numRef>
-              <c:f>Sheet1!$C$2:$C$2</c:f>
-              <c:numCache>
-                <c:formatCode>General</c:formatCode>
-                <c:ptCount val="1"/>
-                <c:pt idx="0">
-                  <c:v>32.2</c:v>
-                </c:pt>
-              </c:numCache>
-            </c:numRef>
-          </c:val>
-        </c:ser>
-        <c:ser>
-          <c:idx val="2"/>
-          <c:order val="2"/>
-          <c:tx>
-            <c:strRef>
-              <c:f>Sheet1!$D$1</c:f>
-              <c:strCache>
-                <c:ptCount val="1"/>
-                <c:pt idx="0">
-                  <c:v>Comprometido (44,8%)</c:v>
-                </c:pt>
-              </c:strCache>
-            </c:strRef>
-          </c:tx>
-          <c:spPr>
-            <a:solidFill>
-              <a:srgbClr val="2A9D8F"/>
-            </a:solidFill>
-            <a:effectLst/>
-          </c:spPr>
-          <c:invertIfNegative val="0"/>
-          <c:dLbls>
-            <c:numFmt formatCode="0.0&quot;%&quot;" sourceLinked="0"/>
-            <c:txPr>
-              <a:bodyPr/>
-              <a:lstStyle/>
-              <a:p>
-                <a:pPr>
-                  <a:defRPr b="0" i="0" strike="noStrike" sz="1000" u="none">
-                    <a:solidFill>
-                      <a:srgbClr val="FFFFFF"/>
-                    </a:solidFill>
-                    <a:latin typeface="Arial"/>
-                  </a:defRPr>
-                </a:pPr>
-              </a:p>
-            </c:txPr>
-            <c:dLblPos val="ctr"/>
-            <c:showLegendKey val="0"/>
-            <c:showVal val="1"/>
-            <c:showCatName val="0"/>
-            <c:showSerName val="0"/>
-            <c:showPercent val="0"/>
-            <c:showBubbleSize val="0"/>
-            <c:showLeaderLines val="0"/>
-          </c:dLbls>
-          <c:cat>
-            <c:multiLvlStrRef>
-              <c:f>Sheet1!$A$2:$A$2</c:f>
-              <c:multiLvlStrCache>
-                <c:ptCount val="1"/>
-                <c:lvl>
-                  <c:pt idx="0">
-                    <c:v>Distribuição</c:v>
-                  </c:pt>
-                </c:lvl>
-              </c:multiLvlStrCache>
-            </c:multiLvlStrRef>
-          </c:cat>
-          <c:val>
-            <c:numRef>
-              <c:f>Sheet1!$D$2:$D$2</c:f>
-              <c:numCache>
-                <c:formatCode>General</c:formatCode>
-                <c:ptCount val="1"/>
-                <c:pt idx="0">
-                  <c:v>44.8</c:v>
-                </c:pt>
-              </c:numCache>
-            </c:numRef>
-          </c:val>
-        </c:ser>
-        <c:ser>
-          <c:idx val="3"/>
-          <c:order val="3"/>
-          <c:tx>
-            <c:strRef>
-              <c:f>Sheet1!$E$1</c:f>
-              <c:strCache>
-                <c:ptCount val="1"/>
-                <c:pt idx="0">
-                  <c:v>Ativo no Motivo (11,9%)</c:v>
-                </c:pt>
-              </c:strCache>
-            </c:strRef>
-          </c:tx>
-          <c:spPr>
-            <a:solidFill>
-              <a:srgbClr val="3B82C4"/>
-            </a:solidFill>
-            <a:effectLst/>
-          </c:spPr>
-          <c:invertIfNegative val="0"/>
-          <c:dLbls>
-            <c:numFmt formatCode="0.0&quot;%&quot;" sourceLinked="0"/>
-            <c:txPr>
-              <a:bodyPr/>
-              <a:lstStyle/>
-              <a:p>
-                <a:pPr>
-                  <a:defRPr b="0" i="0" strike="noStrike" sz="1000" u="none">
-                    <a:solidFill>
-                      <a:srgbClr val="FFFFFF"/>
-                    </a:solidFill>
-                    <a:latin typeface="Arial"/>
-                  </a:defRPr>
-                </a:pPr>
-              </a:p>
-            </c:txPr>
-            <c:dLblPos val="ctr"/>
-            <c:showLegendKey val="0"/>
-            <c:showVal val="1"/>
-            <c:showCatName val="0"/>
-            <c:showSerName val="0"/>
-            <c:showPercent val="0"/>
-            <c:showBubbleSize val="0"/>
-            <c:showLeaderLines val="0"/>
-          </c:dLbls>
-          <c:cat>
-            <c:multiLvlStrRef>
-              <c:f>Sheet1!$A$2:$A$2</c:f>
-              <c:multiLvlStrCache>
-                <c:ptCount val="1"/>
-                <c:lvl>
-                  <c:pt idx="0">
-                    <c:v>Distribuição</c:v>
-                  </c:pt>
-                </c:lvl>
-              </c:multiLvlStrCache>
-            </c:multiLvlStrRef>
-          </c:cat>
-          <c:val>
-            <c:numRef>
-              <c:f>Sheet1!$E$2:$E$2</c:f>
-              <c:numCache>
-                <c:formatCode>General</c:formatCode>
-                <c:ptCount val="1"/>
-                <c:pt idx="0">
-                  <c:v>11.9</c:v>
-                </c:pt>
-              </c:numCache>
-            </c:numRef>
-          </c:val>
-        </c:ser>
-        <c:ser>
-          <c:idx val="4"/>
-          <c:order val="4"/>
-          <c:tx>
-            <c:strRef>
-              <c:f>Sheet1!$F$1</c:f>
-              <c:strCache>
-                <c:ptCount val="1"/>
-                <c:pt idx="0">
-                  <c:v>Embaixador (4,9%)</c:v>
-                </c:pt>
-              </c:strCache>
-            </c:strRef>
-          </c:tx>
-          <c:spPr>
-            <a:solidFill>
-              <a:srgbClr val="1D5B7A"/>
-            </a:solidFill>
-            <a:effectLst/>
-          </c:spPr>
-          <c:invertIfNegative val="0"/>
-          <c:dLbls>
-            <c:numFmt formatCode="0.0&quot;%&quot;" sourceLinked="0"/>
-            <c:txPr>
-              <a:bodyPr/>
-              <a:lstStyle/>
-              <a:p>
-                <a:pPr>
-                  <a:defRPr b="0" i="0" strike="noStrike" sz="1000" u="none">
-                    <a:solidFill>
-                      <a:srgbClr val="FFFFFF"/>
-                    </a:solidFill>
-                    <a:latin typeface="Arial"/>
-                  </a:defRPr>
-                </a:pPr>
-              </a:p>
-            </c:txPr>
-            <c:dLblPos val="ctr"/>
-            <c:showLegendKey val="0"/>
-            <c:showVal val="1"/>
-            <c:showCatName val="0"/>
-            <c:showSerName val="0"/>
-            <c:showPercent val="0"/>
-            <c:showBubbleSize val="0"/>
-            <c:showLeaderLines val="0"/>
-          </c:dLbls>
-          <c:cat>
-            <c:multiLvlStrRef>
-              <c:f>Sheet1!$A$2:$A$2</c:f>
-              <c:multiLvlStrCache>
-                <c:ptCount val="1"/>
-                <c:lvl>
-                  <c:pt idx="0">
-                    <c:v>Distribuição</c:v>
-                  </c:pt>
-                </c:lvl>
-              </c:multiLvlStrCache>
-            </c:multiLvlStrRef>
-          </c:cat>
-          <c:val>
-            <c:numRef>
-              <c:f>Sheet1!$F$2:$F$2</c:f>
-              <c:numCache>
-                <c:formatCode>General</c:formatCode>
-                <c:ptCount val="1"/>
-                <c:pt idx="0">
-                  <c:v>4.9</c:v>
-                </c:pt>
-              </c:numCache>
-            </c:numRef>
-          </c:val>
-        </c:ser>
-        <c:ser>
-          <c:idx val="5"/>
-          <c:order val="5"/>
-          <c:tx>
-            <c:strRef>
-              <c:f>Sheet1!$G$1</c:f>
-              <c:strCache>
-                <c:ptCount val="1"/>
-                <c:pt idx="0">
-                  <c:v>Cocriador (5,6%)</c:v>
-                </c:pt>
-              </c:strCache>
-            </c:strRef>
-          </c:tx>
-          <c:spPr>
-            <a:solidFill>
-              <a:srgbClr val="6B46C1"/>
-            </a:solidFill>
-            <a:effectLst/>
-          </c:spPr>
-          <c:invertIfNegative val="0"/>
-          <c:dLbls>
-            <c:numFmt formatCode="0.0&quot;%&quot;" sourceLinked="0"/>
-            <c:txPr>
-              <a:bodyPr/>
-              <a:lstStyle/>
-              <a:p>
-                <a:pPr>
-                  <a:defRPr b="0" i="0" strike="noStrike" sz="1000" u="none">
-                    <a:solidFill>
-                      <a:srgbClr val="FFFFFF"/>
-                    </a:solidFill>
-                    <a:latin typeface="Arial"/>
-                  </a:defRPr>
-                </a:pPr>
-              </a:p>
-            </c:txPr>
-            <c:dLblPos val="ctr"/>
-            <c:showLegendKey val="0"/>
-            <c:showVal val="1"/>
-            <c:showCatName val="0"/>
-            <c:showSerName val="0"/>
-            <c:showPercent val="0"/>
-            <c:showBubbleSize val="0"/>
-            <c:showLeaderLines val="0"/>
-          </c:dLbls>
-          <c:cat>
-            <c:multiLvlStrRef>
-              <c:f>Sheet1!$A$2:$A$2</c:f>
-              <c:multiLvlStrCache>
-                <c:ptCount val="1"/>
-                <c:lvl>
-                  <c:pt idx="0">
-                    <c:v>Distribuição</c:v>
-                  </c:pt>
-                </c:lvl>
-              </c:multiLvlStrCache>
-            </c:multiLvlStrRef>
-          </c:cat>
-          <c:val>
-            <c:numRef>
-              <c:f>Sheet1!$G$2:$G$2</c:f>
-              <c:numCache>
-                <c:formatCode>General</c:formatCode>
-                <c:ptCount val="1"/>
-                <c:pt idx="0">
-                  <c:v>5.6</c:v>
-                </c:pt>
-              </c:numCache>
-            </c:numRef>
-          </c:val>
-        </c:ser>
-        <c:dLbls>
-          <c:numFmt formatCode="0.0&quot;%&quot;" sourceLinked="0"/>
-          <c:txPr>
-            <a:bodyPr/>
-            <a:lstStyle/>
-            <a:p>
-              <a:pPr>
-                <a:defRPr b="0" i="0" strike="noStrike" sz="1000" u="none">
-                  <a:solidFill>
-                    <a:srgbClr val="FFFFFF"/>
-                  </a:solidFill>
-                  <a:latin typeface="Arial"/>
-                </a:defRPr>
-              </a:pPr>
-            </a:p>
-          </c:txPr>
-          <c:dLblPos val="ctr"/>
-          <c:showLegendKey val="0"/>
-          <c:showVal val="1"/>
-          <c:showCatName val="0"/>
-          <c:showSerName val="0"/>
-          <c:showPercent val="0"/>
-          <c:showBubbleSize val="0"/>
-          <c:showLeaderLines val="0"/>
-        </c:dLbls>
-        <c:gapWidth val="50"/>
-        <c:overlap val="100"/>
-        <c:axId val="2094734554"/>
-        <c:axId val="2094734552"/>
-        <c:axId val="2094734556"/>
-      </c:barChart>
-      <c:catAx>
-        <c:axId val="2094734554"/>
-        <c:scaling>
-          <c:orientation val="minMax"/>
-        </c:scaling>
-        <c:delete val="1"/>
-        <c:axPos val="l"/>
-        <c:numFmt formatCode="General" sourceLinked="1"/>
-        <c:majorTickMark val="out"/>
-        <c:minorTickMark val="none"/>
-        <c:tickLblPos val="nextTo"/>
-        <c:spPr>
-          <a:ln w="12700" cap="flat">
-            <a:solidFill>
-              <a:srgbClr val="888888"/>
-            </a:solidFill>
-            <a:prstDash val="solid"/>
-            <a:round/>
-          </a:ln>
-        </c:spPr>
-        <c:txPr>
-          <a:bodyPr/>
-          <a:lstStyle/>
-          <a:p>
-            <a:pPr>
-              <a:defRPr sz="1200" b="0" i="0" u="none" strike="noStrike">
-                <a:solidFill>
-                  <a:srgbClr val="000000"/>
-                </a:solidFill>
-                <a:latin typeface="Arial"/>
-              </a:defRPr>
-            </a:pPr>
-            <a:endParaRPr lang="en-US"/>
-          </a:p>
-        </c:txPr>
-        <c:crossAx val="2094734552"/>
-        <c:crosses val="autoZero"/>
-        <c:auto val="1"/>
-        <c:lblAlgn val="ctr"/>
-        <c:noMultiLvlLbl val="1"/>
-      </c:catAx>
-      <c:valAx>
-        <c:axId val="2094734552"/>
-        <c:scaling>
-          <c:orientation val="minMax"/>
-        </c:scaling>
-        <c:delete val="1"/>
-        <c:axPos val="b"/>
-        <c:numFmt formatCode="General" sourceLinked="0"/>
-        <c:majorTickMark val="out"/>
-        <c:minorTickMark val="none"/>
-        <c:tickLblPos val="low"/>
-        <c:spPr>
-          <a:ln w="12700" cap="flat">
-            <a:solidFill>
-              <a:srgbClr val="888888"/>
-            </a:solidFill>
-            <a:prstDash val="solid"/>
-            <a:round/>
-          </a:ln>
-        </c:spPr>
-        <c:txPr>
-          <a:bodyPr/>
-          <a:lstStyle/>
-          <a:p>
-            <a:pPr>
-              <a:defRPr sz="1200" b="0" i="0" u="none" strike="noStrike">
-                <a:solidFill>
-                  <a:srgbClr val="000000"/>
-                </a:solidFill>
-                <a:latin typeface="Arial"/>
-              </a:defRPr>
-            </a:pPr>
-            <a:endParaRPr lang="en-US"/>
-          </a:p>
-        </c:txPr>
-        <c:crossAx val="2094734554"/>
-        <c:crosses val="autoZero"/>
-        <c:crossBetween val="between"/>
-      </c:valAx>
-      <c:spPr>
-        <a:noFill/>
-        <a:ln>
-          <a:noFill/>
-        </a:ln>
-        <a:effectLst/>
-      </c:spPr>
-    </c:plotArea>
-    <c:legend>
-      <c:legendPos val="b"/>
-      <c:overlay val="0"/>
-      <c:txPr>
-        <a:bodyPr/>
-        <a:lstStyle/>
-        <a:p>
-          <a:pPr>
-            <a:defRPr sz="1100">
-              <a:solidFill>
-                <a:srgbClr val="1B2420"/>
-              </a:solidFill>
-            </a:defRPr>
-          </a:pPr>
-          <a:endParaRPr lang="en-US"/>
-        </a:p>
-      </c:txPr>
-    </c:legend>
-    <c:plotVisOnly val="1"/>
-    <c:dispBlanksAs val="span"/>
-  </c:chart>
-  <c:spPr>
-    <a:noFill/>
-    <a:ln>
-      <a:noFill/>
-    </a:ln>
-    <a:effectLst/>
-  </c:spPr>
-  <c:externalData r:id="rId1">
-    <c:autoUpdate val="0"/>
-  </c:externalData>
-</c:chartSpace>
-</file>
-
-<file path=ppt/charts/chart6.xml><?xml version="1.0" encoding="utf-8"?>
-<c:chartSpace xmlns:c="http://schemas.openxmlformats.org/drawingml/2006/chart" xmlns:a="http://schemas.openxmlformats.org/drawingml/2006/main" xmlns:r="http://schemas.openxmlformats.org/officeDocument/2006/relationships">
-  <c:date1904 val="0"/>
-  <c:roundedCorners val="1"/>
-  <c:chart>
-    <c:autoTitleDeleted val="1"/>
-    <c:plotArea>
-      <c:layout/>
-      <c:lineChart>
-        <c:varyColors val="0"/>
-        <c:ser>
-          <c:idx val="0"/>
-          <c:order val="0"/>
-          <c:tx>
-            <c:strRef>
-              <c:f>Sheet1!$B$1</c:f>
-              <c:strCache>
-                <c:ptCount val="1"/>
-                <c:pt idx="0">
-                  <c:v>Conhecimento Institucional</c:v>
-                </c:pt>
-              </c:strCache>
-            </c:strRef>
-          </c:tx>
-          <c:spPr>
-            <a:solidFill>
-              <a:srgbClr val="A83048"/>
-            </a:solidFill>
-            <a:ln w="31750" cap="flat">
-              <a:solidFill>
-                <a:srgbClr val="A83048"/>
-              </a:solidFill>
-              <a:prstDash val="solid"/>
-              <a:round/>
-            </a:ln>
-            <a:effectLst/>
-          </c:spPr>
-          <c:invertIfNegative val="0"/>
-          <c:dLbls>
-            <c:numFmt formatCode="0&quot;%&quot;" sourceLinked="0"/>
-            <c:txPr>
-              <a:bodyPr/>
-              <a:lstStyle/>
-              <a:p>
-                <a:pPr>
-                  <a:defRPr b="0" i="0" strike="noStrike" sz="900" u="none">
-                    <a:solidFill>
-                      <a:srgbClr val="8A7070"/>
-                    </a:solidFill>
-                    <a:latin typeface="Arial"/>
-                  </a:defRPr>
-                </a:pPr>
-              </a:p>
-            </c:txPr>
-            <c:showLegendKey val="0"/>
-            <c:showVal val="1"/>
-            <c:showCatName val="0"/>
-            <c:showSerName val="0"/>
-            <c:showPercent val="0"/>
-            <c:showBubbleSize val="0"/>
-            <c:showLeaderLines val="0"/>
-          </c:dLbls>
-          <c:marker>
-            <c:symbol val="circle"/>
-            <c:size val="6"/>
-            <c:spPr>
-              <a:solidFill>
-                <a:srgbClr val="A83048"/>
-              </a:solidFill>
-              <a:ln w="9525" cap="flat">
-                <a:solidFill>
-                  <a:srgbClr val="A83048"/>
-                </a:solidFill>
-                <a:prstDash val="solid"/>
-                <a:round/>
-              </a:ln>
-              <a:effectLst/>
-            </c:spPr>
-          </c:marker>
-          <c:cat>
-            <c:multiLvlStrRef>
-              <c:f>Sheet1!$A$2:$A$5</c:f>
-              <c:multiLvlStrCache>
-                <c:ptCount val="4"/>
-                <c:lvl>
-                  <c:pt idx="0">
-                    <c:v>Inserindo</c:v>
-                  </c:pt>
-                  <c:pt idx="1">
-                    <c:v>Comprometido</c:v>
-                  </c:pt>
-                  <c:pt idx="2">
-                    <c:v>Ativo no Motivo</c:v>
-                  </c:pt>
-                  <c:pt idx="3">
-                    <c:v>Emb + Coc</c:v>
-                  </c:pt>
-                </c:lvl>
-              </c:multiLvlStrCache>
-            </c:multiLvlStrRef>
-          </c:cat>
-          <c:val>
-            <c:numRef>
-              <c:f>Sheet1!$B$2:$B$5</c:f>
-              <c:numCache>
-                <c:formatCode>General</c:formatCode>
-                <c:ptCount val="4"/>
-                <c:pt idx="0">
-                  <c:v>66.5</c:v>
-                </c:pt>
-                <c:pt idx="1">
-                  <c:v>74.1</c:v>
-                </c:pt>
-                <c:pt idx="2">
-                  <c:v>66.2</c:v>
-                </c:pt>
-                <c:pt idx="3">
-                  <c:v>100</c:v>
-                </c:pt>
-              </c:numCache>
-            </c:numRef>
-          </c:val>
-          <c:smooth val="0"/>
-        </c:ser>
-        <c:ser>
-          <c:idx val="1"/>
-          <c:order val="1"/>
-          <c:tx>
-            <c:strRef>
-              <c:f>Sheet1!$C$1</c:f>
-              <c:strCache>
-                <c:ptCount val="1"/>
-                <c:pt idx="0">
-                  <c:v>Pertencimento Cultural</c:v>
-                </c:pt>
-              </c:strCache>
-            </c:strRef>
-          </c:tx>
-          <c:spPr>
-            <a:solidFill>
-              <a:srgbClr val="2D6A4F"/>
-            </a:solidFill>
-            <a:ln w="31750" cap="flat">
-              <a:solidFill>
-                <a:srgbClr val="2D6A4F"/>
-              </a:solidFill>
-              <a:prstDash val="solid"/>
-              <a:round/>
-            </a:ln>
-            <a:effectLst/>
-          </c:spPr>
-          <c:invertIfNegative val="0"/>
-          <c:dLbls>
-            <c:numFmt formatCode="0&quot;%&quot;" sourceLinked="0"/>
-            <c:txPr>
-              <a:bodyPr/>
-              <a:lstStyle/>
-              <a:p>
-                <a:pPr>
-                  <a:defRPr b="0" i="0" strike="noStrike" sz="900" u="none">
-                    <a:solidFill>
-                      <a:srgbClr val="8A7070"/>
-                    </a:solidFill>
-                    <a:latin typeface="Arial"/>
-                  </a:defRPr>
-                </a:pPr>
-              </a:p>
-            </c:txPr>
-            <c:showLegendKey val="0"/>
-            <c:showVal val="1"/>
-            <c:showCatName val="0"/>
-            <c:showSerName val="0"/>
-            <c:showPercent val="0"/>
-            <c:showBubbleSize val="0"/>
-            <c:showLeaderLines val="0"/>
-          </c:dLbls>
-          <c:marker>
-            <c:symbol val="circle"/>
-            <c:size val="6"/>
-            <c:spPr>
-              <a:solidFill>
-                <a:srgbClr val="2D6A4F"/>
-              </a:solidFill>
-              <a:ln w="9525" cap="flat">
-                <a:solidFill>
-                  <a:srgbClr val="2D6A4F"/>
-                </a:solidFill>
-                <a:prstDash val="solid"/>
-                <a:round/>
-              </a:ln>
-              <a:effectLst/>
-            </c:spPr>
-          </c:marker>
-          <c:cat>
-            <c:multiLvlStrRef>
-              <c:f>Sheet1!$A$2:$A$5</c:f>
-              <c:multiLvlStrCache>
-                <c:ptCount val="4"/>
-                <c:lvl>
-                  <c:pt idx="0">
-                    <c:v>Inserindo</c:v>
-                  </c:pt>
-                  <c:pt idx="1">
-                    <c:v>Comprometido</c:v>
-                  </c:pt>
-                  <c:pt idx="2">
-                    <c:v>Ativo no Motivo</c:v>
-                  </c:pt>
-                  <c:pt idx="3">
-                    <c:v>Emb + Coc</c:v>
-                  </c:pt>
-                </c:lvl>
-              </c:multiLvlStrCache>
-            </c:multiLvlStrRef>
-          </c:cat>
-          <c:val>
-            <c:numRef>
-              <c:f>Sheet1!$C$2:$C$5</c:f>
-              <c:numCache>
-                <c:formatCode>General</c:formatCode>
-                <c:ptCount val="4"/>
-                <c:pt idx="0">
-                  <c:v>98.4</c:v>
-                </c:pt>
-                <c:pt idx="1">
-                  <c:v>98.4</c:v>
-                </c:pt>
-                <c:pt idx="2">
-                  <c:v>98.5</c:v>
-                </c:pt>
-                <c:pt idx="3">
-                  <c:v>100</c:v>
-                </c:pt>
-              </c:numCache>
-            </c:numRef>
-          </c:val>
-          <c:smooth val="0"/>
-        </c:ser>
-        <c:ser>
-          <c:idx val="2"/>
-          <c:order val="2"/>
-          <c:tx>
-            <c:strRef>
-              <c:f>Sheet1!$D$1</c:f>
-              <c:strCache>
-                <c:ptCount val="1"/>
-                <c:pt idx="0">
-                  <c:v>Acordos Sociais</c:v>
-                </c:pt>
-              </c:strCache>
-            </c:strRef>
-          </c:tx>
-          <c:spPr>
-            <a:solidFill>
-              <a:srgbClr val="457B9D"/>
-            </a:solidFill>
-            <a:ln w="31750" cap="flat">
-              <a:solidFill>
-                <a:srgbClr val="457B9D"/>
-              </a:solidFill>
-              <a:prstDash val="solid"/>
-              <a:round/>
-            </a:ln>
-            <a:effectLst/>
-          </c:spPr>
-          <c:invertIfNegative val="0"/>
-          <c:dLbls>
-            <c:numFmt formatCode="0&quot;%&quot;" sourceLinked="0"/>
-            <c:txPr>
-              <a:bodyPr/>
-              <a:lstStyle/>
-              <a:p>
-                <a:pPr>
-                  <a:defRPr b="0" i="0" strike="noStrike" sz="900" u="none">
-                    <a:solidFill>
-                      <a:srgbClr val="8A7070"/>
-                    </a:solidFill>
-                    <a:latin typeface="Arial"/>
-                  </a:defRPr>
-                </a:pPr>
-              </a:p>
-            </c:txPr>
-            <c:showLegendKey val="0"/>
-            <c:showVal val="1"/>
-            <c:showCatName val="0"/>
-            <c:showSerName val="0"/>
-            <c:showPercent val="0"/>
-            <c:showBubbleSize val="0"/>
-            <c:showLeaderLines val="0"/>
-          </c:dLbls>
-          <c:marker>
-            <c:symbol val="circle"/>
-            <c:size val="6"/>
-            <c:spPr>
-              <a:solidFill>
-                <a:srgbClr val="457B9D"/>
-              </a:solidFill>
-              <a:ln w="9525" cap="flat">
-                <a:solidFill>
-                  <a:srgbClr val="457B9D"/>
-                </a:solidFill>
-                <a:prstDash val="solid"/>
-                <a:round/>
-              </a:ln>
-              <a:effectLst/>
-            </c:spPr>
-          </c:marker>
-          <c:cat>
-            <c:multiLvlStrRef>
-              <c:f>Sheet1!$A$2:$A$5</c:f>
-              <c:multiLvlStrCache>
-                <c:ptCount val="4"/>
-                <c:lvl>
-                  <c:pt idx="0">
-                    <c:v>Inserindo</c:v>
-                  </c:pt>
-                  <c:pt idx="1">
-                    <c:v>Comprometido</c:v>
-                  </c:pt>
-                  <c:pt idx="2">
-                    <c:v>Ativo no Motivo</c:v>
-                  </c:pt>
-                  <c:pt idx="3">
-                    <c:v>Emb + Coc</c:v>
-                  </c:pt>
-                </c:lvl>
-              </c:multiLvlStrCache>
-            </c:multiLvlStrRef>
-          </c:cat>
-          <c:val>
-            <c:numRef>
-              <c:f>Sheet1!$D$2:$D$5</c:f>
-              <c:numCache>
-                <c:formatCode>General</c:formatCode>
-                <c:ptCount val="4"/>
-                <c:pt idx="0">
-                  <c:v>78.5</c:v>
-                </c:pt>
-                <c:pt idx="1">
-                  <c:v>85.9</c:v>
-                </c:pt>
-                <c:pt idx="2">
-                  <c:v>94.1</c:v>
-                </c:pt>
-                <c:pt idx="3">
-                  <c:v>98.3</c:v>
-                </c:pt>
-              </c:numCache>
-            </c:numRef>
-          </c:val>
-          <c:smooth val="0"/>
-        </c:ser>
-        <c:ser>
-          <c:idx val="3"/>
-          <c:order val="3"/>
-          <c:tx>
-            <c:strRef>
-              <c:f>Sheet1!$E$1</c:f>
-              <c:strCache>
-                <c:ptCount val="1"/>
-                <c:pt idx="0">
-                  <c:v>Economia Fraterna</c:v>
-                </c:pt>
-              </c:strCache>
-            </c:strRef>
-          </c:tx>
-          <c:spPr>
-            <a:solidFill>
-              <a:srgbClr val="D4821A"/>
-            </a:solidFill>
-            <a:ln w="31750" cap="flat">
-              <a:solidFill>
-                <a:srgbClr val="D4821A"/>
-              </a:solidFill>
-              <a:prstDash val="solid"/>
-              <a:round/>
-            </a:ln>
-            <a:effectLst/>
-          </c:spPr>
-          <c:invertIfNegative val="0"/>
-          <c:dLbls>
-            <c:numFmt formatCode="0&quot;%&quot;" sourceLinked="0"/>
-            <c:txPr>
-              <a:bodyPr/>
-              <a:lstStyle/>
-              <a:p>
-                <a:pPr>
-                  <a:defRPr b="0" i="0" strike="noStrike" sz="900" u="none">
-                    <a:solidFill>
-                      <a:srgbClr val="8A7070"/>
-                    </a:solidFill>
-                    <a:latin typeface="Arial"/>
-                  </a:defRPr>
-                </a:pPr>
-              </a:p>
-            </c:txPr>
-            <c:showLegendKey val="0"/>
-            <c:showVal val="1"/>
-            <c:showCatName val="0"/>
-            <c:showSerName val="0"/>
-            <c:showPercent val="0"/>
-            <c:showBubbleSize val="0"/>
-            <c:showLeaderLines val="0"/>
-          </c:dLbls>
-          <c:marker>
-            <c:symbol val="circle"/>
-            <c:size val="6"/>
-            <c:spPr>
-              <a:solidFill>
-                <a:srgbClr val="D4821A"/>
-              </a:solidFill>
-              <a:ln w="9525" cap="flat">
-                <a:solidFill>
-                  <a:srgbClr val="D4821A"/>
-                </a:solidFill>
-                <a:prstDash val="solid"/>
-                <a:round/>
-              </a:ln>
-              <a:effectLst/>
-            </c:spPr>
-          </c:marker>
-          <c:cat>
-            <c:multiLvlStrRef>
-              <c:f>Sheet1!$A$2:$A$5</c:f>
-              <c:multiLvlStrCache>
-                <c:ptCount val="4"/>
-                <c:lvl>
-                  <c:pt idx="0">
-                    <c:v>Inserindo</c:v>
-                  </c:pt>
-                  <c:pt idx="1">
-                    <c:v>Comprometido</c:v>
-                  </c:pt>
-                  <c:pt idx="2">
-                    <c:v>Ativo no Motivo</c:v>
-                  </c:pt>
-                  <c:pt idx="3">
-                    <c:v>Emb + Coc</c:v>
-                  </c:pt>
-                </c:lvl>
-              </c:multiLvlStrCache>
-            </c:multiLvlStrRef>
-          </c:cat>
-          <c:val>
-            <c:numRef>
-              <c:f>Sheet1!$E$2:$E$5</c:f>
-              <c:numCache>
-                <c:formatCode>General</c:formatCode>
-                <c:ptCount val="4"/>
-                <c:pt idx="0">
-                  <c:v>92.4</c:v>
-                </c:pt>
-                <c:pt idx="1">
-                  <c:v>78.3</c:v>
-                </c:pt>
-                <c:pt idx="2">
-                  <c:v>89.7</c:v>
-                </c:pt>
-                <c:pt idx="3">
-                  <c:v>98.2</c:v>
-                </c:pt>
-              </c:numCache>
-            </c:numRef>
-          </c:val>
-          <c:smooth val="0"/>
-        </c:ser>
-        <c:ser>
-          <c:idx val="4"/>
-          <c:order val="4"/>
-          <c:tx>
-            <c:strRef>
-              <c:f>Sheet1!$F$1</c:f>
-              <c:strCache>
-                <c:ptCount val="1"/>
-                <c:pt idx="0">
-                  <c:v>Engajamento Ativo</c:v>
-                </c:pt>
-              </c:strCache>
-            </c:strRef>
-          </c:tx>
-          <c:spPr>
-            <a:solidFill>
-              <a:srgbClr val="6B46C1"/>
-            </a:solidFill>
-            <a:ln w="31750" cap="flat">
-              <a:solidFill>
-                <a:srgbClr val="6B46C1"/>
-              </a:solidFill>
-              <a:prstDash val="solid"/>
-              <a:round/>
-            </a:ln>
-            <a:effectLst/>
-          </c:spPr>
-          <c:invertIfNegative val="0"/>
-          <c:dLbls>
-            <c:numFmt formatCode="0&quot;%&quot;" sourceLinked="0"/>
-            <c:txPr>
-              <a:bodyPr/>
-              <a:lstStyle/>
-              <a:p>
-                <a:pPr>
-                  <a:defRPr b="0" i="0" strike="noStrike" sz="900" u="none">
-                    <a:solidFill>
-                      <a:srgbClr val="8A7070"/>
-                    </a:solidFill>
-                    <a:latin typeface="Arial"/>
-                  </a:defRPr>
-                </a:pPr>
-              </a:p>
-            </c:txPr>
-            <c:showLegendKey val="0"/>
-            <c:showVal val="1"/>
-            <c:showCatName val="0"/>
-            <c:showSerName val="0"/>
-            <c:showPercent val="0"/>
-            <c:showBubbleSize val="0"/>
-            <c:showLeaderLines val="0"/>
-          </c:dLbls>
-          <c:marker>
-            <c:symbol val="circle"/>
-            <c:size val="6"/>
-            <c:spPr>
-              <a:solidFill>
-                <a:srgbClr val="6B46C1"/>
-              </a:solidFill>
-              <a:ln w="9525" cap="flat">
-                <a:solidFill>
-                  <a:srgbClr val="6B46C1"/>
-                </a:solidFill>
-                <a:prstDash val="solid"/>
-                <a:round/>
-              </a:ln>
-              <a:effectLst/>
-            </c:spPr>
-          </c:marker>
-          <c:cat>
-            <c:multiLvlStrRef>
-              <c:f>Sheet1!$A$2:$A$5</c:f>
-              <c:multiLvlStrCache>
-                <c:ptCount val="4"/>
-                <c:lvl>
-                  <c:pt idx="0">
-                    <c:v>Inserindo</c:v>
-                  </c:pt>
-                  <c:pt idx="1">
-                    <c:v>Comprometido</c:v>
-                  </c:pt>
-                  <c:pt idx="2">
-                    <c:v>Ativo no Motivo</c:v>
-                  </c:pt>
-                  <c:pt idx="3">
-                    <c:v>Emb + Coc</c:v>
-                  </c:pt>
-                </c:lvl>
-              </c:multiLvlStrCache>
-            </c:multiLvlStrRef>
-          </c:cat>
-          <c:val>
-            <c:numRef>
-              <c:f>Sheet1!$F$2:$F$5</c:f>
-              <c:numCache>
-                <c:formatCode>General</c:formatCode>
-                <c:ptCount val="4"/>
-                <c:pt idx="0">
-                  <c:v>8.3</c:v>
-                </c:pt>
-                <c:pt idx="1">
-                  <c:v>4.7</c:v>
-                </c:pt>
-                <c:pt idx="2">
-                  <c:v>24.7</c:v>
-                </c:pt>
-                <c:pt idx="3">
-                  <c:v>57</c:v>
-                </c:pt>
-              </c:numCache>
-            </c:numRef>
-          </c:val>
-          <c:smooth val="0"/>
-        </c:ser>
-        <c:dLbls>
-          <c:numFmt formatCode="0&quot;%&quot;" sourceLinked="0"/>
-          <c:txPr>
-            <a:bodyPr/>
-            <a:lstStyle/>
-            <a:p>
-              <a:pPr>
-                <a:defRPr b="0" i="0" strike="noStrike" sz="900" u="none">
-                  <a:solidFill>
-                    <a:srgbClr val="8A7070"/>
-                  </a:solidFill>
-                  <a:latin typeface="Arial"/>
-                </a:defRPr>
-              </a:pPr>
-            </a:p>
-          </c:txPr>
-          <c:showLegendKey val="0"/>
-          <c:showVal val="1"/>
-          <c:showCatName val="0"/>
-          <c:showSerName val="0"/>
-          <c:showPercent val="0"/>
-          <c:showBubbleSize val="0"/>
-          <c:showLeaderLines val="0"/>
-        </c:dLbls>
-        <c:marker val="1"/>
-        <c:axId val="2094734554"/>
-        <c:axId val="2094734552"/>
-        <c:axId val="2094734556"/>
-      </c:lineChart>
-      <c:catAx>
-        <c:axId val="2094734554"/>
-        <c:scaling>
-          <c:orientation val="minMax"/>
-        </c:scaling>
-        <c:delete val="0"/>
-        <c:axPos val="b"/>
-        <c:numFmt formatCode="General" sourceLinked="1"/>
-        <c:majorTickMark val="out"/>
-        <c:minorTickMark val="none"/>
-        <c:tickLblPos val="low"/>
-        <c:spPr>
-          <a:ln w="12700" cap="flat">
-            <a:solidFill>
-              <a:srgbClr val="888888"/>
-            </a:solidFill>
-            <a:prstDash val="solid"/>
-            <a:round/>
-          </a:ln>
-        </c:spPr>
-        <c:txPr>
-          <a:bodyPr/>
-          <a:lstStyle/>
-          <a:p>
-            <a:pPr>
-              <a:defRPr sz="1200" b="0" i="0" u="none" strike="noStrike">
-                <a:solidFill>
-                  <a:srgbClr val="1B2420"/>
-                </a:solidFill>
-                <a:latin typeface="Arial"/>
-              </a:defRPr>
-            </a:pPr>
-            <a:endParaRPr lang="en-US"/>
-          </a:p>
-        </c:txPr>
-        <c:crossAx val="2094734552"/>
-        <c:crosses val="autoZero"/>
-        <c:auto val="1"/>
-        <c:lblAlgn val="ctr"/>
-        <c:noMultiLvlLbl val="1"/>
-      </c:catAx>
-      <c:valAx>
-        <c:axId val="2094734552"/>
-        <c:scaling>
-          <c:orientation val="minMax"/>
-          <c:max val="100"/>
-          <c:min val="0"/>
-        </c:scaling>
-        <c:delete val="0"/>
-        <c:axPos val="l"/>
-        <c:majorGridlines>
-          <c:spPr>
-            <a:ln w="6350" cap="flat">
-              <a:solidFill>
-                <a:srgbClr val="E5E0DC"/>
-              </a:solidFill>
-              <a:prstDash val="solid"/>
-              <a:round/>
-            </a:ln>
-          </c:spPr>
-        </c:majorGridlines>
-        <c:numFmt formatCode="General" sourceLinked="0"/>
-        <c:majorTickMark val="out"/>
-        <c:minorTickMark val="none"/>
-        <c:tickLblPos val="nextTo"/>
-        <c:spPr>
-          <a:ln w="12700" cap="flat">
-            <a:solidFill>
-              <a:srgbClr val="888888"/>
-            </a:solidFill>
-            <a:prstDash val="solid"/>
-            <a:round/>
-          </a:ln>
-        </c:spPr>
-        <c:txPr>
-          <a:bodyPr/>
-          <a:lstStyle/>
-          <a:p>
-            <a:pPr>
-              <a:defRPr sz="1000" b="0" i="0" u="none" strike="noStrike">
-                <a:solidFill>
-                  <a:srgbClr val="8A7070"/>
-                </a:solidFill>
-                <a:latin typeface="Arial"/>
-              </a:defRPr>
-            </a:pPr>
-            <a:endParaRPr lang="en-US"/>
-          </a:p>
-        </c:txPr>
-        <c:crossAx val="2094734554"/>
-        <c:crosses val="autoZero"/>
-        <c:crossBetween val="between"/>
-      </c:valAx>
-      <c:spPr>
-        <a:noFill/>
-        <a:ln>
-          <a:noFill/>
-        </a:ln>
-        <a:effectLst/>
-      </c:spPr>
-    </c:plotArea>
-    <c:legend>
-      <c:legendPos val="b"/>
-      <c:overlay val="0"/>
-      <c:txPr>
-        <a:bodyPr/>
-        <a:lstStyle/>
-        <a:p>
-          <a:pPr>
-            <a:defRPr sz="1000">
-              <a:solidFill>
-                <a:srgbClr val="1B2420"/>
-              </a:solidFill>
-            </a:defRPr>
-          </a:pPr>
-          <a:endParaRPr lang="en-US"/>
-        </a:p>
-      </c:txPr>
-    </c:legend>
-    <c:plotVisOnly val="1"/>
-    <c:dispBlanksAs val="span"/>
-  </c:chart>
-  <c:spPr>
-    <a:noFill/>
-    <a:ln>
-      <a:noFill/>
-    </a:ln>
-    <a:effectLst/>
-  </c:spPr>
-  <c:externalData r:id="rId1">
-    <c:autoUpdate val="0"/>
-  </c:externalData>
-</c:chartSpace>
-</file>
-
-<file path=ppt/charts/chart7.xml><?xml version="1.0" encoding="utf-8"?>
-<c:chartSpace xmlns:c="http://schemas.openxmlformats.org/drawingml/2006/chart" xmlns:a="http://schemas.openxmlformats.org/drawingml/2006/main" xmlns:r="http://schemas.openxmlformats.org/officeDocument/2006/relationships">
-  <c:date1904 val="0"/>
-  <c:roundedCorners val="1"/>
-  <c:chart>
-    <c:autoTitleDeleted val="1"/>
-    <c:plotArea>
-      <c:layout/>
-      <c:barChart>
-        <c:barDir val="bar"/>
-        <c:grouping val="stacked"/>
-        <c:varyColors val="0"/>
-        <c:ser>
-          <c:idx val="0"/>
-          <c:order val="0"/>
-          <c:tx>
-            <c:strRef>
-              <c:f>Sheet1!$B$1</c:f>
-              <c:strCache>
-                <c:ptCount val="1"/>
-                <c:pt idx="0">
-                  <c:v>Ativo hoje</c:v>
-                </c:pt>
-              </c:strCache>
-            </c:strRef>
-          </c:tx>
-          <c:spPr>
-            <a:solidFill>
-              <a:srgbClr val="2D6A4F"/>
-            </a:solidFill>
-            <a:effectLst/>
-          </c:spPr>
-          <c:invertIfNegative val="0"/>
-          <c:dLbls>
-            <c:numFmt formatCode="0&quot;%&quot;" sourceLinked="0"/>
-            <c:txPr>
-              <a:bodyPr/>
-              <a:lstStyle/>
-              <a:p>
-                <a:pPr>
-                  <a:defRPr b="0" i="0" strike="noStrike" sz="1000" u="none">
-                    <a:solidFill>
-                      <a:srgbClr val="1B2420"/>
-                    </a:solidFill>
-                    <a:latin typeface="Arial"/>
-                  </a:defRPr>
-                </a:pPr>
-              </a:p>
-            </c:txPr>
-            <c:dLblPos val="ctr"/>
-            <c:showLegendKey val="0"/>
-            <c:showVal val="1"/>
-            <c:showCatName val="0"/>
-            <c:showSerName val="0"/>
-            <c:showPercent val="0"/>
-            <c:showBubbleSize val="0"/>
-            <c:showLeaderLines val="0"/>
-          </c:dLbls>
-          <c:cat>
-            <c:multiLvlStrRef>
-              <c:f>Sheet1!$A$2:$A$5</c:f>
-              <c:multiLvlStrCache>
-                <c:ptCount val="4"/>
-                <c:lvl>
-                  <c:pt idx="0">
-                    <c:v>Emb + Coc</c:v>
-                  </c:pt>
-                  <c:pt idx="1">
-                    <c:v>Ativo no Motivo</c:v>
-                  </c:pt>
-                  <c:pt idx="2">
-                    <c:v>Comprometido</c:v>
-                  </c:pt>
-                  <c:pt idx="3">
-                    <c:v>Inserindo</c:v>
-                  </c:pt>
-                </c:lvl>
-              </c:multiLvlStrCache>
-            </c:multiLvlStrRef>
-          </c:cat>
-          <c:val>
-            <c:numRef>
-              <c:f>Sheet1!$B$2:$B$5</c:f>
-              <c:numCache>
-                <c:formatCode>General</c:formatCode>
-                <c:ptCount val="4"/>
-                <c:pt idx="0">
-                  <c:v>57</c:v>
-                </c:pt>
-                <c:pt idx="1">
-                  <c:v>24.7</c:v>
-                </c:pt>
-                <c:pt idx="2">
-                  <c:v>4.7</c:v>
-                </c:pt>
-                <c:pt idx="3">
-                  <c:v>8.3</c:v>
-                </c:pt>
-              </c:numCache>
-            </c:numRef>
-          </c:val>
-        </c:ser>
-        <c:ser>
-          <c:idx val="1"/>
-          <c:order val="1"/>
-          <c:tx>
-            <c:strRef>
-              <c:f>Sheet1!$C$1</c:f>
-              <c:strCache>
-                <c:ptCount val="1"/>
-                <c:pt idx="0">
-                  <c:v>Já participei</c:v>
-                </c:pt>
-              </c:strCache>
-            </c:strRef>
-          </c:tx>
-          <c:spPr>
-            <a:solidFill>
-              <a:srgbClr val="D4821A"/>
-            </a:solidFill>
-            <a:effectLst/>
-          </c:spPr>
-          <c:invertIfNegative val="0"/>
-          <c:dLbls>
-            <c:numFmt formatCode="0&quot;%&quot;" sourceLinked="0"/>
-            <c:txPr>
-              <a:bodyPr/>
-              <a:lstStyle/>
-              <a:p>
-                <a:pPr>
-                  <a:defRPr b="0" i="0" strike="noStrike" sz="1000" u="none">
-                    <a:solidFill>
-                      <a:srgbClr val="1B2420"/>
-                    </a:solidFill>
-                    <a:latin typeface="Arial"/>
-                  </a:defRPr>
-                </a:pPr>
-              </a:p>
-            </c:txPr>
-            <c:dLblPos val="ctr"/>
-            <c:showLegendKey val="0"/>
-            <c:showVal val="1"/>
-            <c:showCatName val="0"/>
-            <c:showSerName val="0"/>
-            <c:showPercent val="0"/>
-            <c:showBubbleSize val="0"/>
-            <c:showLeaderLines val="0"/>
-          </c:dLbls>
-          <c:cat>
-            <c:multiLvlStrRef>
-              <c:f>Sheet1!$A$2:$A$5</c:f>
-              <c:multiLvlStrCache>
-                <c:ptCount val="4"/>
-                <c:lvl>
-                  <c:pt idx="0">
-                    <c:v>Emb + Coc</c:v>
-                  </c:pt>
-                  <c:pt idx="1">
-                    <c:v>Ativo no Motivo</c:v>
-                  </c:pt>
-                  <c:pt idx="2">
-                    <c:v>Comprometido</c:v>
-                  </c:pt>
-                  <c:pt idx="3">
-                    <c:v>Inserindo</c:v>
-                  </c:pt>
-                </c:lvl>
-              </c:multiLvlStrCache>
-            </c:multiLvlStrRef>
-          </c:cat>
-          <c:val>
-            <c:numRef>
-              <c:f>Sheet1!$C$2:$C$5</c:f>
-              <c:numCache>
-                <c:formatCode>General</c:formatCode>
-                <c:ptCount val="4"/>
-                <c:pt idx="0">
-                  <c:v>31</c:v>
-                </c:pt>
-                <c:pt idx="1">
-                  <c:v>42.3</c:v>
-                </c:pt>
-                <c:pt idx="2">
-                  <c:v>49.4</c:v>
-                </c:pt>
-                <c:pt idx="3">
-                  <c:v>27.8</c:v>
-                </c:pt>
-              </c:numCache>
-            </c:numRef>
-          </c:val>
-        </c:ser>
-        <c:ser>
-          <c:idx val="2"/>
-          <c:order val="2"/>
-          <c:tx>
-            <c:strRef>
-              <c:f>Sheet1!$D$1</c:f>
-              <c:strCache>
-                <c:ptCount val="1"/>
-                <c:pt idx="0">
-                  <c:v>Nunca participei</c:v>
-                </c:pt>
-              </c:strCache>
-            </c:strRef>
-          </c:tx>
-          <c:spPr>
-            <a:solidFill>
-              <a:srgbClr val="E8DDD8"/>
-            </a:solidFill>
-            <a:effectLst/>
-          </c:spPr>
-          <c:invertIfNegative val="0"/>
-          <c:dLbls>
-            <c:numFmt formatCode="0&quot;%&quot;" sourceLinked="0"/>
-            <c:txPr>
-              <a:bodyPr/>
-              <a:lstStyle/>
-              <a:p>
-                <a:pPr>
-                  <a:defRPr b="0" i="0" strike="noStrike" sz="1000" u="none">
-                    <a:solidFill>
-                      <a:srgbClr val="1B2420"/>
-                    </a:solidFill>
-                    <a:latin typeface="Arial"/>
-                  </a:defRPr>
-                </a:pPr>
-              </a:p>
-            </c:txPr>
-            <c:dLblPos val="ctr"/>
-            <c:showLegendKey val="0"/>
-            <c:showVal val="1"/>
-            <c:showCatName val="0"/>
-            <c:showSerName val="0"/>
-            <c:showPercent val="0"/>
-            <c:showBubbleSize val="0"/>
-            <c:showLeaderLines val="0"/>
-          </c:dLbls>
-          <c:cat>
-            <c:multiLvlStrRef>
-              <c:f>Sheet1!$A$2:$A$5</c:f>
-              <c:multiLvlStrCache>
-                <c:ptCount val="4"/>
-                <c:lvl>
-                  <c:pt idx="0">
-                    <c:v>Emb + Coc</c:v>
-                  </c:pt>
-                  <c:pt idx="1">
-                    <c:v>Ativo no Motivo</c:v>
-                  </c:pt>
-                  <c:pt idx="2">
-                    <c:v>Comprometido</c:v>
-                  </c:pt>
-                  <c:pt idx="3">
-                    <c:v>Inserindo</c:v>
-                  </c:pt>
-                </c:lvl>
-              </c:multiLvlStrCache>
-            </c:multiLvlStrRef>
-          </c:cat>
-          <c:val>
-            <c:numRef>
-              <c:f>Sheet1!$D$2:$D$5</c:f>
-              <c:numCache>
-                <c:formatCode>General</c:formatCode>
-                <c:ptCount val="4"/>
-                <c:pt idx="0">
-                  <c:v>12</c:v>
-                </c:pt>
-                <c:pt idx="1">
-                  <c:v>33</c:v>
-                </c:pt>
-                <c:pt idx="2">
-                  <c:v>45.9</c:v>
-                </c:pt>
-                <c:pt idx="3">
-                  <c:v>63.9</c:v>
-                </c:pt>
-              </c:numCache>
-            </c:numRef>
-          </c:val>
-        </c:ser>
-        <c:dLbls>
-          <c:numFmt formatCode="0&quot;%&quot;" sourceLinked="0"/>
-          <c:txPr>
-            <a:bodyPr/>
-            <a:lstStyle/>
-            <a:p>
-              <a:pPr>
-                <a:defRPr b="0" i="0" strike="noStrike" sz="1000" u="none">
-                  <a:solidFill>
-                    <a:srgbClr val="1B2420"/>
-                  </a:solidFill>
-                  <a:latin typeface="Arial"/>
-                </a:defRPr>
-              </a:pPr>
-            </a:p>
-          </c:txPr>
-          <c:dLblPos val="ctr"/>
-          <c:showLegendKey val="0"/>
-          <c:showVal val="1"/>
-          <c:showCatName val="0"/>
-          <c:showSerName val="0"/>
-          <c:showPercent val="0"/>
-          <c:showBubbleSize val="0"/>
-          <c:showLeaderLines val="0"/>
-        </c:dLbls>
-        <c:gapWidth val="50"/>
-        <c:overlap val="100"/>
-        <c:axId val="2094734554"/>
-        <c:axId val="2094734552"/>
-        <c:axId val="2094734556"/>
-      </c:barChart>
-      <c:catAx>
-        <c:axId val="2094734554"/>
-        <c:scaling>
-          <c:orientation val="minMax"/>
-        </c:scaling>
-        <c:delete val="0"/>
-        <c:axPos val="l"/>
-        <c:numFmt formatCode="General" sourceLinked="1"/>
-        <c:majorTickMark val="out"/>
-        <c:minorTickMark val="none"/>
-        <c:tickLblPos val="nextTo"/>
-        <c:spPr>
-          <a:ln w="12700" cap="flat">
-            <a:solidFill>
-              <a:srgbClr val="888888"/>
-            </a:solidFill>
-            <a:prstDash val="solid"/>
-            <a:round/>
-          </a:ln>
-        </c:spPr>
-        <c:txPr>
-          <a:bodyPr/>
-          <a:lstStyle/>
-          <a:p>
-            <a:pPr>
-              <a:defRPr sz="1200" b="0" i="0" u="none" strike="noStrike">
-                <a:solidFill>
-                  <a:srgbClr val="1B2420"/>
-                </a:solidFill>
-                <a:latin typeface="Arial"/>
-              </a:defRPr>
-            </a:pPr>
-            <a:endParaRPr lang="en-US"/>
-          </a:p>
-        </c:txPr>
-        <c:crossAx val="2094734552"/>
-        <c:crosses val="autoZero"/>
-        <c:auto val="1"/>
-        <c:lblAlgn val="ctr"/>
-        <c:noMultiLvlLbl val="1"/>
-      </c:catAx>
-      <c:valAx>
-        <c:axId val="2094734552"/>
-        <c:scaling>
-          <c:orientation val="minMax"/>
-        </c:scaling>
-        <c:delete val="1"/>
-        <c:axPos val="b"/>
-        <c:numFmt formatCode="General" sourceLinked="0"/>
-        <c:majorTickMark val="out"/>
-        <c:minorTickMark val="none"/>
-        <c:tickLblPos val="low"/>
-        <c:spPr>
-          <a:ln w="12700" cap="flat">
-            <a:solidFill>
-              <a:srgbClr val="888888"/>
-            </a:solidFill>
-            <a:prstDash val="solid"/>
-            <a:round/>
-          </a:ln>
-        </c:spPr>
-        <c:txPr>
-          <a:bodyPr/>
-          <a:lstStyle/>
-          <a:p>
-            <a:pPr>
-              <a:defRPr sz="1200" b="0" i="0" u="none" strike="noStrike">
-                <a:solidFill>
-                  <a:srgbClr val="000000"/>
-                </a:solidFill>
-                <a:latin typeface="Arial"/>
-              </a:defRPr>
-            </a:pPr>
-            <a:endParaRPr lang="en-US"/>
-          </a:p>
-        </c:txPr>
-        <c:crossAx val="2094734554"/>
-        <c:crosses val="autoZero"/>
-        <c:crossBetween val="between"/>
-      </c:valAx>
-      <c:spPr>
-        <a:noFill/>
-        <a:ln>
-          <a:noFill/>
-        </a:ln>
-        <a:effectLst/>
-      </c:spPr>
-    </c:plotArea>
-    <c:legend>
-      <c:legendPos val="b"/>
-      <c:overlay val="0"/>
-      <c:txPr>
-        <a:bodyPr/>
-        <a:lstStyle/>
-        <a:p>
-          <a:pPr>
-            <a:defRPr sz="1100">
-              <a:solidFill>
-                <a:srgbClr val="1B2420"/>
-              </a:solidFill>
-            </a:defRPr>
-          </a:pPr>
-          <a:endParaRPr lang="en-US"/>
-        </a:p>
-      </c:txPr>
-    </c:legend>
-    <c:plotVisOnly val="1"/>
-    <c:dispBlanksAs val="span"/>
-  </c:chart>
-  <c:spPr>
-    <a:noFill/>
-    <a:ln>
-      <a:noFill/>
-    </a:ln>
-    <a:effectLst/>
-  </c:spPr>
-  <c:externalData r:id="rId1">
-    <c:autoUpdate val="0"/>
-  </c:externalData>
-</c:chartSpace>
-</file>
-
-<file path=ppt/charts/chart8.xml><?xml version="1.0" encoding="utf-8"?>
-<c:chartSpace xmlns:c="http://schemas.openxmlformats.org/drawingml/2006/chart" xmlns:a="http://schemas.openxmlformats.org/drawingml/2006/main" xmlns:r="http://schemas.openxmlformats.org/officeDocument/2006/relationships">
-  <c:date1904 val="0"/>
-  <c:roundedCorners val="1"/>
-  <c:chart>
-    <c:autoTitleDeleted val="1"/>
-    <c:plotArea>
-      <c:layout/>
-      <c:barChart>
-        <c:barDir val="bar"/>
-        <c:grouping val="clustered"/>
-        <c:varyColors val="0"/>
-        <c:ser>
-          <c:idx val="0"/>
-          <c:order val="0"/>
-          <c:tx>
-            <c:strRef>
-              <c:f>Sheet1!$B$1</c:f>
-              <c:strCache>
-                <c:ptCount val="1"/>
-                <c:pt idx="0">
-                  <c:v>%</c:v>
-                </c:pt>
-              </c:strCache>
-            </c:strRef>
-          </c:tx>
-          <c:spPr>
-            <a:solidFill>
-              <a:srgbClr val="2D6A4F"/>
-            </a:solidFill>
-            <a:effectLst/>
-          </c:spPr>
-          <c:invertIfNegative val="0"/>
-          <c:dLbls>
-            <c:numFmt formatCode="0.0&quot;%&quot;" sourceLinked="0"/>
-            <c:txPr>
-              <a:bodyPr/>
-              <a:lstStyle/>
-              <a:p>
-                <a:pPr>
-                  <a:defRPr b="0" i="0" strike="noStrike" sz="1000" u="none">
-                    <a:solidFill>
-                      <a:srgbClr val="8A7070"/>
-                    </a:solidFill>
-                    <a:latin typeface="Arial"/>
-                  </a:defRPr>
-                </a:pPr>
-              </a:p>
-            </c:txPr>
-            <c:showLegendKey val="0"/>
-            <c:showVal val="1"/>
-            <c:showCatName val="0"/>
-            <c:showSerName val="0"/>
-            <c:showPercent val="0"/>
-            <c:showBubbleSize val="0"/>
-            <c:showLeaderLines val="0"/>
-          </c:dLbls>
-          <c:dPt>
-            <c:idx val="0"/>
-            <c:invertIfNegative val="0"/>
-            <c:bubble3D val="0"/>
-            <c:spPr>
-              <a:solidFill>
-                <a:srgbClr val="2D6A4F"/>
-              </a:solidFill>
-              <a:effectLst/>
-            </c:spPr>
-          </c:dPt>
-          <c:dPt>
-            <c:idx val="1"/>
-            <c:invertIfNegative val="0"/>
-            <c:bubble3D val="0"/>
-            <c:spPr>
-              <a:solidFill>
-                <a:srgbClr val="457B9D"/>
-              </a:solidFill>
-              <a:effectLst/>
-            </c:spPr>
-          </c:dPt>
-          <c:dPt>
-            <c:idx val="2"/>
-            <c:invertIfNegative val="0"/>
-            <c:bubble3D val="0"/>
-            <c:spPr>
-              <a:solidFill>
-                <a:srgbClr val="457B9D"/>
-              </a:solidFill>
-              <a:effectLst/>
-            </c:spPr>
-          </c:dPt>
-          <c:dPt>
-            <c:idx val="3"/>
-            <c:invertIfNegative val="0"/>
-            <c:bubble3D val="0"/>
-            <c:spPr>
-              <a:solidFill>
-                <a:srgbClr val="A83048"/>
-              </a:solidFill>
-              <a:effectLst/>
-            </c:spPr>
-          </c:dPt>
-          <c:dPt>
-            <c:idx val="4"/>
-            <c:invertIfNegative val="0"/>
-            <c:bubble3D val="0"/>
-            <c:spPr>
-              <a:solidFill>
-                <a:srgbClr val="A83048"/>
-              </a:solidFill>
-              <a:effectLst/>
-            </c:spPr>
-          </c:dPt>
-          <c:cat>
-            <c:multiLvlStrRef>
-              <c:f>Sheet1!$A$2:$A$6</c:f>
-              <c:multiLvlStrCache>
-                <c:ptCount val="5"/>
-                <c:lvl>
-                  <c:pt idx="0">
-                    <c:v>Alinhado</c:v>
-                  </c:pt>
-                  <c:pt idx="1">
-                    <c:v>Potencial +1 nível</c:v>
-                  </c:pt>
-                  <c:pt idx="2">
-                    <c:v>Potencial +2+ níveis</c:v>
-                  </c:pt>
-                  <c:pt idx="3">
-                    <c:v>Autoposi. +1 acima</c:v>
-                  </c:pt>
-                  <c:pt idx="4">
-                    <c:v>Autoposi. +2+ acima</c:v>
-                  </c:pt>
-                </c:lvl>
-              </c:multiLvlStrCache>
-            </c:multiLvlStrRef>
-          </c:cat>
-          <c:val>
-            <c:numRef>
-              <c:f>Sheet1!$B$2:$B$6</c:f>
-              <c:numCache>
-                <c:formatCode>General</c:formatCode>
-                <c:ptCount val="5"/>
-                <c:pt idx="0">
-                  <c:v>26.6</c:v>
-                </c:pt>
-                <c:pt idx="1">
-                  <c:v>16.1</c:v>
-                </c:pt>
-                <c:pt idx="2">
-                  <c:v>25.9</c:v>
-                </c:pt>
-                <c:pt idx="3">
-                  <c:v>17.5</c:v>
-                </c:pt>
-                <c:pt idx="4">
-                  <c:v>12.6</c:v>
-                </c:pt>
-              </c:numCache>
-            </c:numRef>
-          </c:val>
-        </c:ser>
-        <c:dLbls>
-          <c:numFmt formatCode="0.0&quot;%&quot;" sourceLinked="0"/>
-          <c:txPr>
-            <a:bodyPr/>
-            <a:lstStyle/>
-            <a:p>
-              <a:pPr>
-                <a:defRPr b="0" i="0" strike="noStrike" sz="1000" u="none">
-                  <a:solidFill>
-                    <a:srgbClr val="8A7070"/>
-                  </a:solidFill>
-                  <a:latin typeface="Arial"/>
-                </a:defRPr>
-              </a:pPr>
-            </a:p>
-          </c:txPr>
-          <c:showLegendKey val="0"/>
-          <c:showVal val="1"/>
-          <c:showCatName val="0"/>
-          <c:showSerName val="0"/>
-          <c:showPercent val="0"/>
-          <c:showBubbleSize val="0"/>
-          <c:showLeaderLines val="0"/>
-        </c:dLbls>
-        <c:gapWidth val="150"/>
-        <c:overlap val="0"/>
-        <c:axId val="2094734554"/>
-        <c:axId val="2094734552"/>
-        <c:axId val="2094734556"/>
-      </c:barChart>
-      <c:catAx>
-        <c:axId val="2094734554"/>
-        <c:scaling>
-          <c:orientation val="minMax"/>
-        </c:scaling>
-        <c:delete val="0"/>
-        <c:axPos val="l"/>
-        <c:numFmt formatCode="General" sourceLinked="1"/>
-        <c:majorTickMark val="out"/>
-        <c:minorTickMark val="none"/>
-        <c:tickLblPos val="nextTo"/>
-        <c:spPr>
-          <a:ln w="12700" cap="flat">
-            <a:solidFill>
-              <a:srgbClr val="888888"/>
-            </a:solidFill>
-            <a:prstDash val="solid"/>
-            <a:round/>
-          </a:ln>
-        </c:spPr>
-        <c:txPr>
-          <a:bodyPr/>
-          <a:lstStyle/>
-          <a:p>
-            <a:pPr>
-              <a:defRPr sz="1000" b="0" i="0" u="none" strike="noStrike">
-                <a:solidFill>
-                  <a:srgbClr val="1B2420"/>
-                </a:solidFill>
-                <a:latin typeface="Arial"/>
-              </a:defRPr>
-            </a:pPr>
-            <a:endParaRPr lang="en-US"/>
-          </a:p>
-        </c:txPr>
-        <c:crossAx val="2094734552"/>
-        <c:crosses val="autoZero"/>
-        <c:auto val="1"/>
-        <c:lblAlgn val="ctr"/>
-        <c:noMultiLvlLbl val="1"/>
-      </c:catAx>
-      <c:valAx>
-        <c:axId val="2094734552"/>
-        <c:scaling>
-          <c:orientation val="minMax"/>
-        </c:scaling>
-        <c:delete val="1"/>
-        <c:axPos val="b"/>
-        <c:numFmt formatCode="General" sourceLinked="0"/>
-        <c:majorTickMark val="out"/>
-        <c:minorTickMark val="none"/>
-        <c:tickLblPos val="low"/>
-        <c:spPr>
-          <a:ln w="12700" cap="flat">
-            <a:solidFill>
-              <a:srgbClr val="888888"/>
-            </a:solidFill>
-            <a:prstDash val="solid"/>
-            <a:round/>
-          </a:ln>
-        </c:spPr>
-        <c:txPr>
-          <a:bodyPr/>
-          <a:lstStyle/>
-          <a:p>
-            <a:pPr>
-              <a:defRPr sz="1200" b="0" i="0" u="none" strike="noStrike">
-                <a:solidFill>
-                  <a:srgbClr val="000000"/>
-                </a:solidFill>
-                <a:latin typeface="Arial"/>
-              </a:defRPr>
-            </a:pPr>
-            <a:endParaRPr lang="en-US"/>
-          </a:p>
-        </c:txPr>
-        <c:crossAx val="2094734554"/>
-        <c:crosses val="autoZero"/>
-        <c:crossBetween val="between"/>
-      </c:valAx>
-      <c:spPr>
-        <a:noFill/>
-        <a:ln>
-          <a:noFill/>
-        </a:ln>
-        <a:effectLst/>
-      </c:spPr>
-    </c:plotArea>
-    <c:plotVisOnly val="1"/>
-    <c:dispBlanksAs val="span"/>
-  </c:chart>
-  <c:spPr>
-    <a:noFill/>
-    <a:ln>
-      <a:noFill/>
-    </a:ln>
-    <a:effectLst/>
-  </c:spPr>
-  <c:externalData r:id="rId1">
-    <c:autoUpdate val="0"/>
-  </c:externalData>
-</c:chartSpace>
 </file>
 
 <file path=ppt/notesMasters/notesMaster1.xml><?xml version="1.0" encoding="utf-8"?>
@@ -3815,7 +604,7 @@
           <a:p>
             <a:r>
               <a:rPr lang="en-US" dirty="0"/>
-              <a:t>Engajamento ativo é o principal diferencial: cresce de 5–8% nos comprometidos para 57% em Embaixador+Cocriador. Pertencimento é alto em todos os grupos.</a:t>
+              <a:t>A inferência é complemento à autopercepção — não a substitui. O modificador de tempo reflete que o amadurecimento na curva leva tempo real.</a:t>
             </a:r>
             <a:endParaRPr lang="en-US" dirty="0"/>
           </a:p>
@@ -3903,7 +692,7 @@
           <a:p>
             <a:r>
               <a:rPr lang="en-US" dirty="0"/>
-              <a:t>64% dos Inserindos nunca participaram de papel algum. Comprometidos têm histórico (49% já foram), mas poucos são ativos agora (5%). O engajamento sobe muito apenas nos estágios avançados.</a:t>
+              <a:t>Destaque: 44,8% Comprometidos — disseram SIM. 32,2% em Inserindo — no ponto de decisão. Apenas 16,4% em estágios ativos (Ativo+Emb+Coc).</a:t>
             </a:r>
             <a:endParaRPr lang="en-US" dirty="0"/>
           </a:p>
@@ -3991,7 +780,7 @@
           <a:p>
             <a:r>
               <a:rPr lang="en-US" dirty="0"/>
-              <a:t>42% têm potencial não declarado — as respostas mostram nível acima do que declaram. 30% se posicionam acima do que as respostas sustentam. 27% alinhados.</a:t>
+              <a:t>Engajamento ativo é o principal diferencial: cresce de 5–8% nos comprometidos para 57% em Embaixador+Cocriador. Pertencimento é alto em todos os grupos.</a:t>
             </a:r>
             <a:endParaRPr lang="en-US" dirty="0"/>
           </a:p>
@@ -4079,7 +868,7 @@
           <a:p>
             <a:r>
               <a:rPr lang="en-US" dirty="0"/>
-              <a:t/>
+              <a:t>64% dos Inserindos nunca participaram de papel algum. Comprometidos têm histórico (49% já foram), mas poucos são ativos agora (5%). O engajamento sobe muito apenas nos estágios avançados.</a:t>
             </a:r>
             <a:endParaRPr lang="en-US" dirty="0"/>
           </a:p>
@@ -4103,6 +892,182 @@
             <a:fld id="{F7021451-1387-4CA6-816F-3879F97B5CBC}" type="slidenum">
               <a:rPr lang="en-US"/>
               <a:t>13</a:t>
+            </a:fld>
+            <a:endParaRPr lang="en-US"/>
+          </a:p>
+        </p:txBody>
+      </p:sp>
+    </p:spTree>
+    <p:extLst>
+      <p:ext uri="{BB962C8B-B14F-4D97-AF65-F5344CB8AC3E}">
+        <p14:creationId xmlns:p14="http://schemas.microsoft.com/office/powerpoint/2010/main" val="1024086991"/>
+      </p:ext>
+    </p:extLst>
+  </p:cSld>
+  <p:clrMapOvr>
+    <a:masterClrMapping/>
+  </p:clrMapOvr>
+</p:notes>
+</file>
+
+<file path=ppt/notesSlides/notesSlide14.xml><?xml version="1.0" encoding="utf-8"?>
+<p:notes xmlns:a="http://schemas.openxmlformats.org/drawingml/2006/main" xmlns:r="http://schemas.openxmlformats.org/officeDocument/2006/relationships" xmlns:p="http://schemas.openxmlformats.org/presentationml/2006/main">
+  <p:cSld>
+    <p:spTree>
+      <p:nvGrpSpPr>
+        <p:cNvPr id="1" name=""/>
+        <p:cNvGrpSpPr/>
+        <p:nvPr/>
+      </p:nvGrpSpPr>
+      <p:grpSpPr>
+        <a:xfrm>
+          <a:off x="0" y="0"/>
+          <a:ext cx="0" cy="0"/>
+          <a:chOff x="0" y="0"/>
+          <a:chExt cx="0" cy="0"/>
+        </a:xfrm>
+      </p:grpSpPr>
+      <p:sp>
+        <p:nvSpPr>
+          <p:cNvPr id="2" name="Slide Image Placeholder 1"/>
+          <p:cNvSpPr>
+            <a:spLocks noGrp="1" noRot="1" noChangeAspect="1"/>
+          </p:cNvSpPr>
+          <p:nvPr>
+            <p:ph type="sldImg"/>
+          </p:nvPr>
+        </p:nvSpPr>
+        <p:spPr/>
+      </p:sp>
+      <p:sp>
+        <p:nvSpPr>
+          <p:cNvPr id="3" name="Notes Placeholder 2"/>
+          <p:cNvSpPr>
+            <a:spLocks noGrp="1"/>
+          </p:cNvSpPr>
+          <p:nvPr>
+            <p:ph type="body" idx="1"/>
+          </p:nvPr>
+        </p:nvSpPr>
+        <p:spPr/>
+        <p:txBody>
+          <a:bodyPr/>
+          <a:lstStyle/>
+          <a:p>
+            <a:r>
+              <a:rPr lang="en-US" dirty="0"/>
+              <a:t>42% têm potencial não declarado — as respostas mostram nível acima do que declaram. 30% se posicionam acima do que as respostas sustentam. 27% alinhados.</a:t>
+            </a:r>
+            <a:endParaRPr lang="en-US" dirty="0"/>
+          </a:p>
+        </p:txBody>
+      </p:sp>
+      <p:sp>
+        <p:nvSpPr>
+          <p:cNvPr id="4" name="Slide Number Placeholder 3"/>
+          <p:cNvSpPr>
+            <a:spLocks noGrp="1"/>
+          </p:cNvSpPr>
+          <p:nvPr>
+            <p:ph type="sldNum" sz="quarter" idx="10"/>
+          </p:nvPr>
+        </p:nvSpPr>
+        <p:spPr/>
+        <p:txBody>
+          <a:bodyPr/>
+          <a:lstStyle/>
+          <a:p>
+            <a:fld id="{F7021451-1387-4CA6-816F-3879F97B5CBC}" type="slidenum">
+              <a:rPr lang="en-US"/>
+              <a:t>14</a:t>
+            </a:fld>
+            <a:endParaRPr lang="en-US"/>
+          </a:p>
+        </p:txBody>
+      </p:sp>
+    </p:spTree>
+    <p:extLst>
+      <p:ext uri="{BB962C8B-B14F-4D97-AF65-F5344CB8AC3E}">
+        <p14:creationId xmlns:p14="http://schemas.microsoft.com/office/powerpoint/2010/main" val="1024086991"/>
+      </p:ext>
+    </p:extLst>
+  </p:cSld>
+  <p:clrMapOvr>
+    <a:masterClrMapping/>
+  </p:clrMapOvr>
+</p:notes>
+</file>
+
+<file path=ppt/notesSlides/notesSlide15.xml><?xml version="1.0" encoding="utf-8"?>
+<p:notes xmlns:a="http://schemas.openxmlformats.org/drawingml/2006/main" xmlns:r="http://schemas.openxmlformats.org/officeDocument/2006/relationships" xmlns:p="http://schemas.openxmlformats.org/presentationml/2006/main">
+  <p:cSld>
+    <p:spTree>
+      <p:nvGrpSpPr>
+        <p:cNvPr id="1" name=""/>
+        <p:cNvGrpSpPr/>
+        <p:nvPr/>
+      </p:nvGrpSpPr>
+      <p:grpSpPr>
+        <a:xfrm>
+          <a:off x="0" y="0"/>
+          <a:ext cx="0" cy="0"/>
+          <a:chOff x="0" y="0"/>
+          <a:chExt cx="0" cy="0"/>
+        </a:xfrm>
+      </p:grpSpPr>
+      <p:sp>
+        <p:nvSpPr>
+          <p:cNvPr id="2" name="Slide Image Placeholder 1"/>
+          <p:cNvSpPr>
+            <a:spLocks noGrp="1" noRot="1" noChangeAspect="1"/>
+          </p:cNvSpPr>
+          <p:nvPr>
+            <p:ph type="sldImg"/>
+          </p:nvPr>
+        </p:nvSpPr>
+        <p:spPr/>
+      </p:sp>
+      <p:sp>
+        <p:nvSpPr>
+          <p:cNvPr id="3" name="Notes Placeholder 2"/>
+          <p:cNvSpPr>
+            <a:spLocks noGrp="1"/>
+          </p:cNvSpPr>
+          <p:nvPr>
+            <p:ph type="body" idx="1"/>
+          </p:nvPr>
+        </p:nvSpPr>
+        <p:spPr/>
+        <p:txBody>
+          <a:bodyPr/>
+          <a:lstStyle/>
+          <a:p>
+            <a:r>
+              <a:rPr lang="en-US" dirty="0"/>
+              <a:t/>
+            </a:r>
+            <a:endParaRPr lang="en-US" dirty="0"/>
+          </a:p>
+        </p:txBody>
+      </p:sp>
+      <p:sp>
+        <p:nvSpPr>
+          <p:cNvPr id="4" name="Slide Number Placeholder 3"/>
+          <p:cNvSpPr>
+            <a:spLocks noGrp="1"/>
+          </p:cNvSpPr>
+          <p:nvPr>
+            <p:ph type="sldNum" sz="quarter" idx="10"/>
+          </p:nvPr>
+        </p:nvSpPr>
+        <p:spPr/>
+        <p:txBody>
+          <a:bodyPr/>
+          <a:lstStyle/>
+          <a:p>
+            <a:fld id="{F7021451-1387-4CA6-816F-3879F97B5CBC}" type="slidenum">
+              <a:rPr lang="en-US"/>
+              <a:t>15</a:t>
             </a:fld>
             <a:endParaRPr lang="en-US"/>
           </a:p>
@@ -4167,7 +1132,7 @@
           <a:p>
             <a:r>
               <a:rPr lang="en-US" dirty="0"/>
-              <a:t>O questionário foi enviado de forma online. Link do formulário: https://docs.google.com/forms/d/e/1FAIpQLSdva2RCR57R86nsUXXbfUX2ocSETB9RGaQQEZakRjSyH9kVhg/viewform</a:t>
+              <a:t>O questionário foi enviado de forma online. Link: https://forms.gle/…</a:t>
             </a:r>
             <a:endParaRPr lang="en-US" dirty="0"/>
           </a:p>
@@ -4343,7 +1308,7 @@
           <a:p>
             <a:r>
               <a:rPr lang="en-US" dirty="0"/>
-              <a:t>68% famílias biparentais. Renda concentrada entre 3 e 10 SM (57,4%). 40,6% alugam imóvel. 80% praticam alguma forma de doação.</a:t>
+              <a:t>68% famílias biparentais (casal com filhos). 43% têm 2 filhos. 33% têm 3 ou mais filhos.</a:t>
             </a:r>
             <a:endParaRPr lang="en-US" dirty="0"/>
           </a:p>
@@ -4431,7 +1396,7 @@
           <a:p>
             <a:r>
               <a:rPr lang="en-US" dirty="0"/>
-              <a:t>Pico de 38 novos em 2025. Apenas 33% têm formação em antroposofia — a maioria no Seminário Pedagogia Waldorf.</a:t>
+              <a:t>Renda concentrada entre 3 e 10 SM (57,4%). Comunidade de classe média-alta.</a:t>
             </a:r>
             <a:endParaRPr lang="en-US" dirty="0"/>
           </a:p>
@@ -4519,7 +1484,7 @@
           <a:p>
             <a:r>
               <a:rPr lang="en-US" dirty="0"/>
-              <a:t/>
+              <a:t>Pico de 38 novos em 2025. EF I concentra mais matrículas. 33% com formação em antroposofia.</a:t>
             </a:r>
             <a:endParaRPr lang="en-US" dirty="0"/>
           </a:p>
@@ -4607,7 +1572,7 @@
           <a:p>
             <a:r>
               <a:rPr lang="en-US" dirty="0"/>
-              <a:t>Antes do Comprometido: Capital Social Individual (o que a escola faz por mim). Após: Capital Social da Comunidade (o que faço pela escola). O "SIM" é a decisão que separa os dois lados da lemniscata.</a:t>
+              <a:t/>
             </a:r>
             <a:endParaRPr lang="en-US" dirty="0"/>
           </a:p>
@@ -4695,7 +1660,7 @@
           <a:p>
             <a:r>
               <a:rPr lang="en-US" dirty="0"/>
-              <a:t>A inferência é complemento à autopercepção — não a substitui. O modificador de tempo reflete que o amadurecimento na curva leva tempo real.</a:t>
+              <a:t>Antes do Comprometido: Capital Social Individual. Após: Capital Social da Comunidade. O "SIM" separa os dois lados da lemniscata.</a:t>
             </a:r>
             <a:endParaRPr lang="en-US" dirty="0"/>
           </a:p>
@@ -4783,7 +1748,7 @@
           <a:p>
             <a:r>
               <a:rPr lang="en-US" dirty="0"/>
-              <a:t>Destaque: 44,8% Comprometidos — disseram SIM. 32,2% em Inserindo — no ponto de decisão. Apenas 16,4% em estágios ativos.</a:t>
+              <a:t>Comprometido: 36% autodeclarado vs 45% inferido. Inserindo: 9% autodeclarado vs 32% inferido — grande divergência de percepção.</a:t>
             </a:r>
             <a:endParaRPr lang="en-US" dirty="0"/>
           </a:p>
@@ -5790,7 +2755,7 @@
                 <a:ea typeface="Arial" pitchFamily="34" charset="-122"/>
                 <a:cs typeface="Arial" pitchFamily="34" charset="-120"/>
               </a:rPr>
-              <a:t>Concordância por Esfera e Nível Inferido</a:t>
+              <a:t>Metodologia de Inferência do Estágio</a:t>
             </a:r>
             <a:endParaRPr lang="en-US" sz="2600" dirty="0"/>
           </a:p>
@@ -5829,28 +2794,630 @@
                 <a:ea typeface="Arial" pitchFamily="34" charset="-122"/>
                 <a:cs typeface="Arial" pitchFamily="34" charset="-120"/>
               </a:rPr>
-              <a:t>% de respostas positivas por esfera — agrupado por nível (exclui Adaptando, n=1)</a:t>
+              <a:t>Como as respostas foram interpretadas para posicionar cada pessoa na curva</a:t>
             </a:r>
             <a:endParaRPr lang="en-US" sz="1200" dirty="0"/>
           </a:p>
         </p:txBody>
       </p:sp>
-      <p:graphicFrame>
-        <p:nvGraphicFramePr>
-          <p:cNvPr id="4" name="Chart 0" descr=""/>
-          <p:cNvGraphicFramePr/>
-          <p:nvPr/>
-        </p:nvGraphicFramePr>
-        <p:xfrm>
-          <a:off x="457200" y="1051560"/>
-          <a:ext cx="8229600" cy="3474720"/>
-        </p:xfrm>
-        <a:graphic xmlns:a="http://schemas.openxmlformats.org/drawingml/2006/main">
-          <a:graphicData uri="http://schemas.openxmlformats.org/drawingml/2006/chart">
-            <c:chart xmlns:c="http://schemas.openxmlformats.org/drawingml/2006/chart" r:id="rId1"/>
-          </a:graphicData>
-        </a:graphic>
-      </p:graphicFrame>
+      <p:sp>
+        <p:nvSpPr>
+          <p:cNvPr id="4" name="Text 2"/>
+          <p:cNvSpPr/>
+          <p:nvPr/>
+        </p:nvSpPr>
+        <p:spPr>
+          <a:xfrm>
+            <a:off x="457200" y="1051560"/>
+            <a:ext cx="8229600" cy="320040"/>
+          </a:xfrm>
+          <a:prstGeom prst="rect">
+            <a:avLst/>
+          </a:prstGeom>
+          <a:noFill/>
+          <a:ln/>
+        </p:spPr>
+        <p:txBody>
+          <a:bodyPr wrap="square" lIns="0" tIns="0" rIns="0" bIns="0" rtlCol="0" anchor="ctr"/>
+          <a:lstStyle/>
+          <a:p>
+            <a:pPr indent="0" marL="0">
+              <a:buNone/>
+            </a:pPr>
+            <a:r>
+              <a:rPr lang="en-US" sz="1200" dirty="0">
+                <a:solidFill>
+                  <a:srgbClr val="1B2420"/>
+                </a:solidFill>
+                <a:latin typeface="Arial" pitchFamily="34" charset="0"/>
+                <a:ea typeface="Arial" pitchFamily="34" charset="-122"/>
+                <a:cs typeface="Arial" pitchFamily="34" charset="-120"/>
+              </a:rPr>
+              <a:t>Para cada respondente, o estágio foi inferido combinando cinco dimensões de análise:</a:t>
+            </a:r>
+            <a:endParaRPr lang="en-US" sz="1200" dirty="0"/>
+          </a:p>
+        </p:txBody>
+      </p:sp>
+      <p:sp>
+        <p:nvSpPr>
+          <p:cNvPr id="5" name="Shape 3"/>
+          <p:cNvSpPr/>
+          <p:nvPr/>
+        </p:nvSpPr>
+        <p:spPr>
+          <a:xfrm>
+            <a:off x="457200" y="1371600"/>
+            <a:ext cx="164592" cy="475488"/>
+          </a:xfrm>
+          <a:prstGeom prst="rect">
+            <a:avLst/>
+          </a:prstGeom>
+          <a:solidFill>
+            <a:srgbClr val="7B2230"/>
+          </a:solidFill>
+          <a:ln w="12700">
+            <a:solidFill>
+              <a:srgbClr val="7B2230"/>
+            </a:solidFill>
+            <a:prstDash val="solid"/>
+          </a:ln>
+        </p:spPr>
+      </p:sp>
+      <p:sp>
+        <p:nvSpPr>
+          <p:cNvPr id="6" name="Text 4"/>
+          <p:cNvSpPr/>
+          <p:nvPr/>
+        </p:nvSpPr>
+        <p:spPr>
+          <a:xfrm>
+            <a:off x="713232" y="1371600"/>
+            <a:ext cx="3200400" cy="237744"/>
+          </a:xfrm>
+          <a:prstGeom prst="rect">
+            <a:avLst/>
+          </a:prstGeom>
+          <a:noFill/>
+          <a:ln/>
+        </p:spPr>
+        <p:txBody>
+          <a:bodyPr wrap="square" lIns="0" tIns="0" rIns="0" bIns="0" rtlCol="0" anchor="ctr"/>
+          <a:lstStyle/>
+          <a:p>
+            <a:pPr indent="0" marL="0">
+              <a:buNone/>
+            </a:pPr>
+            <a:r>
+              <a:rPr lang="en-US" sz="1200" b="1" dirty="0">
+                <a:solidFill>
+                  <a:srgbClr val="1B2420"/>
+                </a:solidFill>
+                <a:latin typeface="Arial" pitchFamily="34" charset="0"/>
+                <a:ea typeface="Arial" pitchFamily="34" charset="-122"/>
+                <a:cs typeface="Arial" pitchFamily="34" charset="-120"/>
+              </a:rPr>
+              <a:t>Conhecimento Institucional</a:t>
+            </a:r>
+            <a:endParaRPr lang="en-US" sz="1200" dirty="0"/>
+          </a:p>
+        </p:txBody>
+      </p:sp>
+      <p:sp>
+        <p:nvSpPr>
+          <p:cNvPr id="7" name="Text 5"/>
+          <p:cNvSpPr/>
+          <p:nvPr/>
+        </p:nvSpPr>
+        <p:spPr>
+          <a:xfrm>
+            <a:off x="713232" y="1600200"/>
+            <a:ext cx="7315200" cy="237744"/>
+          </a:xfrm>
+          <a:prstGeom prst="rect">
+            <a:avLst/>
+          </a:prstGeom>
+          <a:noFill/>
+          <a:ln/>
+        </p:spPr>
+        <p:txBody>
+          <a:bodyPr wrap="square" lIns="0" tIns="0" rIns="0" bIns="0" rtlCol="0" anchor="ctr"/>
+          <a:lstStyle/>
+          <a:p>
+            <a:pPr indent="0" marL="0">
+              <a:buNone/>
+            </a:pPr>
+            <a:r>
+              <a:rPr lang="en-US" sz="1000" dirty="0">
+                <a:solidFill>
+                  <a:srgbClr val="8A7070"/>
+                </a:solidFill>
+                <a:latin typeface="Arial" pitchFamily="34" charset="0"/>
+                <a:ea typeface="Arial" pitchFamily="34" charset="-122"/>
+                <a:cs typeface="Arial" pitchFamily="34" charset="-120"/>
+              </a:rPr>
+              <a:t>Sim/Não sobre 4 aspectos-chave (missão, processos, pedagogia)</a:t>
+            </a:r>
+            <a:endParaRPr lang="en-US" sz="1000" dirty="0"/>
+          </a:p>
+        </p:txBody>
+      </p:sp>
+      <p:sp>
+        <p:nvSpPr>
+          <p:cNvPr id="8" name="Shape 6"/>
+          <p:cNvSpPr/>
+          <p:nvPr/>
+        </p:nvSpPr>
+        <p:spPr>
+          <a:xfrm>
+            <a:off x="457200" y="1993392"/>
+            <a:ext cx="164592" cy="475488"/>
+          </a:xfrm>
+          <a:prstGeom prst="rect">
+            <a:avLst/>
+          </a:prstGeom>
+          <a:solidFill>
+            <a:srgbClr val="457B9D"/>
+          </a:solidFill>
+          <a:ln w="12700">
+            <a:solidFill>
+              <a:srgbClr val="457B9D"/>
+            </a:solidFill>
+            <a:prstDash val="solid"/>
+          </a:ln>
+        </p:spPr>
+      </p:sp>
+      <p:sp>
+        <p:nvSpPr>
+          <p:cNvPr id="9" name="Text 7"/>
+          <p:cNvSpPr/>
+          <p:nvPr/>
+        </p:nvSpPr>
+        <p:spPr>
+          <a:xfrm>
+            <a:off x="713232" y="1993392"/>
+            <a:ext cx="3200400" cy="237744"/>
+          </a:xfrm>
+          <a:prstGeom prst="rect">
+            <a:avLst/>
+          </a:prstGeom>
+          <a:noFill/>
+          <a:ln/>
+        </p:spPr>
+        <p:txBody>
+          <a:bodyPr wrap="square" lIns="0" tIns="0" rIns="0" bIns="0" rtlCol="0" anchor="ctr"/>
+          <a:lstStyle/>
+          <a:p>
+            <a:pPr indent="0" marL="0">
+              <a:buNone/>
+            </a:pPr>
+            <a:r>
+              <a:rPr lang="en-US" sz="1200" b="1" dirty="0">
+                <a:solidFill>
+                  <a:srgbClr val="1B2420"/>
+                </a:solidFill>
+                <a:latin typeface="Arial" pitchFamily="34" charset="0"/>
+                <a:ea typeface="Arial" pitchFamily="34" charset="-122"/>
+                <a:cs typeface="Arial" pitchFamily="34" charset="-120"/>
+              </a:rPr>
+              <a:t>Pertencimento Cultural</a:t>
+            </a:r>
+            <a:endParaRPr lang="en-US" sz="1200" dirty="0"/>
+          </a:p>
+        </p:txBody>
+      </p:sp>
+      <p:sp>
+        <p:nvSpPr>
+          <p:cNvPr id="10" name="Text 8"/>
+          <p:cNvSpPr/>
+          <p:nvPr/>
+        </p:nvSpPr>
+        <p:spPr>
+          <a:xfrm>
+            <a:off x="713232" y="2221992"/>
+            <a:ext cx="7315200" cy="237744"/>
+          </a:xfrm>
+          <a:prstGeom prst="rect">
+            <a:avLst/>
+          </a:prstGeom>
+          <a:noFill/>
+          <a:ln/>
+        </p:spPr>
+        <p:txBody>
+          <a:bodyPr wrap="square" lIns="0" tIns="0" rIns="0" bIns="0" rtlCol="0" anchor="ctr"/>
+          <a:lstStyle/>
+          <a:p>
+            <a:pPr indent="0" marL="0">
+              <a:buNone/>
+            </a:pPr>
+            <a:r>
+              <a:rPr lang="en-US" sz="1000" dirty="0">
+                <a:solidFill>
+                  <a:srgbClr val="8A7070"/>
+                </a:solidFill>
+                <a:latin typeface="Arial" pitchFamily="34" charset="0"/>
+                <a:ea typeface="Arial" pitchFamily="34" charset="-122"/>
+                <a:cs typeface="Arial" pitchFamily="34" charset="-120"/>
+              </a:rPr>
+              <a:t>8 afirmações sobre identificação e conexão com os valores</a:t>
+            </a:r>
+            <a:endParaRPr lang="en-US" sz="1000" dirty="0"/>
+          </a:p>
+        </p:txBody>
+      </p:sp>
+      <p:sp>
+        <p:nvSpPr>
+          <p:cNvPr id="11" name="Shape 9"/>
+          <p:cNvSpPr/>
+          <p:nvPr/>
+        </p:nvSpPr>
+        <p:spPr>
+          <a:xfrm>
+            <a:off x="457200" y="2615184"/>
+            <a:ext cx="164592" cy="475488"/>
+          </a:xfrm>
+          <a:prstGeom prst="rect">
+            <a:avLst/>
+          </a:prstGeom>
+          <a:solidFill>
+            <a:srgbClr val="2D6A4F"/>
+          </a:solidFill>
+          <a:ln w="12700">
+            <a:solidFill>
+              <a:srgbClr val="2D6A4F"/>
+            </a:solidFill>
+            <a:prstDash val="solid"/>
+          </a:ln>
+        </p:spPr>
+      </p:sp>
+      <p:sp>
+        <p:nvSpPr>
+          <p:cNvPr id="12" name="Text 10"/>
+          <p:cNvSpPr/>
+          <p:nvPr/>
+        </p:nvSpPr>
+        <p:spPr>
+          <a:xfrm>
+            <a:off x="713232" y="2615184"/>
+            <a:ext cx="3200400" cy="237744"/>
+          </a:xfrm>
+          <a:prstGeom prst="rect">
+            <a:avLst/>
+          </a:prstGeom>
+          <a:noFill/>
+          <a:ln/>
+        </p:spPr>
+        <p:txBody>
+          <a:bodyPr wrap="square" lIns="0" tIns="0" rIns="0" bIns="0" rtlCol="0" anchor="ctr"/>
+          <a:lstStyle/>
+          <a:p>
+            <a:pPr indent="0" marL="0">
+              <a:buNone/>
+            </a:pPr>
+            <a:r>
+              <a:rPr lang="en-US" sz="1200" b="1" dirty="0">
+                <a:solidFill>
+                  <a:srgbClr val="1B2420"/>
+                </a:solidFill>
+                <a:latin typeface="Arial" pitchFamily="34" charset="0"/>
+                <a:ea typeface="Arial" pitchFamily="34" charset="-122"/>
+                <a:cs typeface="Arial" pitchFamily="34" charset="-120"/>
+              </a:rPr>
+              <a:t>Acordos Sociais</a:t>
+            </a:r>
+            <a:endParaRPr lang="en-US" sz="1200" dirty="0"/>
+          </a:p>
+        </p:txBody>
+      </p:sp>
+      <p:sp>
+        <p:nvSpPr>
+          <p:cNvPr id="13" name="Text 11"/>
+          <p:cNvSpPr/>
+          <p:nvPr/>
+        </p:nvSpPr>
+        <p:spPr>
+          <a:xfrm>
+            <a:off x="713232" y="2843784"/>
+            <a:ext cx="7315200" cy="237744"/>
+          </a:xfrm>
+          <a:prstGeom prst="rect">
+            <a:avLst/>
+          </a:prstGeom>
+          <a:noFill/>
+          <a:ln/>
+        </p:spPr>
+        <p:txBody>
+          <a:bodyPr wrap="square" lIns="0" tIns="0" rIns="0" bIns="0" rtlCol="0" anchor="ctr"/>
+          <a:lstStyle/>
+          <a:p>
+            <a:pPr indent="0" marL="0">
+              <a:buNone/>
+            </a:pPr>
+            <a:r>
+              <a:rPr lang="en-US" sz="1000" dirty="0">
+                <a:solidFill>
+                  <a:srgbClr val="8A7070"/>
+                </a:solidFill>
+                <a:latin typeface="Arial" pitchFamily="34" charset="0"/>
+                <a:ea typeface="Arial" pitchFamily="34" charset="-122"/>
+                <a:cs typeface="Arial" pitchFamily="34" charset="-120"/>
+              </a:rPr>
+              <a:t>9 afirmações sobre práticas comunitárias e acordos coletivos</a:t>
+            </a:r>
+            <a:endParaRPr lang="en-US" sz="1000" dirty="0"/>
+          </a:p>
+        </p:txBody>
+      </p:sp>
+      <p:sp>
+        <p:nvSpPr>
+          <p:cNvPr id="14" name="Shape 12"/>
+          <p:cNvSpPr/>
+          <p:nvPr/>
+        </p:nvSpPr>
+        <p:spPr>
+          <a:xfrm>
+            <a:off x="457200" y="3236976"/>
+            <a:ext cx="164592" cy="475488"/>
+          </a:xfrm>
+          <a:prstGeom prst="rect">
+            <a:avLst/>
+          </a:prstGeom>
+          <a:solidFill>
+            <a:srgbClr val="D4821A"/>
+          </a:solidFill>
+          <a:ln w="12700">
+            <a:solidFill>
+              <a:srgbClr val="D4821A"/>
+            </a:solidFill>
+            <a:prstDash val="solid"/>
+          </a:ln>
+        </p:spPr>
+      </p:sp>
+      <p:sp>
+        <p:nvSpPr>
+          <p:cNvPr id="15" name="Text 13"/>
+          <p:cNvSpPr/>
+          <p:nvPr/>
+        </p:nvSpPr>
+        <p:spPr>
+          <a:xfrm>
+            <a:off x="713232" y="3236976"/>
+            <a:ext cx="3200400" cy="237744"/>
+          </a:xfrm>
+          <a:prstGeom prst="rect">
+            <a:avLst/>
+          </a:prstGeom>
+          <a:noFill/>
+          <a:ln/>
+        </p:spPr>
+        <p:txBody>
+          <a:bodyPr wrap="square" lIns="0" tIns="0" rIns="0" bIns="0" rtlCol="0" anchor="ctr"/>
+          <a:lstStyle/>
+          <a:p>
+            <a:pPr indent="0" marL="0">
+              <a:buNone/>
+            </a:pPr>
+            <a:r>
+              <a:rPr lang="en-US" sz="1200" b="1" dirty="0">
+                <a:solidFill>
+                  <a:srgbClr val="1B2420"/>
+                </a:solidFill>
+                <a:latin typeface="Arial" pitchFamily="34" charset="0"/>
+                <a:ea typeface="Arial" pitchFamily="34" charset="-122"/>
+                <a:cs typeface="Arial" pitchFamily="34" charset="-120"/>
+              </a:rPr>
+              <a:t>Prática da Ec. Fraterna</a:t>
+            </a:r>
+            <a:endParaRPr lang="en-US" sz="1200" dirty="0"/>
+          </a:p>
+        </p:txBody>
+      </p:sp>
+      <p:sp>
+        <p:nvSpPr>
+          <p:cNvPr id="16" name="Text 14"/>
+          <p:cNvSpPr/>
+          <p:nvPr/>
+        </p:nvSpPr>
+        <p:spPr>
+          <a:xfrm>
+            <a:off x="713232" y="3465576"/>
+            <a:ext cx="7315200" cy="237744"/>
+          </a:xfrm>
+          <a:prstGeom prst="rect">
+            <a:avLst/>
+          </a:prstGeom>
+          <a:noFill/>
+          <a:ln/>
+        </p:spPr>
+        <p:txBody>
+          <a:bodyPr wrap="square" lIns="0" tIns="0" rIns="0" bIns="0" rtlCol="0" anchor="ctr"/>
+          <a:lstStyle/>
+          <a:p>
+            <a:pPr indent="0" marL="0">
+              <a:buNone/>
+            </a:pPr>
+            <a:r>
+              <a:rPr lang="en-US" sz="1000" dirty="0">
+                <a:solidFill>
+                  <a:srgbClr val="8A7070"/>
+                </a:solidFill>
+                <a:latin typeface="Arial" pitchFamily="34" charset="0"/>
+                <a:ea typeface="Arial" pitchFamily="34" charset="-122"/>
+                <a:cs typeface="Arial" pitchFamily="34" charset="-120"/>
+              </a:rPr>
+              <a:t>8 afirmações sobre práticas de economia solidária e doação</a:t>
+            </a:r>
+            <a:endParaRPr lang="en-US" sz="1000" dirty="0"/>
+          </a:p>
+        </p:txBody>
+      </p:sp>
+      <p:sp>
+        <p:nvSpPr>
+          <p:cNvPr id="17" name="Shape 15"/>
+          <p:cNvSpPr/>
+          <p:nvPr/>
+        </p:nvSpPr>
+        <p:spPr>
+          <a:xfrm>
+            <a:off x="457200" y="3858768"/>
+            <a:ext cx="164592" cy="475488"/>
+          </a:xfrm>
+          <a:prstGeom prst="rect">
+            <a:avLst/>
+          </a:prstGeom>
+          <a:solidFill>
+            <a:srgbClr val="6B46C1"/>
+          </a:solidFill>
+          <a:ln w="12700">
+            <a:solidFill>
+              <a:srgbClr val="6B46C1"/>
+            </a:solidFill>
+            <a:prstDash val="solid"/>
+          </a:ln>
+        </p:spPr>
+      </p:sp>
+      <p:sp>
+        <p:nvSpPr>
+          <p:cNvPr id="18" name="Text 16"/>
+          <p:cNvSpPr/>
+          <p:nvPr/>
+        </p:nvSpPr>
+        <p:spPr>
+          <a:xfrm>
+            <a:off x="713232" y="3858768"/>
+            <a:ext cx="3200400" cy="237744"/>
+          </a:xfrm>
+          <a:prstGeom prst="rect">
+            <a:avLst/>
+          </a:prstGeom>
+          <a:noFill/>
+          <a:ln/>
+        </p:spPr>
+        <p:txBody>
+          <a:bodyPr wrap="square" lIns="0" tIns="0" rIns="0" bIns="0" rtlCol="0" anchor="ctr"/>
+          <a:lstStyle/>
+          <a:p>
+            <a:pPr indent="0" marL="0">
+              <a:buNone/>
+            </a:pPr>
+            <a:r>
+              <a:rPr lang="en-US" sz="1200" b="1" dirty="0">
+                <a:solidFill>
+                  <a:srgbClr val="1B2420"/>
+                </a:solidFill>
+                <a:latin typeface="Arial" pitchFamily="34" charset="0"/>
+                <a:ea typeface="Arial" pitchFamily="34" charset="-122"/>
+                <a:cs typeface="Arial" pitchFamily="34" charset="-120"/>
+              </a:rPr>
+              <a:t>Engajamento</a:t>
+            </a:r>
+            <a:endParaRPr lang="en-US" sz="1200" dirty="0"/>
+          </a:p>
+        </p:txBody>
+      </p:sp>
+      <p:sp>
+        <p:nvSpPr>
+          <p:cNvPr id="19" name="Text 17"/>
+          <p:cNvSpPr/>
+          <p:nvPr/>
+        </p:nvSpPr>
+        <p:spPr>
+          <a:xfrm>
+            <a:off x="713232" y="4087368"/>
+            <a:ext cx="7315200" cy="237744"/>
+          </a:xfrm>
+          <a:prstGeom prst="rect">
+            <a:avLst/>
+          </a:prstGeom>
+          <a:noFill/>
+          <a:ln/>
+        </p:spPr>
+        <p:txBody>
+          <a:bodyPr wrap="square" lIns="0" tIns="0" rIns="0" bIns="0" rtlCol="0" anchor="ctr"/>
+          <a:lstStyle/>
+          <a:p>
+            <a:pPr indent="0" marL="0">
+              <a:buNone/>
+            </a:pPr>
+            <a:r>
+              <a:rPr lang="en-US" sz="1000" dirty="0">
+                <a:solidFill>
+                  <a:srgbClr val="8A7070"/>
+                </a:solidFill>
+                <a:latin typeface="Arial" pitchFamily="34" charset="0"/>
+                <a:ea typeface="Arial" pitchFamily="34" charset="-122"/>
+                <a:cs typeface="Arial" pitchFamily="34" charset="-120"/>
+              </a:rPr>
+              <a:t>5 papéis institucionais: Sou atualmente / Já fui / Nunca fui</a:t>
+            </a:r>
+            <a:endParaRPr lang="en-US" sz="1000" dirty="0"/>
+          </a:p>
+        </p:txBody>
+      </p:sp>
+      <p:sp>
+        <p:nvSpPr>
+          <p:cNvPr id="20" name="Shape 18"/>
+          <p:cNvSpPr/>
+          <p:nvPr/>
+        </p:nvSpPr>
+        <p:spPr>
+          <a:xfrm>
+            <a:off x="457200" y="4443984"/>
+            <a:ext cx="8229600" cy="402336"/>
+          </a:xfrm>
+          <a:prstGeom prst="rect">
+            <a:avLst/>
+          </a:prstGeom>
+          <a:solidFill>
+            <a:srgbClr val="FDF6F4"/>
+          </a:solidFill>
+          <a:ln w="12700">
+            <a:solidFill>
+              <a:srgbClr val="E8D5D0"/>
+            </a:solidFill>
+            <a:prstDash val="solid"/>
+          </a:ln>
+        </p:spPr>
+      </p:sp>
+      <p:sp>
+        <p:nvSpPr>
+          <p:cNvPr id="21" name="Text 19"/>
+          <p:cNvSpPr/>
+          <p:nvPr/>
+        </p:nvSpPr>
+        <p:spPr>
+          <a:xfrm>
+            <a:off x="548640" y="4480560"/>
+            <a:ext cx="8046720" cy="329184"/>
+          </a:xfrm>
+          <a:prstGeom prst="rect">
+            <a:avLst/>
+          </a:prstGeom>
+          <a:noFill/>
+          <a:ln/>
+        </p:spPr>
+        <p:txBody>
+          <a:bodyPr wrap="square" lIns="0" tIns="0" rIns="0" bIns="0" rtlCol="0" anchor="ctr"/>
+          <a:lstStyle/>
+          <a:p>
+            <a:pPr indent="0" marL="0">
+              <a:buNone/>
+            </a:pPr>
+            <a:r>
+              <a:rPr lang="en-US" sz="950" dirty="0">
+                <a:solidFill>
+                  <a:srgbClr val="1B2420"/>
+                </a:solidFill>
+                <a:latin typeface="Arial" pitchFamily="34" charset="0"/>
+                <a:ea typeface="Arial" pitchFamily="34" charset="-122"/>
+                <a:cs typeface="Arial" pitchFamily="34" charset="-120"/>
+              </a:rPr>
+              <a:t>Net Signal: Concordo×1,0 + Concordo parc.×0,4 + Não sei×(−0,2) + Discordo×(−0,8) → normalizado [0, 1]. Modificadores: novatos (≤1 ano) limitados a Inserindo; veteranos (≥5 anos) sem comprometimento → Inserindo/Adaptando.</a:t>
+            </a:r>
+            <a:endParaRPr lang="en-US" sz="950" dirty="0"/>
+          </a:p>
+        </p:txBody>
+      </p:sp>
     </p:spTree>
   </p:cSld>
   <p:clrMapOvr>
@@ -5916,7 +3483,7 @@
                 <a:ea typeface="Arial" pitchFamily="34" charset="-122"/>
                 <a:cs typeface="Arial" pitchFamily="34" charset="-120"/>
               </a:rPr>
-              <a:t>Engajamento em Papéis Institucionais por Nível</a:t>
+              <a:t>Distribuição na Curva dos 7 Estágios</a:t>
             </a:r>
             <a:endParaRPr lang="en-US" sz="2600" dirty="0"/>
           </a:p>
@@ -5955,28 +3522,860 @@
                 <a:ea typeface="Arial" pitchFamily="34" charset="-122"/>
                 <a:cs typeface="Arial" pitchFamily="34" charset="-120"/>
               </a:rPr>
-              <a:t>% de cada situação em relação a 5 papéis na escola — por nível inferido</a:t>
+              <a:t>Posicionamento inferido com base nas respostas — N = 143</a:t>
             </a:r>
             <a:endParaRPr lang="en-US" sz="1200" dirty="0"/>
           </a:p>
         </p:txBody>
       </p:sp>
-      <p:graphicFrame>
-        <p:nvGraphicFramePr>
-          <p:cNvPr id="4" name="Chart 0" descr=""/>
-          <p:cNvGraphicFramePr/>
-          <p:nvPr/>
-        </p:nvGraphicFramePr>
-        <p:xfrm>
-          <a:off x="457200" y="1051560"/>
-          <a:ext cx="8229600" cy="3657600"/>
-        </p:xfrm>
-        <a:graphic xmlns:a="http://schemas.openxmlformats.org/drawingml/2006/main">
-          <a:graphicData uri="http://schemas.openxmlformats.org/drawingml/2006/chart">
-            <c:chart xmlns:c="http://schemas.openxmlformats.org/drawingml/2006/chart" r:id="rId1"/>
-          </a:graphicData>
-        </a:graphic>
-      </p:graphicFrame>
+      <p:pic>
+        <p:nvPicPr>
+          <p:cNvPr id="4" name="Image 0" descr="preencoded.png">    </p:cNvPr>
+          <p:cNvPicPr>
+            <a:picLocks noChangeAspect="1"/>
+          </p:cNvPicPr>
+          <p:nvPr/>
+        </p:nvPicPr>
+        <p:blipFill>
+          <a:blip r:embed="rId1"/>
+          <a:stretch>
+            <a:fillRect/>
+          </a:stretch>
+        </p:blipFill>
+        <p:spPr>
+          <a:xfrm>
+            <a:off x="457200" y="1005840"/>
+            <a:ext cx="8229600" cy="2770632"/>
+          </a:xfrm>
+          <a:prstGeom prst="rect">
+            <a:avLst/>
+          </a:prstGeom>
+        </p:spPr>
+      </p:pic>
+      <p:sp>
+        <p:nvSpPr>
+          <p:cNvPr id="5" name="Shape 2"/>
+          <p:cNvSpPr/>
+          <p:nvPr/>
+        </p:nvSpPr>
+        <p:spPr>
+          <a:xfrm>
+            <a:off x="457200" y="3858768"/>
+            <a:ext cx="1993392" cy="1170432"/>
+          </a:xfrm>
+          <a:prstGeom prst="rect">
+            <a:avLst/>
+          </a:prstGeom>
+          <a:solidFill>
+            <a:srgbClr val="FDF6F4"/>
+          </a:solidFill>
+          <a:ln w="12700">
+            <a:solidFill>
+              <a:srgbClr val="2A9D8F"/>
+            </a:solidFill>
+            <a:prstDash val="solid"/>
+          </a:ln>
+        </p:spPr>
+      </p:sp>
+      <p:sp>
+        <p:nvSpPr>
+          <p:cNvPr id="6" name="Shape 3"/>
+          <p:cNvSpPr/>
+          <p:nvPr/>
+        </p:nvSpPr>
+        <p:spPr>
+          <a:xfrm>
+            <a:off x="457200" y="3858768"/>
+            <a:ext cx="1993392" cy="246888"/>
+          </a:xfrm>
+          <a:prstGeom prst="rect">
+            <a:avLst/>
+          </a:prstGeom>
+          <a:solidFill>
+            <a:srgbClr val="2A9D8F"/>
+          </a:solidFill>
+          <a:ln w="12700">
+            <a:solidFill>
+              <a:srgbClr val="2A9D8F"/>
+            </a:solidFill>
+            <a:prstDash val="solid"/>
+          </a:ln>
+        </p:spPr>
+      </p:sp>
+      <p:sp>
+        <p:nvSpPr>
+          <p:cNvPr id="7" name="Text 4"/>
+          <p:cNvSpPr/>
+          <p:nvPr/>
+        </p:nvSpPr>
+        <p:spPr>
+          <a:xfrm>
+            <a:off x="457200" y="3858768"/>
+            <a:ext cx="1993392" cy="246888"/>
+          </a:xfrm>
+          <a:prstGeom prst="rect">
+            <a:avLst/>
+          </a:prstGeom>
+          <a:noFill/>
+          <a:ln/>
+        </p:spPr>
+        <p:txBody>
+          <a:bodyPr wrap="square" lIns="0" tIns="0" rIns="0" bIns="0" rtlCol="0" anchor="ctr"/>
+          <a:lstStyle/>
+          <a:p>
+            <a:pPr algn="ctr" indent="0" marL="0">
+              <a:buNone/>
+            </a:pPr>
+            <a:r>
+              <a:rPr lang="en-US" sz="950" b="1" dirty="0">
+                <a:solidFill>
+                  <a:srgbClr val="FFFFFF"/>
+                </a:solidFill>
+                <a:latin typeface="Arial" pitchFamily="34" charset="0"/>
+                <a:ea typeface="Arial" pitchFamily="34" charset="-122"/>
+                <a:cs typeface="Arial" pitchFamily="34" charset="-120"/>
+              </a:rPr>
+              <a:t>Inserindo</a:t>
+            </a:r>
+            <a:endParaRPr lang="en-US" sz="950" dirty="0"/>
+          </a:p>
+        </p:txBody>
+      </p:sp>
+      <p:sp>
+        <p:nvSpPr>
+          <p:cNvPr id="8" name="Text 5"/>
+          <p:cNvSpPr/>
+          <p:nvPr/>
+        </p:nvSpPr>
+        <p:spPr>
+          <a:xfrm>
+            <a:off x="457200" y="4114800"/>
+            <a:ext cx="1993392" cy="402336"/>
+          </a:xfrm>
+          <a:prstGeom prst="rect">
+            <a:avLst/>
+          </a:prstGeom>
+          <a:noFill/>
+          <a:ln/>
+        </p:spPr>
+        <p:txBody>
+          <a:bodyPr wrap="square" lIns="0" tIns="0" rIns="0" bIns="0" rtlCol="0" anchor="ctr"/>
+          <a:lstStyle/>
+          <a:p>
+            <a:pPr algn="ctr" indent="0" marL="0">
+              <a:buNone/>
+            </a:pPr>
+            <a:r>
+              <a:rPr lang="en-US" sz="2800" b="1" dirty="0">
+                <a:solidFill>
+                  <a:srgbClr val="2A9D8F"/>
+                </a:solidFill>
+                <a:latin typeface="Arial" pitchFamily="34" charset="0"/>
+                <a:ea typeface="Arial" pitchFamily="34" charset="-122"/>
+                <a:cs typeface="Arial" pitchFamily="34" charset="-120"/>
+              </a:rPr>
+              <a:t>32,2%</a:t>
+            </a:r>
+            <a:endParaRPr lang="en-US" sz="2800" dirty="0"/>
+          </a:p>
+        </p:txBody>
+      </p:sp>
+      <p:sp>
+        <p:nvSpPr>
+          <p:cNvPr id="9" name="Text 6"/>
+          <p:cNvSpPr/>
+          <p:nvPr/>
+        </p:nvSpPr>
+        <p:spPr>
+          <a:xfrm>
+            <a:off x="457200" y="4526280"/>
+            <a:ext cx="1993392" cy="201168"/>
+          </a:xfrm>
+          <a:prstGeom prst="rect">
+            <a:avLst/>
+          </a:prstGeom>
+          <a:noFill/>
+          <a:ln/>
+        </p:spPr>
+        <p:txBody>
+          <a:bodyPr wrap="square" lIns="0" tIns="0" rIns="0" bIns="0" rtlCol="0" anchor="ctr"/>
+          <a:lstStyle/>
+          <a:p>
+            <a:pPr algn="ctr" indent="0" marL="0">
+              <a:buNone/>
+            </a:pPr>
+            <a:r>
+              <a:rPr lang="en-US" sz="1000" dirty="0">
+                <a:solidFill>
+                  <a:srgbClr val="8A7070"/>
+                </a:solidFill>
+                <a:latin typeface="Arial" pitchFamily="34" charset="0"/>
+                <a:ea typeface="Arial" pitchFamily="34" charset="-122"/>
+                <a:cs typeface="Arial" pitchFamily="34" charset="-120"/>
+              </a:rPr>
+              <a:t>N = 46</a:t>
+            </a:r>
+            <a:endParaRPr lang="en-US" sz="1000" dirty="0"/>
+          </a:p>
+        </p:txBody>
+      </p:sp>
+      <p:sp>
+        <p:nvSpPr>
+          <p:cNvPr id="10" name="Text 7"/>
+          <p:cNvSpPr/>
+          <p:nvPr/>
+        </p:nvSpPr>
+        <p:spPr>
+          <a:xfrm>
+            <a:off x="530352" y="4736592"/>
+            <a:ext cx="1847088" cy="237744"/>
+          </a:xfrm>
+          <a:prstGeom prst="rect">
+            <a:avLst/>
+          </a:prstGeom>
+          <a:noFill/>
+          <a:ln/>
+        </p:spPr>
+        <p:txBody>
+          <a:bodyPr wrap="square" lIns="0" tIns="0" rIns="0" bIns="0" rtlCol="0" anchor="ctr"/>
+          <a:lstStyle/>
+          <a:p>
+            <a:pPr algn="ctr" indent="0" marL="0">
+              <a:buNone/>
+            </a:pPr>
+            <a:r>
+              <a:rPr lang="en-US" sz="850" dirty="0">
+                <a:solidFill>
+                  <a:srgbClr val="1B2420"/>
+                </a:solidFill>
+                <a:latin typeface="Arial" pitchFamily="34" charset="0"/>
+                <a:ea typeface="Arial" pitchFamily="34" charset="-122"/>
+                <a:cs typeface="Arial" pitchFamily="34" charset="-120"/>
+              </a:rPr>
+              <a:t>No ponto de virada — decidir SIM ou NÃO</a:t>
+            </a:r>
+            <a:endParaRPr lang="en-US" sz="850" dirty="0"/>
+          </a:p>
+        </p:txBody>
+      </p:sp>
+      <p:sp>
+        <p:nvSpPr>
+          <p:cNvPr id="11" name="Shape 8"/>
+          <p:cNvSpPr/>
+          <p:nvPr/>
+        </p:nvSpPr>
+        <p:spPr>
+          <a:xfrm>
+            <a:off x="2578608" y="3858768"/>
+            <a:ext cx="1993392" cy="1170432"/>
+          </a:xfrm>
+          <a:prstGeom prst="rect">
+            <a:avLst/>
+          </a:prstGeom>
+          <a:solidFill>
+            <a:srgbClr val="FDF6F4"/>
+          </a:solidFill>
+          <a:ln w="12700">
+            <a:solidFill>
+              <a:srgbClr val="3B82C4"/>
+            </a:solidFill>
+            <a:prstDash val="solid"/>
+          </a:ln>
+        </p:spPr>
+      </p:sp>
+      <p:sp>
+        <p:nvSpPr>
+          <p:cNvPr id="12" name="Shape 9"/>
+          <p:cNvSpPr/>
+          <p:nvPr/>
+        </p:nvSpPr>
+        <p:spPr>
+          <a:xfrm>
+            <a:off x="2578608" y="3858768"/>
+            <a:ext cx="1993392" cy="246888"/>
+          </a:xfrm>
+          <a:prstGeom prst="rect">
+            <a:avLst/>
+          </a:prstGeom>
+          <a:solidFill>
+            <a:srgbClr val="3B82C4"/>
+          </a:solidFill>
+          <a:ln w="12700">
+            <a:solidFill>
+              <a:srgbClr val="3B82C4"/>
+            </a:solidFill>
+            <a:prstDash val="solid"/>
+          </a:ln>
+        </p:spPr>
+      </p:sp>
+      <p:sp>
+        <p:nvSpPr>
+          <p:cNvPr id="13" name="Text 10"/>
+          <p:cNvSpPr/>
+          <p:nvPr/>
+        </p:nvSpPr>
+        <p:spPr>
+          <a:xfrm>
+            <a:off x="2578608" y="3858768"/>
+            <a:ext cx="1993392" cy="246888"/>
+          </a:xfrm>
+          <a:prstGeom prst="rect">
+            <a:avLst/>
+          </a:prstGeom>
+          <a:noFill/>
+          <a:ln/>
+        </p:spPr>
+        <p:txBody>
+          <a:bodyPr wrap="square" lIns="0" tIns="0" rIns="0" bIns="0" rtlCol="0" anchor="ctr"/>
+          <a:lstStyle/>
+          <a:p>
+            <a:pPr algn="ctr" indent="0" marL="0">
+              <a:buNone/>
+            </a:pPr>
+            <a:r>
+              <a:rPr lang="en-US" sz="950" b="1" dirty="0">
+                <a:solidFill>
+                  <a:srgbClr val="FFFFFF"/>
+                </a:solidFill>
+                <a:latin typeface="Arial" pitchFamily="34" charset="0"/>
+                <a:ea typeface="Arial" pitchFamily="34" charset="-122"/>
+                <a:cs typeface="Arial" pitchFamily="34" charset="-120"/>
+              </a:rPr>
+              <a:t>Comprometido</a:t>
+            </a:r>
+            <a:endParaRPr lang="en-US" sz="950" dirty="0"/>
+          </a:p>
+        </p:txBody>
+      </p:sp>
+      <p:sp>
+        <p:nvSpPr>
+          <p:cNvPr id="14" name="Text 11"/>
+          <p:cNvSpPr/>
+          <p:nvPr/>
+        </p:nvSpPr>
+        <p:spPr>
+          <a:xfrm>
+            <a:off x="2578608" y="4114800"/>
+            <a:ext cx="1993392" cy="402336"/>
+          </a:xfrm>
+          <a:prstGeom prst="rect">
+            <a:avLst/>
+          </a:prstGeom>
+          <a:noFill/>
+          <a:ln/>
+        </p:spPr>
+        <p:txBody>
+          <a:bodyPr wrap="square" lIns="0" tIns="0" rIns="0" bIns="0" rtlCol="0" anchor="ctr"/>
+          <a:lstStyle/>
+          <a:p>
+            <a:pPr algn="ctr" indent="0" marL="0">
+              <a:buNone/>
+            </a:pPr>
+            <a:r>
+              <a:rPr lang="en-US" sz="2800" b="1" dirty="0">
+                <a:solidFill>
+                  <a:srgbClr val="3B82C4"/>
+                </a:solidFill>
+                <a:latin typeface="Arial" pitchFamily="34" charset="0"/>
+                <a:ea typeface="Arial" pitchFamily="34" charset="-122"/>
+                <a:cs typeface="Arial" pitchFamily="34" charset="-120"/>
+              </a:rPr>
+              <a:t>44,8%</a:t>
+            </a:r>
+            <a:endParaRPr lang="en-US" sz="2800" dirty="0"/>
+          </a:p>
+        </p:txBody>
+      </p:sp>
+      <p:sp>
+        <p:nvSpPr>
+          <p:cNvPr id="15" name="Text 12"/>
+          <p:cNvSpPr/>
+          <p:nvPr/>
+        </p:nvSpPr>
+        <p:spPr>
+          <a:xfrm>
+            <a:off x="2578608" y="4526280"/>
+            <a:ext cx="1993392" cy="201168"/>
+          </a:xfrm>
+          <a:prstGeom prst="rect">
+            <a:avLst/>
+          </a:prstGeom>
+          <a:noFill/>
+          <a:ln/>
+        </p:spPr>
+        <p:txBody>
+          <a:bodyPr wrap="square" lIns="0" tIns="0" rIns="0" bIns="0" rtlCol="0" anchor="ctr"/>
+          <a:lstStyle/>
+          <a:p>
+            <a:pPr algn="ctr" indent="0" marL="0">
+              <a:buNone/>
+            </a:pPr>
+            <a:r>
+              <a:rPr lang="en-US" sz="1000" dirty="0">
+                <a:solidFill>
+                  <a:srgbClr val="8A7070"/>
+                </a:solidFill>
+                <a:latin typeface="Arial" pitchFamily="34" charset="0"/>
+                <a:ea typeface="Arial" pitchFamily="34" charset="-122"/>
+                <a:cs typeface="Arial" pitchFamily="34" charset="-120"/>
+              </a:rPr>
+              <a:t>N = 64</a:t>
+            </a:r>
+            <a:endParaRPr lang="en-US" sz="1000" dirty="0"/>
+          </a:p>
+        </p:txBody>
+      </p:sp>
+      <p:sp>
+        <p:nvSpPr>
+          <p:cNvPr id="16" name="Text 13"/>
+          <p:cNvSpPr/>
+          <p:nvPr/>
+        </p:nvSpPr>
+        <p:spPr>
+          <a:xfrm>
+            <a:off x="2651760" y="4736592"/>
+            <a:ext cx="1847088" cy="237744"/>
+          </a:xfrm>
+          <a:prstGeom prst="rect">
+            <a:avLst/>
+          </a:prstGeom>
+          <a:noFill/>
+          <a:ln/>
+        </p:spPr>
+        <p:txBody>
+          <a:bodyPr wrap="square" lIns="0" tIns="0" rIns="0" bIns="0" rtlCol="0" anchor="ctr"/>
+          <a:lstStyle/>
+          <a:p>
+            <a:pPr algn="ctr" indent="0" marL="0">
+              <a:buNone/>
+            </a:pPr>
+            <a:r>
+              <a:rPr lang="en-US" sz="850" dirty="0">
+                <a:solidFill>
+                  <a:srgbClr val="1B2420"/>
+                </a:solidFill>
+                <a:latin typeface="Arial" pitchFamily="34" charset="0"/>
+                <a:ea typeface="Arial" pitchFamily="34" charset="-122"/>
+                <a:cs typeface="Arial" pitchFamily="34" charset="-120"/>
+              </a:rPr>
+              <a:t>Disse SIM, sem papel ativo estruturado</a:t>
+            </a:r>
+            <a:endParaRPr lang="en-US" sz="850" dirty="0"/>
+          </a:p>
+        </p:txBody>
+      </p:sp>
+      <p:sp>
+        <p:nvSpPr>
+          <p:cNvPr id="17" name="Shape 14"/>
+          <p:cNvSpPr/>
+          <p:nvPr/>
+        </p:nvSpPr>
+        <p:spPr>
+          <a:xfrm>
+            <a:off x="4700016" y="3858768"/>
+            <a:ext cx="1993392" cy="1170432"/>
+          </a:xfrm>
+          <a:prstGeom prst="rect">
+            <a:avLst/>
+          </a:prstGeom>
+          <a:solidFill>
+            <a:srgbClr val="FDF6F4"/>
+          </a:solidFill>
+          <a:ln w="12700">
+            <a:solidFill>
+              <a:srgbClr val="1D5B7A"/>
+            </a:solidFill>
+            <a:prstDash val="solid"/>
+          </a:ln>
+        </p:spPr>
+      </p:sp>
+      <p:sp>
+        <p:nvSpPr>
+          <p:cNvPr id="18" name="Shape 15"/>
+          <p:cNvSpPr/>
+          <p:nvPr/>
+        </p:nvSpPr>
+        <p:spPr>
+          <a:xfrm>
+            <a:off x="4700016" y="3858768"/>
+            <a:ext cx="1993392" cy="246888"/>
+          </a:xfrm>
+          <a:prstGeom prst="rect">
+            <a:avLst/>
+          </a:prstGeom>
+          <a:solidFill>
+            <a:srgbClr val="1D5B7A"/>
+          </a:solidFill>
+          <a:ln w="12700">
+            <a:solidFill>
+              <a:srgbClr val="1D5B7A"/>
+            </a:solidFill>
+            <a:prstDash val="solid"/>
+          </a:ln>
+        </p:spPr>
+      </p:sp>
+      <p:sp>
+        <p:nvSpPr>
+          <p:cNvPr id="19" name="Text 16"/>
+          <p:cNvSpPr/>
+          <p:nvPr/>
+        </p:nvSpPr>
+        <p:spPr>
+          <a:xfrm>
+            <a:off x="4700016" y="3858768"/>
+            <a:ext cx="1993392" cy="246888"/>
+          </a:xfrm>
+          <a:prstGeom prst="rect">
+            <a:avLst/>
+          </a:prstGeom>
+          <a:noFill/>
+          <a:ln/>
+        </p:spPr>
+        <p:txBody>
+          <a:bodyPr wrap="square" lIns="0" tIns="0" rIns="0" bIns="0" rtlCol="0" anchor="ctr"/>
+          <a:lstStyle/>
+          <a:p>
+            <a:pPr algn="ctr" indent="0" marL="0">
+              <a:buNone/>
+            </a:pPr>
+            <a:r>
+              <a:rPr lang="en-US" sz="950" b="1" dirty="0">
+                <a:solidFill>
+                  <a:srgbClr val="FFFFFF"/>
+                </a:solidFill>
+                <a:latin typeface="Arial" pitchFamily="34" charset="0"/>
+                <a:ea typeface="Arial" pitchFamily="34" charset="-122"/>
+                <a:cs typeface="Arial" pitchFamily="34" charset="-120"/>
+              </a:rPr>
+              <a:t>Ativo no Motivo</a:t>
+            </a:r>
+            <a:endParaRPr lang="en-US" sz="950" dirty="0"/>
+          </a:p>
+        </p:txBody>
+      </p:sp>
+      <p:sp>
+        <p:nvSpPr>
+          <p:cNvPr id="20" name="Text 17"/>
+          <p:cNvSpPr/>
+          <p:nvPr/>
+        </p:nvSpPr>
+        <p:spPr>
+          <a:xfrm>
+            <a:off x="4700016" y="4114800"/>
+            <a:ext cx="1993392" cy="402336"/>
+          </a:xfrm>
+          <a:prstGeom prst="rect">
+            <a:avLst/>
+          </a:prstGeom>
+          <a:noFill/>
+          <a:ln/>
+        </p:spPr>
+        <p:txBody>
+          <a:bodyPr wrap="square" lIns="0" tIns="0" rIns="0" bIns="0" rtlCol="0" anchor="ctr"/>
+          <a:lstStyle/>
+          <a:p>
+            <a:pPr algn="ctr" indent="0" marL="0">
+              <a:buNone/>
+            </a:pPr>
+            <a:r>
+              <a:rPr lang="en-US" sz="2800" b="1" dirty="0">
+                <a:solidFill>
+                  <a:srgbClr val="1D5B7A"/>
+                </a:solidFill>
+                <a:latin typeface="Arial" pitchFamily="34" charset="0"/>
+                <a:ea typeface="Arial" pitchFamily="34" charset="-122"/>
+                <a:cs typeface="Arial" pitchFamily="34" charset="-120"/>
+              </a:rPr>
+              <a:t>11,9%</a:t>
+            </a:r>
+            <a:endParaRPr lang="en-US" sz="2800" dirty="0"/>
+          </a:p>
+        </p:txBody>
+      </p:sp>
+      <p:sp>
+        <p:nvSpPr>
+          <p:cNvPr id="21" name="Text 18"/>
+          <p:cNvSpPr/>
+          <p:nvPr/>
+        </p:nvSpPr>
+        <p:spPr>
+          <a:xfrm>
+            <a:off x="4700016" y="4526280"/>
+            <a:ext cx="1993392" cy="201168"/>
+          </a:xfrm>
+          <a:prstGeom prst="rect">
+            <a:avLst/>
+          </a:prstGeom>
+          <a:noFill/>
+          <a:ln/>
+        </p:spPr>
+        <p:txBody>
+          <a:bodyPr wrap="square" lIns="0" tIns="0" rIns="0" bIns="0" rtlCol="0" anchor="ctr"/>
+          <a:lstStyle/>
+          <a:p>
+            <a:pPr algn="ctr" indent="0" marL="0">
+              <a:buNone/>
+            </a:pPr>
+            <a:r>
+              <a:rPr lang="en-US" sz="1000" dirty="0">
+                <a:solidFill>
+                  <a:srgbClr val="8A7070"/>
+                </a:solidFill>
+                <a:latin typeface="Arial" pitchFamily="34" charset="0"/>
+                <a:ea typeface="Arial" pitchFamily="34" charset="-122"/>
+                <a:cs typeface="Arial" pitchFamily="34" charset="-120"/>
+              </a:rPr>
+              <a:t>N = 17</a:t>
+            </a:r>
+            <a:endParaRPr lang="en-US" sz="1000" dirty="0"/>
+          </a:p>
+        </p:txBody>
+      </p:sp>
+      <p:sp>
+        <p:nvSpPr>
+          <p:cNvPr id="22" name="Text 19"/>
+          <p:cNvSpPr/>
+          <p:nvPr/>
+        </p:nvSpPr>
+        <p:spPr>
+          <a:xfrm>
+            <a:off x="4773168" y="4736592"/>
+            <a:ext cx="1847088" cy="237744"/>
+          </a:xfrm>
+          <a:prstGeom prst="rect">
+            <a:avLst/>
+          </a:prstGeom>
+          <a:noFill/>
+          <a:ln/>
+        </p:spPr>
+        <p:txBody>
+          <a:bodyPr wrap="square" lIns="0" tIns="0" rIns="0" bIns="0" rtlCol="0" anchor="ctr"/>
+          <a:lstStyle/>
+          <a:p>
+            <a:pPr algn="ctr" indent="0" marL="0">
+              <a:buNone/>
+            </a:pPr>
+            <a:r>
+              <a:rPr lang="en-US" sz="850" dirty="0">
+                <a:solidFill>
+                  <a:srgbClr val="1B2420"/>
+                </a:solidFill>
+                <a:latin typeface="Arial" pitchFamily="34" charset="0"/>
+                <a:ea typeface="Arial" pitchFamily="34" charset="-122"/>
+                <a:cs typeface="Arial" pitchFamily="34" charset="-120"/>
+              </a:rPr>
+              <a:t>Engajado com ao menos 1 papel ativo</a:t>
+            </a:r>
+            <a:endParaRPr lang="en-US" sz="850" dirty="0"/>
+          </a:p>
+        </p:txBody>
+      </p:sp>
+      <p:sp>
+        <p:nvSpPr>
+          <p:cNvPr id="23" name="Shape 20"/>
+          <p:cNvSpPr/>
+          <p:nvPr/>
+        </p:nvSpPr>
+        <p:spPr>
+          <a:xfrm>
+            <a:off x="6821424" y="3858768"/>
+            <a:ext cx="1993392" cy="1170432"/>
+          </a:xfrm>
+          <a:prstGeom prst="rect">
+            <a:avLst/>
+          </a:prstGeom>
+          <a:solidFill>
+            <a:srgbClr val="FDF6F4"/>
+          </a:solidFill>
+          <a:ln w="12700">
+            <a:solidFill>
+              <a:srgbClr val="6B46C1"/>
+            </a:solidFill>
+            <a:prstDash val="solid"/>
+          </a:ln>
+        </p:spPr>
+      </p:sp>
+      <p:sp>
+        <p:nvSpPr>
+          <p:cNvPr id="24" name="Shape 21"/>
+          <p:cNvSpPr/>
+          <p:nvPr/>
+        </p:nvSpPr>
+        <p:spPr>
+          <a:xfrm>
+            <a:off x="6821424" y="3858768"/>
+            <a:ext cx="1993392" cy="246888"/>
+          </a:xfrm>
+          <a:prstGeom prst="rect">
+            <a:avLst/>
+          </a:prstGeom>
+          <a:solidFill>
+            <a:srgbClr val="6B46C1"/>
+          </a:solidFill>
+          <a:ln w="12700">
+            <a:solidFill>
+              <a:srgbClr val="6B46C1"/>
+            </a:solidFill>
+            <a:prstDash val="solid"/>
+          </a:ln>
+        </p:spPr>
+      </p:sp>
+      <p:sp>
+        <p:nvSpPr>
+          <p:cNvPr id="25" name="Text 22"/>
+          <p:cNvSpPr/>
+          <p:nvPr/>
+        </p:nvSpPr>
+        <p:spPr>
+          <a:xfrm>
+            <a:off x="6821424" y="3858768"/>
+            <a:ext cx="1993392" cy="246888"/>
+          </a:xfrm>
+          <a:prstGeom prst="rect">
+            <a:avLst/>
+          </a:prstGeom>
+          <a:noFill/>
+          <a:ln/>
+        </p:spPr>
+        <p:txBody>
+          <a:bodyPr wrap="square" lIns="0" tIns="0" rIns="0" bIns="0" rtlCol="0" anchor="ctr"/>
+          <a:lstStyle/>
+          <a:p>
+            <a:pPr algn="ctr" indent="0" marL="0">
+              <a:buNone/>
+            </a:pPr>
+            <a:r>
+              <a:rPr lang="en-US" sz="950" b="1" dirty="0">
+                <a:solidFill>
+                  <a:srgbClr val="FFFFFF"/>
+                </a:solidFill>
+                <a:latin typeface="Arial" pitchFamily="34" charset="0"/>
+                <a:ea typeface="Arial" pitchFamily="34" charset="-122"/>
+                <a:cs typeface="Arial" pitchFamily="34" charset="-120"/>
+              </a:rPr>
+              <a:t>Emb + Coc</a:t>
+            </a:r>
+            <a:endParaRPr lang="en-US" sz="950" dirty="0"/>
+          </a:p>
+        </p:txBody>
+      </p:sp>
+      <p:sp>
+        <p:nvSpPr>
+          <p:cNvPr id="26" name="Text 23"/>
+          <p:cNvSpPr/>
+          <p:nvPr/>
+        </p:nvSpPr>
+        <p:spPr>
+          <a:xfrm>
+            <a:off x="6821424" y="4114800"/>
+            <a:ext cx="1993392" cy="402336"/>
+          </a:xfrm>
+          <a:prstGeom prst="rect">
+            <a:avLst/>
+          </a:prstGeom>
+          <a:noFill/>
+          <a:ln/>
+        </p:spPr>
+        <p:txBody>
+          <a:bodyPr wrap="square" lIns="0" tIns="0" rIns="0" bIns="0" rtlCol="0" anchor="ctr"/>
+          <a:lstStyle/>
+          <a:p>
+            <a:pPr algn="ctr" indent="0" marL="0">
+              <a:buNone/>
+            </a:pPr>
+            <a:r>
+              <a:rPr lang="en-US" sz="2800" b="1" dirty="0">
+                <a:solidFill>
+                  <a:srgbClr val="6B46C1"/>
+                </a:solidFill>
+                <a:latin typeface="Arial" pitchFamily="34" charset="0"/>
+                <a:ea typeface="Arial" pitchFamily="34" charset="-122"/>
+                <a:cs typeface="Arial" pitchFamily="34" charset="-120"/>
+              </a:rPr>
+              <a:t>10,5%</a:t>
+            </a:r>
+            <a:endParaRPr lang="en-US" sz="2800" dirty="0"/>
+          </a:p>
+        </p:txBody>
+      </p:sp>
+      <p:sp>
+        <p:nvSpPr>
+          <p:cNvPr id="27" name="Text 24"/>
+          <p:cNvSpPr/>
+          <p:nvPr/>
+        </p:nvSpPr>
+        <p:spPr>
+          <a:xfrm>
+            <a:off x="6821424" y="4526280"/>
+            <a:ext cx="1993392" cy="201168"/>
+          </a:xfrm>
+          <a:prstGeom prst="rect">
+            <a:avLst/>
+          </a:prstGeom>
+          <a:noFill/>
+          <a:ln/>
+        </p:spPr>
+        <p:txBody>
+          <a:bodyPr wrap="square" lIns="0" tIns="0" rIns="0" bIns="0" rtlCol="0" anchor="ctr"/>
+          <a:lstStyle/>
+          <a:p>
+            <a:pPr algn="ctr" indent="0" marL="0">
+              <a:buNone/>
+            </a:pPr>
+            <a:r>
+              <a:rPr lang="en-US" sz="1000" dirty="0">
+                <a:solidFill>
+                  <a:srgbClr val="8A7070"/>
+                </a:solidFill>
+                <a:latin typeface="Arial" pitchFamily="34" charset="0"/>
+                <a:ea typeface="Arial" pitchFamily="34" charset="-122"/>
+                <a:cs typeface="Arial" pitchFamily="34" charset="-120"/>
+              </a:rPr>
+              <a:t>N = 15</a:t>
+            </a:r>
+            <a:endParaRPr lang="en-US" sz="1000" dirty="0"/>
+          </a:p>
+        </p:txBody>
+      </p:sp>
+      <p:sp>
+        <p:nvSpPr>
+          <p:cNvPr id="28" name="Text 25"/>
+          <p:cNvSpPr/>
+          <p:nvPr/>
+        </p:nvSpPr>
+        <p:spPr>
+          <a:xfrm>
+            <a:off x="6894576" y="4736592"/>
+            <a:ext cx="1847088" cy="237744"/>
+          </a:xfrm>
+          <a:prstGeom prst="rect">
+            <a:avLst/>
+          </a:prstGeom>
+          <a:noFill/>
+          <a:ln/>
+        </p:spPr>
+        <p:txBody>
+          <a:bodyPr wrap="square" lIns="0" tIns="0" rIns="0" bIns="0" rtlCol="0" anchor="ctr"/>
+          <a:lstStyle/>
+          <a:p>
+            <a:pPr algn="ctr" indent="0" marL="0">
+              <a:buNone/>
+            </a:pPr>
+            <a:r>
+              <a:rPr lang="en-US" sz="850" dirty="0">
+                <a:solidFill>
+                  <a:srgbClr val="1B2420"/>
+                </a:solidFill>
+                <a:latin typeface="Arial" pitchFamily="34" charset="0"/>
+                <a:ea typeface="Arial" pitchFamily="34" charset="-122"/>
+                <a:cs typeface="Arial" pitchFamily="34" charset="-120"/>
+              </a:rPr>
+              <a:t>Referências comunitárias e co-criadores</a:t>
+            </a:r>
+            <a:endParaRPr lang="en-US" sz="850" dirty="0"/>
+          </a:p>
+        </p:txBody>
+      </p:sp>
     </p:spTree>
   </p:cSld>
   <p:clrMapOvr>
@@ -6042,7 +4441,7 @@
                 <a:ea typeface="Arial" pitchFamily="34" charset="-122"/>
                 <a:cs typeface="Arial" pitchFamily="34" charset="-120"/>
               </a:rPr>
-              <a:t>Autoavaliação vs. Estágio Inferido</a:t>
+              <a:t>Concordância por Esfera e Nível Inferido</a:t>
             </a:r>
             <a:endParaRPr lang="en-US" sz="2600" dirty="0"/>
           </a:p>
@@ -6081,388 +4480,36 @@
                 <a:ea typeface="Arial" pitchFamily="34" charset="-122"/>
                 <a:cs typeface="Arial" pitchFamily="34" charset="-120"/>
               </a:rPr>
-              <a:t>Comparação entre o estágio declarado na Q10 e o inferido pelas respostas</a:t>
+              <a:t>% de respostas positivas por esfera — agrupado por nível (exclui Adaptando, n=1)</a:t>
             </a:r>
             <a:endParaRPr lang="en-US" sz="1200" dirty="0"/>
           </a:p>
         </p:txBody>
       </p:sp>
-      <p:sp>
-        <p:nvSpPr>
-          <p:cNvPr id="4" name="Shape 2"/>
-          <p:cNvSpPr/>
-          <p:nvPr/>
-        </p:nvSpPr>
-        <p:spPr>
-          <a:xfrm>
-            <a:off x="457200" y="1188720"/>
-            <a:ext cx="201168" cy="777240"/>
-          </a:xfrm>
-          <a:prstGeom prst="rect">
-            <a:avLst/>
-          </a:prstGeom>
-          <a:solidFill>
-            <a:srgbClr val="2D6A4F"/>
-          </a:solidFill>
-          <a:ln w="12700">
-            <a:solidFill>
-              <a:srgbClr val="2D6A4F"/>
-            </a:solidFill>
-            <a:prstDash val="solid"/>
-          </a:ln>
-        </p:spPr>
-      </p:sp>
-      <p:sp>
-        <p:nvSpPr>
-          <p:cNvPr id="5" name="Text 3"/>
-          <p:cNvSpPr/>
-          <p:nvPr/>
-        </p:nvSpPr>
-        <p:spPr>
-          <a:xfrm>
-            <a:off x="749808" y="1188720"/>
-            <a:ext cx="1645920" cy="411480"/>
-          </a:xfrm>
-          <a:prstGeom prst="rect">
-            <a:avLst/>
-          </a:prstGeom>
-          <a:noFill/>
-          <a:ln/>
-        </p:spPr>
-        <p:txBody>
-          <a:bodyPr wrap="square" lIns="0" tIns="0" rIns="0" bIns="0" rtlCol="0" anchor="ctr"/>
-          <a:lstStyle/>
-          <a:p>
-            <a:pPr indent="0" marL="0">
-              <a:buNone/>
-            </a:pPr>
-            <a:r>
-              <a:rPr lang="en-US" sz="3200" b="1" dirty="0">
-                <a:solidFill>
-                  <a:srgbClr val="2D6A4F"/>
-                </a:solidFill>
-                <a:latin typeface="Arial" pitchFamily="34" charset="0"/>
-                <a:ea typeface="Arial" pitchFamily="34" charset="-122"/>
-                <a:cs typeface="Arial" pitchFamily="34" charset="-120"/>
-              </a:rPr>
-              <a:t>26,6%</a:t>
-            </a:r>
-            <a:endParaRPr lang="en-US" sz="3200" dirty="0"/>
-          </a:p>
-        </p:txBody>
-      </p:sp>
-      <p:sp>
-        <p:nvSpPr>
-          <p:cNvPr id="6" name="Text 4"/>
-          <p:cNvSpPr/>
-          <p:nvPr/>
-        </p:nvSpPr>
-        <p:spPr>
-          <a:xfrm>
-            <a:off x="749808" y="1572768"/>
-            <a:ext cx="3200400" cy="384048"/>
-          </a:xfrm>
-          <a:prstGeom prst="rect">
-            <a:avLst/>
-          </a:prstGeom>
-          <a:noFill/>
-          <a:ln/>
-        </p:spPr>
-        <p:txBody>
-          <a:bodyPr wrap="square" lIns="0" tIns="0" rIns="0" bIns="0" rtlCol="0" anchor="ctr"/>
-          <a:lstStyle/>
-          <a:p>
-            <a:pPr indent="0" marL="0">
-              <a:buNone/>
-            </a:pPr>
-            <a:r>
-              <a:rPr lang="en-US" sz="1000" dirty="0">
-                <a:solidFill>
-                  <a:srgbClr val="8A7070"/>
-                </a:solidFill>
-                <a:latin typeface="Arial" pitchFamily="34" charset="0"/>
-                <a:ea typeface="Arial" pitchFamily="34" charset="-122"/>
-                <a:cs typeface="Arial" pitchFamily="34" charset="-120"/>
-              </a:rPr>
-              <a:t>Alinhado</a:t>
-            </a:r>
-            <a:endParaRPr lang="en-US" sz="1000" dirty="0"/>
-          </a:p>
-          <a:p>
-            <a:pPr indent="0" marL="0">
-              <a:buNone/>
-            </a:pPr>
-            <a:r>
-              <a:rPr lang="en-US" sz="1000" dirty="0">
-                <a:solidFill>
-                  <a:srgbClr val="8A7070"/>
-                </a:solidFill>
-                <a:latin typeface="Arial" pitchFamily="34" charset="0"/>
-                <a:ea typeface="Arial" pitchFamily="34" charset="-122"/>
-                <a:cs typeface="Arial" pitchFamily="34" charset="-120"/>
-              </a:rPr>
-              <a:t>(38 pessoas)</a:t>
-            </a:r>
-            <a:endParaRPr lang="en-US" sz="1000" dirty="0"/>
-          </a:p>
-        </p:txBody>
-      </p:sp>
-      <p:sp>
-        <p:nvSpPr>
-          <p:cNvPr id="7" name="Shape 5"/>
-          <p:cNvSpPr/>
-          <p:nvPr/>
-        </p:nvSpPr>
-        <p:spPr>
-          <a:xfrm>
-            <a:off x="457200" y="2423160"/>
-            <a:ext cx="201168" cy="777240"/>
-          </a:xfrm>
-          <a:prstGeom prst="rect">
-            <a:avLst/>
-          </a:prstGeom>
-          <a:solidFill>
-            <a:srgbClr val="457B9D"/>
-          </a:solidFill>
-          <a:ln w="12700">
-            <a:solidFill>
-              <a:srgbClr val="457B9D"/>
-            </a:solidFill>
-            <a:prstDash val="solid"/>
-          </a:ln>
-        </p:spPr>
-      </p:sp>
-      <p:sp>
-        <p:nvSpPr>
-          <p:cNvPr id="8" name="Text 6"/>
-          <p:cNvSpPr/>
-          <p:nvPr/>
-        </p:nvSpPr>
-        <p:spPr>
-          <a:xfrm>
-            <a:off x="749808" y="2423160"/>
-            <a:ext cx="1645920" cy="411480"/>
-          </a:xfrm>
-          <a:prstGeom prst="rect">
-            <a:avLst/>
-          </a:prstGeom>
-          <a:noFill/>
-          <a:ln/>
-        </p:spPr>
-        <p:txBody>
-          <a:bodyPr wrap="square" lIns="0" tIns="0" rIns="0" bIns="0" rtlCol="0" anchor="ctr"/>
-          <a:lstStyle/>
-          <a:p>
-            <a:pPr indent="0" marL="0">
-              <a:buNone/>
-            </a:pPr>
-            <a:r>
-              <a:rPr lang="en-US" sz="3200" b="1" dirty="0">
-                <a:solidFill>
-                  <a:srgbClr val="457B9D"/>
-                </a:solidFill>
-                <a:latin typeface="Arial" pitchFamily="34" charset="0"/>
-                <a:ea typeface="Arial" pitchFamily="34" charset="-122"/>
-                <a:cs typeface="Arial" pitchFamily="34" charset="-120"/>
-              </a:rPr>
-              <a:t>42,0%</a:t>
-            </a:r>
-            <a:endParaRPr lang="en-US" sz="3200" dirty="0"/>
-          </a:p>
-        </p:txBody>
-      </p:sp>
-      <p:sp>
-        <p:nvSpPr>
-          <p:cNvPr id="9" name="Text 7"/>
-          <p:cNvSpPr/>
-          <p:nvPr/>
-        </p:nvSpPr>
-        <p:spPr>
-          <a:xfrm>
-            <a:off x="749808" y="2807208"/>
-            <a:ext cx="3200400" cy="384048"/>
-          </a:xfrm>
-          <a:prstGeom prst="rect">
-            <a:avLst/>
-          </a:prstGeom>
-          <a:noFill/>
-          <a:ln/>
-        </p:spPr>
-        <p:txBody>
-          <a:bodyPr wrap="square" lIns="0" tIns="0" rIns="0" bIns="0" rtlCol="0" anchor="ctr"/>
-          <a:lstStyle/>
-          <a:p>
-            <a:pPr indent="0" marL="0">
-              <a:buNone/>
-            </a:pPr>
-            <a:r>
-              <a:rPr lang="en-US" sz="1000" dirty="0">
-                <a:solidFill>
-                  <a:srgbClr val="8A7070"/>
-                </a:solidFill>
-                <a:latin typeface="Arial" pitchFamily="34" charset="0"/>
-                <a:ea typeface="Arial" pitchFamily="34" charset="-122"/>
-                <a:cs typeface="Arial" pitchFamily="34" charset="-120"/>
-              </a:rPr>
-              <a:t>Potencial não declarado</a:t>
-            </a:r>
-            <a:endParaRPr lang="en-US" sz="1000" dirty="0"/>
-          </a:p>
-          <a:p>
-            <a:pPr indent="0" marL="0">
-              <a:buNone/>
-            </a:pPr>
-            <a:r>
-              <a:rPr lang="en-US" sz="1000" dirty="0">
-                <a:solidFill>
-                  <a:srgbClr val="8A7070"/>
-                </a:solidFill>
-                <a:latin typeface="Arial" pitchFamily="34" charset="0"/>
-                <a:ea typeface="Arial" pitchFamily="34" charset="-122"/>
-                <a:cs typeface="Arial" pitchFamily="34" charset="-120"/>
-              </a:rPr>
-              <a:t>(sub-valorização)</a:t>
-            </a:r>
-            <a:endParaRPr lang="en-US" sz="1000" dirty="0"/>
-          </a:p>
-        </p:txBody>
-      </p:sp>
-      <p:sp>
-        <p:nvSpPr>
-          <p:cNvPr id="10" name="Shape 8"/>
-          <p:cNvSpPr/>
-          <p:nvPr/>
-        </p:nvSpPr>
-        <p:spPr>
-          <a:xfrm>
-            <a:off x="457200" y="3657600"/>
-            <a:ext cx="201168" cy="777240"/>
-          </a:xfrm>
-          <a:prstGeom prst="rect">
-            <a:avLst/>
-          </a:prstGeom>
-          <a:solidFill>
-            <a:srgbClr val="A83048"/>
-          </a:solidFill>
-          <a:ln w="12700">
-            <a:solidFill>
-              <a:srgbClr val="A83048"/>
-            </a:solidFill>
-            <a:prstDash val="solid"/>
-          </a:ln>
-        </p:spPr>
-      </p:sp>
-      <p:sp>
-        <p:nvSpPr>
-          <p:cNvPr id="11" name="Text 9"/>
-          <p:cNvSpPr/>
-          <p:nvPr/>
-        </p:nvSpPr>
-        <p:spPr>
-          <a:xfrm>
-            <a:off x="749808" y="3657600"/>
-            <a:ext cx="1645920" cy="411480"/>
-          </a:xfrm>
-          <a:prstGeom prst="rect">
-            <a:avLst/>
-          </a:prstGeom>
-          <a:noFill/>
-          <a:ln/>
-        </p:spPr>
-        <p:txBody>
-          <a:bodyPr wrap="square" lIns="0" tIns="0" rIns="0" bIns="0" rtlCol="0" anchor="ctr"/>
-          <a:lstStyle/>
-          <a:p>
-            <a:pPr indent="0" marL="0">
-              <a:buNone/>
-            </a:pPr>
-            <a:r>
-              <a:rPr lang="en-US" sz="3200" b="1" dirty="0">
-                <a:solidFill>
-                  <a:srgbClr val="A83048"/>
-                </a:solidFill>
-                <a:latin typeface="Arial" pitchFamily="34" charset="0"/>
-                <a:ea typeface="Arial" pitchFamily="34" charset="-122"/>
-                <a:cs typeface="Arial" pitchFamily="34" charset="-120"/>
-              </a:rPr>
-              <a:t>30,1%</a:t>
-            </a:r>
-            <a:endParaRPr lang="en-US" sz="3200" dirty="0"/>
-          </a:p>
-        </p:txBody>
-      </p:sp>
-      <p:sp>
-        <p:nvSpPr>
-          <p:cNvPr id="12" name="Text 10"/>
-          <p:cNvSpPr/>
-          <p:nvPr/>
-        </p:nvSpPr>
-        <p:spPr>
-          <a:xfrm>
-            <a:off x="749808" y="4041648"/>
-            <a:ext cx="3200400" cy="384048"/>
-          </a:xfrm>
-          <a:prstGeom prst="rect">
-            <a:avLst/>
-          </a:prstGeom>
-          <a:noFill/>
-          <a:ln/>
-        </p:spPr>
-        <p:txBody>
-          <a:bodyPr wrap="square" lIns="0" tIns="0" rIns="0" bIns="0" rtlCol="0" anchor="ctr"/>
-          <a:lstStyle/>
-          <a:p>
-            <a:pPr indent="0" marL="0">
-              <a:buNone/>
-            </a:pPr>
-            <a:r>
-              <a:rPr lang="en-US" sz="1000" dirty="0">
-                <a:solidFill>
-                  <a:srgbClr val="8A7070"/>
-                </a:solidFill>
-                <a:latin typeface="Arial" pitchFamily="34" charset="0"/>
-                <a:ea typeface="Arial" pitchFamily="34" charset="-122"/>
-                <a:cs typeface="Arial" pitchFamily="34" charset="-120"/>
-              </a:rPr>
-              <a:t>Autoposicionamento</a:t>
-            </a:r>
-            <a:endParaRPr lang="en-US" sz="1000" dirty="0"/>
-          </a:p>
-          <a:p>
-            <a:pPr indent="0" marL="0">
-              <a:buNone/>
-            </a:pPr>
-            <a:r>
-              <a:rPr lang="en-US" sz="1000" dirty="0">
-                <a:solidFill>
-                  <a:srgbClr val="8A7070"/>
-                </a:solidFill>
-                <a:latin typeface="Arial" pitchFamily="34" charset="0"/>
-                <a:ea typeface="Arial" pitchFamily="34" charset="-122"/>
-                <a:cs typeface="Arial" pitchFamily="34" charset="-120"/>
-              </a:rPr>
-              <a:t>superior</a:t>
-            </a:r>
-            <a:endParaRPr lang="en-US" sz="1000" dirty="0"/>
-          </a:p>
-        </p:txBody>
-      </p:sp>
-      <p:graphicFrame>
-        <p:nvGraphicFramePr>
-          <p:cNvPr id="13" name="Chart 0" descr=""/>
-          <p:cNvGraphicFramePr/>
-          <p:nvPr/>
-        </p:nvGraphicFramePr>
-        <p:xfrm>
-          <a:off x="4389120" y="1051560"/>
-          <a:ext cx="4251960" cy="3657600"/>
-        </p:xfrm>
-        <a:graphic xmlns:a="http://schemas.openxmlformats.org/drawingml/2006/main">
-          <a:graphicData uri="http://schemas.openxmlformats.org/drawingml/2006/chart">
-            <c:chart xmlns:c="http://schemas.openxmlformats.org/drawingml/2006/chart" r:id="rId1"/>
-          </a:graphicData>
-        </a:graphic>
-      </p:graphicFrame>
+      <p:pic>
+        <p:nvPicPr>
+          <p:cNvPr id="4" name="Image 0" descr="preencoded.png">    </p:cNvPr>
+          <p:cNvPicPr>
+            <a:picLocks noChangeAspect="1"/>
+          </p:cNvPicPr>
+          <p:nvPr/>
+        </p:nvPicPr>
+        <p:blipFill>
+          <a:blip r:embed="rId1"/>
+          <a:stretch>
+            <a:fillRect/>
+          </a:stretch>
+        </p:blipFill>
+        <p:spPr>
+          <a:xfrm>
+            <a:off x="457200" y="1051560"/>
+            <a:ext cx="8229600" cy="3749040"/>
+          </a:xfrm>
+          <a:prstGeom prst="rect">
+            <a:avLst/>
+          </a:prstGeom>
+        </p:spPr>
+      </p:pic>
     </p:spTree>
   </p:cSld>
   <p:clrMapOvr>
@@ -6474,6 +4521,634 @@
 <file path=ppt/slides/slide13.xml><?xml version="1.0" encoding="utf-8"?>
 <p:sld xmlns:a="http://schemas.openxmlformats.org/drawingml/2006/main" xmlns:r="http://schemas.openxmlformats.org/officeDocument/2006/relationships" xmlns:p="http://schemas.openxmlformats.org/presentationml/2006/main">
   <p:cSld name="Slide 13">
+    <p:bg>
+      <p:bgPr>
+        <a:solidFill>
+          <a:srgbClr val="FFFFFF"/>
+        </a:solidFill>
+      </p:bgPr>
+    </p:bg>
+    <p:spTree>
+      <p:nvGrpSpPr>
+        <p:cNvPr id="1" name=""/>
+        <p:cNvGrpSpPr/>
+        <p:nvPr/>
+      </p:nvGrpSpPr>
+      <p:grpSpPr>
+        <a:xfrm>
+          <a:off x="0" y="0"/>
+          <a:ext cx="0" cy="0"/>
+          <a:chOff x="0" y="0"/>
+          <a:chExt cx="0" cy="0"/>
+        </a:xfrm>
+      </p:grpSpPr>
+      <p:sp>
+        <p:nvSpPr>
+          <p:cNvPr id="2" name="Text 0"/>
+          <p:cNvSpPr/>
+          <p:nvPr/>
+        </p:nvSpPr>
+        <p:spPr>
+          <a:xfrm>
+            <a:off x="457200" y="201168"/>
+            <a:ext cx="8229600" cy="530352"/>
+          </a:xfrm>
+          <a:prstGeom prst="rect">
+            <a:avLst/>
+          </a:prstGeom>
+          <a:noFill/>
+          <a:ln/>
+        </p:spPr>
+        <p:txBody>
+          <a:bodyPr wrap="square" rtlCol="0" anchor="ctr"/>
+          <a:lstStyle/>
+          <a:p>
+            <a:pPr algn="l" indent="0" marL="0">
+              <a:buNone/>
+            </a:pPr>
+            <a:r>
+              <a:rPr lang="en-US" sz="2600" b="1" dirty="0">
+                <a:solidFill>
+                  <a:srgbClr val="7B2230"/>
+                </a:solidFill>
+                <a:latin typeface="Arial" pitchFamily="34" charset="0"/>
+                <a:ea typeface="Arial" pitchFamily="34" charset="-122"/>
+                <a:cs typeface="Arial" pitchFamily="34" charset="-120"/>
+              </a:rPr>
+              <a:t>Engajamento em Papéis Institucionais por Nível</a:t>
+            </a:r>
+            <a:endParaRPr lang="en-US" sz="2600" dirty="0"/>
+          </a:p>
+        </p:txBody>
+      </p:sp>
+      <p:sp>
+        <p:nvSpPr>
+          <p:cNvPr id="3" name="Text 1"/>
+          <p:cNvSpPr/>
+          <p:nvPr/>
+        </p:nvSpPr>
+        <p:spPr>
+          <a:xfrm>
+            <a:off x="457200" y="768096"/>
+            <a:ext cx="8229600" cy="256032"/>
+          </a:xfrm>
+          <a:prstGeom prst="rect">
+            <a:avLst/>
+          </a:prstGeom>
+          <a:noFill/>
+          <a:ln/>
+        </p:spPr>
+        <p:txBody>
+          <a:bodyPr wrap="square" rtlCol="0" anchor="ctr"/>
+          <a:lstStyle/>
+          <a:p>
+            <a:pPr algn="l" indent="0" marL="0">
+              <a:buNone/>
+            </a:pPr>
+            <a:r>
+              <a:rPr lang="en-US" sz="1200" i="1" dirty="0">
+                <a:solidFill>
+                  <a:srgbClr val="8A7070"/>
+                </a:solidFill>
+                <a:latin typeface="Arial" pitchFamily="34" charset="0"/>
+                <a:ea typeface="Arial" pitchFamily="34" charset="-122"/>
+                <a:cs typeface="Arial" pitchFamily="34" charset="-120"/>
+              </a:rPr>
+              <a:t>% de cada situação em relação a 5 papéis na escola — por nível inferido</a:t>
+            </a:r>
+            <a:endParaRPr lang="en-US" sz="1200" dirty="0"/>
+          </a:p>
+        </p:txBody>
+      </p:sp>
+      <p:pic>
+        <p:nvPicPr>
+          <p:cNvPr id="4" name="Image 0" descr="preencoded.png">    </p:cNvPr>
+          <p:cNvPicPr>
+            <a:picLocks noChangeAspect="1"/>
+          </p:cNvPicPr>
+          <p:nvPr/>
+        </p:nvPicPr>
+        <p:blipFill>
+          <a:blip r:embed="rId1"/>
+          <a:stretch>
+            <a:fillRect/>
+          </a:stretch>
+        </p:blipFill>
+        <p:spPr>
+          <a:xfrm>
+            <a:off x="457200" y="1051560"/>
+            <a:ext cx="8229600" cy="3355848"/>
+          </a:xfrm>
+          <a:prstGeom prst="rect">
+            <a:avLst/>
+          </a:prstGeom>
+        </p:spPr>
+      </p:pic>
+    </p:spTree>
+  </p:cSld>
+  <p:clrMapOvr>
+    <a:masterClrMapping/>
+  </p:clrMapOvr>
+</p:sld>
+</file>
+
+<file path=ppt/slides/slide14.xml><?xml version="1.0" encoding="utf-8"?>
+<p:sld xmlns:a="http://schemas.openxmlformats.org/drawingml/2006/main" xmlns:r="http://schemas.openxmlformats.org/officeDocument/2006/relationships" xmlns:p="http://schemas.openxmlformats.org/presentationml/2006/main">
+  <p:cSld name="Slide 14">
+    <p:bg>
+      <p:bgPr>
+        <a:solidFill>
+          <a:srgbClr val="FFFFFF"/>
+        </a:solidFill>
+      </p:bgPr>
+    </p:bg>
+    <p:spTree>
+      <p:nvGrpSpPr>
+        <p:cNvPr id="1" name=""/>
+        <p:cNvGrpSpPr/>
+        <p:nvPr/>
+      </p:nvGrpSpPr>
+      <p:grpSpPr>
+        <a:xfrm>
+          <a:off x="0" y="0"/>
+          <a:ext cx="0" cy="0"/>
+          <a:chOff x="0" y="0"/>
+          <a:chExt cx="0" cy="0"/>
+        </a:xfrm>
+      </p:grpSpPr>
+      <p:sp>
+        <p:nvSpPr>
+          <p:cNvPr id="2" name="Text 0"/>
+          <p:cNvSpPr/>
+          <p:nvPr/>
+        </p:nvSpPr>
+        <p:spPr>
+          <a:xfrm>
+            <a:off x="457200" y="201168"/>
+            <a:ext cx="8229600" cy="530352"/>
+          </a:xfrm>
+          <a:prstGeom prst="rect">
+            <a:avLst/>
+          </a:prstGeom>
+          <a:noFill/>
+          <a:ln/>
+        </p:spPr>
+        <p:txBody>
+          <a:bodyPr wrap="square" rtlCol="0" anchor="ctr"/>
+          <a:lstStyle/>
+          <a:p>
+            <a:pPr algn="l" indent="0" marL="0">
+              <a:buNone/>
+            </a:pPr>
+            <a:r>
+              <a:rPr lang="en-US" sz="2600" b="1" dirty="0">
+                <a:solidFill>
+                  <a:srgbClr val="7B2230"/>
+                </a:solidFill>
+                <a:latin typeface="Arial" pitchFamily="34" charset="0"/>
+                <a:ea typeface="Arial" pitchFamily="34" charset="-122"/>
+                <a:cs typeface="Arial" pitchFamily="34" charset="-120"/>
+              </a:rPr>
+              <a:t>Autoavaliação vs. Estágio Inferido</a:t>
+            </a:r>
+            <a:endParaRPr lang="en-US" sz="2600" dirty="0"/>
+          </a:p>
+        </p:txBody>
+      </p:sp>
+      <p:sp>
+        <p:nvSpPr>
+          <p:cNvPr id="3" name="Text 1"/>
+          <p:cNvSpPr/>
+          <p:nvPr/>
+        </p:nvSpPr>
+        <p:spPr>
+          <a:xfrm>
+            <a:off x="457200" y="768096"/>
+            <a:ext cx="8229600" cy="256032"/>
+          </a:xfrm>
+          <a:prstGeom prst="rect">
+            <a:avLst/>
+          </a:prstGeom>
+          <a:noFill/>
+          <a:ln/>
+        </p:spPr>
+        <p:txBody>
+          <a:bodyPr wrap="square" rtlCol="0" anchor="ctr"/>
+          <a:lstStyle/>
+          <a:p>
+            <a:pPr algn="l" indent="0" marL="0">
+              <a:buNone/>
+            </a:pPr>
+            <a:r>
+              <a:rPr lang="en-US" sz="1200" i="1" dirty="0">
+                <a:solidFill>
+                  <a:srgbClr val="8A7070"/>
+                </a:solidFill>
+                <a:latin typeface="Arial" pitchFamily="34" charset="0"/>
+                <a:ea typeface="Arial" pitchFamily="34" charset="-122"/>
+                <a:cs typeface="Arial" pitchFamily="34" charset="-120"/>
+              </a:rPr>
+              <a:t>Comparação entre o estágio declarado na Q10 e o inferido pelas respostas</a:t>
+            </a:r>
+            <a:endParaRPr lang="en-US" sz="1200" dirty="0"/>
+          </a:p>
+        </p:txBody>
+      </p:sp>
+      <p:sp>
+        <p:nvSpPr>
+          <p:cNvPr id="4" name="Shape 2"/>
+          <p:cNvSpPr/>
+          <p:nvPr/>
+        </p:nvSpPr>
+        <p:spPr>
+          <a:xfrm>
+            <a:off x="457200" y="1188720"/>
+            <a:ext cx="201168" cy="777240"/>
+          </a:xfrm>
+          <a:prstGeom prst="rect">
+            <a:avLst/>
+          </a:prstGeom>
+          <a:solidFill>
+            <a:srgbClr val="2D6A4F"/>
+          </a:solidFill>
+          <a:ln w="12700">
+            <a:solidFill>
+              <a:srgbClr val="2D6A4F"/>
+            </a:solidFill>
+            <a:prstDash val="solid"/>
+          </a:ln>
+        </p:spPr>
+      </p:sp>
+      <p:sp>
+        <p:nvSpPr>
+          <p:cNvPr id="5" name="Text 3"/>
+          <p:cNvSpPr/>
+          <p:nvPr/>
+        </p:nvSpPr>
+        <p:spPr>
+          <a:xfrm>
+            <a:off x="749808" y="1188720"/>
+            <a:ext cx="1645920" cy="411480"/>
+          </a:xfrm>
+          <a:prstGeom prst="rect">
+            <a:avLst/>
+          </a:prstGeom>
+          <a:noFill/>
+          <a:ln/>
+        </p:spPr>
+        <p:txBody>
+          <a:bodyPr wrap="square" lIns="0" tIns="0" rIns="0" bIns="0" rtlCol="0" anchor="ctr"/>
+          <a:lstStyle/>
+          <a:p>
+            <a:pPr indent="0" marL="0">
+              <a:buNone/>
+            </a:pPr>
+            <a:r>
+              <a:rPr lang="en-US" sz="3200" b="1" dirty="0">
+                <a:solidFill>
+                  <a:srgbClr val="2D6A4F"/>
+                </a:solidFill>
+                <a:latin typeface="Arial" pitchFamily="34" charset="0"/>
+                <a:ea typeface="Arial" pitchFamily="34" charset="-122"/>
+                <a:cs typeface="Arial" pitchFamily="34" charset="-120"/>
+              </a:rPr>
+              <a:t>26,6%</a:t>
+            </a:r>
+            <a:endParaRPr lang="en-US" sz="3200" dirty="0"/>
+          </a:p>
+        </p:txBody>
+      </p:sp>
+      <p:sp>
+        <p:nvSpPr>
+          <p:cNvPr id="6" name="Text 4"/>
+          <p:cNvSpPr/>
+          <p:nvPr/>
+        </p:nvSpPr>
+        <p:spPr>
+          <a:xfrm>
+            <a:off x="749808" y="1572768"/>
+            <a:ext cx="3200400" cy="384048"/>
+          </a:xfrm>
+          <a:prstGeom prst="rect">
+            <a:avLst/>
+          </a:prstGeom>
+          <a:noFill/>
+          <a:ln/>
+        </p:spPr>
+        <p:txBody>
+          <a:bodyPr wrap="square" lIns="0" tIns="0" rIns="0" bIns="0" rtlCol="0" anchor="ctr"/>
+          <a:lstStyle/>
+          <a:p>
+            <a:pPr indent="0" marL="0">
+              <a:buNone/>
+            </a:pPr>
+            <a:r>
+              <a:rPr lang="en-US" sz="1000" dirty="0">
+                <a:solidFill>
+                  <a:srgbClr val="8A7070"/>
+                </a:solidFill>
+                <a:latin typeface="Arial" pitchFamily="34" charset="0"/>
+                <a:ea typeface="Arial" pitchFamily="34" charset="-122"/>
+                <a:cs typeface="Arial" pitchFamily="34" charset="-120"/>
+              </a:rPr>
+              <a:t>Alinhado</a:t>
+            </a:r>
+            <a:endParaRPr lang="en-US" sz="1000" dirty="0"/>
+          </a:p>
+          <a:p>
+            <a:pPr indent="0" marL="0">
+              <a:buNone/>
+            </a:pPr>
+            <a:r>
+              <a:rPr lang="en-US" sz="1000" dirty="0">
+                <a:solidFill>
+                  <a:srgbClr val="8A7070"/>
+                </a:solidFill>
+                <a:latin typeface="Arial" pitchFamily="34" charset="0"/>
+                <a:ea typeface="Arial" pitchFamily="34" charset="-122"/>
+                <a:cs typeface="Arial" pitchFamily="34" charset="-120"/>
+              </a:rPr>
+              <a:t>(38 pessoas)</a:t>
+            </a:r>
+            <a:endParaRPr lang="en-US" sz="1000" dirty="0"/>
+          </a:p>
+        </p:txBody>
+      </p:sp>
+      <p:sp>
+        <p:nvSpPr>
+          <p:cNvPr id="7" name="Shape 5"/>
+          <p:cNvSpPr/>
+          <p:nvPr/>
+        </p:nvSpPr>
+        <p:spPr>
+          <a:xfrm>
+            <a:off x="457200" y="2423160"/>
+            <a:ext cx="201168" cy="777240"/>
+          </a:xfrm>
+          <a:prstGeom prst="rect">
+            <a:avLst/>
+          </a:prstGeom>
+          <a:solidFill>
+            <a:srgbClr val="457B9D"/>
+          </a:solidFill>
+          <a:ln w="12700">
+            <a:solidFill>
+              <a:srgbClr val="457B9D"/>
+            </a:solidFill>
+            <a:prstDash val="solid"/>
+          </a:ln>
+        </p:spPr>
+      </p:sp>
+      <p:sp>
+        <p:nvSpPr>
+          <p:cNvPr id="8" name="Text 6"/>
+          <p:cNvSpPr/>
+          <p:nvPr/>
+        </p:nvSpPr>
+        <p:spPr>
+          <a:xfrm>
+            <a:off x="749808" y="2423160"/>
+            <a:ext cx="1645920" cy="411480"/>
+          </a:xfrm>
+          <a:prstGeom prst="rect">
+            <a:avLst/>
+          </a:prstGeom>
+          <a:noFill/>
+          <a:ln/>
+        </p:spPr>
+        <p:txBody>
+          <a:bodyPr wrap="square" lIns="0" tIns="0" rIns="0" bIns="0" rtlCol="0" anchor="ctr"/>
+          <a:lstStyle/>
+          <a:p>
+            <a:pPr indent="0" marL="0">
+              <a:buNone/>
+            </a:pPr>
+            <a:r>
+              <a:rPr lang="en-US" sz="3200" b="1" dirty="0">
+                <a:solidFill>
+                  <a:srgbClr val="457B9D"/>
+                </a:solidFill>
+                <a:latin typeface="Arial" pitchFamily="34" charset="0"/>
+                <a:ea typeface="Arial" pitchFamily="34" charset="-122"/>
+                <a:cs typeface="Arial" pitchFamily="34" charset="-120"/>
+              </a:rPr>
+              <a:t>42,0%</a:t>
+            </a:r>
+            <a:endParaRPr lang="en-US" sz="3200" dirty="0"/>
+          </a:p>
+        </p:txBody>
+      </p:sp>
+      <p:sp>
+        <p:nvSpPr>
+          <p:cNvPr id="9" name="Text 7"/>
+          <p:cNvSpPr/>
+          <p:nvPr/>
+        </p:nvSpPr>
+        <p:spPr>
+          <a:xfrm>
+            <a:off x="749808" y="2807208"/>
+            <a:ext cx="3200400" cy="384048"/>
+          </a:xfrm>
+          <a:prstGeom prst="rect">
+            <a:avLst/>
+          </a:prstGeom>
+          <a:noFill/>
+          <a:ln/>
+        </p:spPr>
+        <p:txBody>
+          <a:bodyPr wrap="square" lIns="0" tIns="0" rIns="0" bIns="0" rtlCol="0" anchor="ctr"/>
+          <a:lstStyle/>
+          <a:p>
+            <a:pPr indent="0" marL="0">
+              <a:buNone/>
+            </a:pPr>
+            <a:r>
+              <a:rPr lang="en-US" sz="1000" dirty="0">
+                <a:solidFill>
+                  <a:srgbClr val="8A7070"/>
+                </a:solidFill>
+                <a:latin typeface="Arial" pitchFamily="34" charset="0"/>
+                <a:ea typeface="Arial" pitchFamily="34" charset="-122"/>
+                <a:cs typeface="Arial" pitchFamily="34" charset="-120"/>
+              </a:rPr>
+              <a:t>Potencial não declarado</a:t>
+            </a:r>
+            <a:endParaRPr lang="en-US" sz="1000" dirty="0"/>
+          </a:p>
+          <a:p>
+            <a:pPr indent="0" marL="0">
+              <a:buNone/>
+            </a:pPr>
+            <a:r>
+              <a:rPr lang="en-US" sz="1000" dirty="0">
+                <a:solidFill>
+                  <a:srgbClr val="8A7070"/>
+                </a:solidFill>
+                <a:latin typeface="Arial" pitchFamily="34" charset="0"/>
+                <a:ea typeface="Arial" pitchFamily="34" charset="-122"/>
+                <a:cs typeface="Arial" pitchFamily="34" charset="-120"/>
+              </a:rPr>
+              <a:t>(sub-valorização)</a:t>
+            </a:r>
+            <a:endParaRPr lang="en-US" sz="1000" dirty="0"/>
+          </a:p>
+        </p:txBody>
+      </p:sp>
+      <p:sp>
+        <p:nvSpPr>
+          <p:cNvPr id="10" name="Shape 8"/>
+          <p:cNvSpPr/>
+          <p:nvPr/>
+        </p:nvSpPr>
+        <p:spPr>
+          <a:xfrm>
+            <a:off x="457200" y="3657600"/>
+            <a:ext cx="201168" cy="777240"/>
+          </a:xfrm>
+          <a:prstGeom prst="rect">
+            <a:avLst/>
+          </a:prstGeom>
+          <a:solidFill>
+            <a:srgbClr val="A83048"/>
+          </a:solidFill>
+          <a:ln w="12700">
+            <a:solidFill>
+              <a:srgbClr val="A83048"/>
+            </a:solidFill>
+            <a:prstDash val="solid"/>
+          </a:ln>
+        </p:spPr>
+      </p:sp>
+      <p:sp>
+        <p:nvSpPr>
+          <p:cNvPr id="11" name="Text 9"/>
+          <p:cNvSpPr/>
+          <p:nvPr/>
+        </p:nvSpPr>
+        <p:spPr>
+          <a:xfrm>
+            <a:off x="749808" y="3657600"/>
+            <a:ext cx="1645920" cy="411480"/>
+          </a:xfrm>
+          <a:prstGeom prst="rect">
+            <a:avLst/>
+          </a:prstGeom>
+          <a:noFill/>
+          <a:ln/>
+        </p:spPr>
+        <p:txBody>
+          <a:bodyPr wrap="square" lIns="0" tIns="0" rIns="0" bIns="0" rtlCol="0" anchor="ctr"/>
+          <a:lstStyle/>
+          <a:p>
+            <a:pPr indent="0" marL="0">
+              <a:buNone/>
+            </a:pPr>
+            <a:r>
+              <a:rPr lang="en-US" sz="3200" b="1" dirty="0">
+                <a:solidFill>
+                  <a:srgbClr val="A83048"/>
+                </a:solidFill>
+                <a:latin typeface="Arial" pitchFamily="34" charset="0"/>
+                <a:ea typeface="Arial" pitchFamily="34" charset="-122"/>
+                <a:cs typeface="Arial" pitchFamily="34" charset="-120"/>
+              </a:rPr>
+              <a:t>30,1%</a:t>
+            </a:r>
+            <a:endParaRPr lang="en-US" sz="3200" dirty="0"/>
+          </a:p>
+        </p:txBody>
+      </p:sp>
+      <p:sp>
+        <p:nvSpPr>
+          <p:cNvPr id="12" name="Text 10"/>
+          <p:cNvSpPr/>
+          <p:nvPr/>
+        </p:nvSpPr>
+        <p:spPr>
+          <a:xfrm>
+            <a:off x="749808" y="4041648"/>
+            <a:ext cx="3200400" cy="384048"/>
+          </a:xfrm>
+          <a:prstGeom prst="rect">
+            <a:avLst/>
+          </a:prstGeom>
+          <a:noFill/>
+          <a:ln/>
+        </p:spPr>
+        <p:txBody>
+          <a:bodyPr wrap="square" lIns="0" tIns="0" rIns="0" bIns="0" rtlCol="0" anchor="ctr"/>
+          <a:lstStyle/>
+          <a:p>
+            <a:pPr indent="0" marL="0">
+              <a:buNone/>
+            </a:pPr>
+            <a:r>
+              <a:rPr lang="en-US" sz="1000" dirty="0">
+                <a:solidFill>
+                  <a:srgbClr val="8A7070"/>
+                </a:solidFill>
+                <a:latin typeface="Arial" pitchFamily="34" charset="0"/>
+                <a:ea typeface="Arial" pitchFamily="34" charset="-122"/>
+                <a:cs typeface="Arial" pitchFamily="34" charset="-120"/>
+              </a:rPr>
+              <a:t>Autoposicionamento</a:t>
+            </a:r>
+            <a:endParaRPr lang="en-US" sz="1000" dirty="0"/>
+          </a:p>
+          <a:p>
+            <a:pPr indent="0" marL="0">
+              <a:buNone/>
+            </a:pPr>
+            <a:r>
+              <a:rPr lang="en-US" sz="1000" dirty="0">
+                <a:solidFill>
+                  <a:srgbClr val="8A7070"/>
+                </a:solidFill>
+                <a:latin typeface="Arial" pitchFamily="34" charset="0"/>
+                <a:ea typeface="Arial" pitchFamily="34" charset="-122"/>
+                <a:cs typeface="Arial" pitchFamily="34" charset="-120"/>
+              </a:rPr>
+              <a:t>superior ao inferido</a:t>
+            </a:r>
+            <a:endParaRPr lang="en-US" sz="1000" dirty="0"/>
+          </a:p>
+        </p:txBody>
+      </p:sp>
+      <p:pic>
+        <p:nvPicPr>
+          <p:cNvPr id="13" name="Image 0" descr="preencoded.png">    </p:cNvPr>
+          <p:cNvPicPr>
+            <a:picLocks noChangeAspect="1"/>
+          </p:cNvPicPr>
+          <p:nvPr/>
+        </p:nvPicPr>
+        <p:blipFill>
+          <a:blip r:embed="rId1"/>
+          <a:stretch>
+            <a:fillRect/>
+          </a:stretch>
+        </p:blipFill>
+        <p:spPr>
+          <a:xfrm>
+            <a:off x="3749040" y="1051560"/>
+            <a:ext cx="5029200" cy="3319272"/>
+          </a:xfrm>
+          <a:prstGeom prst="rect">
+            <a:avLst/>
+          </a:prstGeom>
+        </p:spPr>
+      </p:pic>
+    </p:spTree>
+  </p:cSld>
+  <p:clrMapOvr>
+    <a:masterClrMapping/>
+  </p:clrMapOvr>
+</p:sld>
+</file>
+
+<file path=ppt/slides/slide15.xml><?xml version="1.0" encoding="utf-8"?>
+<p:sld xmlns:a="http://schemas.openxmlformats.org/drawingml/2006/main" xmlns:r="http://schemas.openxmlformats.org/officeDocument/2006/relationships" xmlns:p="http://schemas.openxmlformats.org/presentationml/2006/main">
+  <p:cSld name="Slide 15">
     <p:bg>
       <p:bgPr>
         <a:solidFill>
@@ -7621,7 +6296,7 @@
                 <a:ea typeface="Arial" pitchFamily="34" charset="-122"/>
                 <a:cs typeface="Arial" pitchFamily="34" charset="-120"/>
               </a:rPr>
-              <a:t>4 blocos: Perfil Demográfico, Perfil Familiar, Perfil Econômico e Vínculo com a Escola — seguidos das questões sobre os 7 Processos Sociais.</a:t>
+              <a:t>4 blocos: Perfil Demográfico, Familiar, Econômico e Vínculo com a Escola — seguidos das questões sobre os 7 Processos Sociais.</a:t>
             </a:r>
             <a:endParaRPr lang="en-US" sz="1100" dirty="0"/>
           </a:p>
@@ -8125,8 +6800,8 @@
         </p:nvSpPr>
         <p:spPr>
           <a:xfrm>
-            <a:off x="457200" y="1143000"/>
-            <a:ext cx="2011680" cy="621792"/>
+            <a:off x="365760" y="1143000"/>
+            <a:ext cx="2103120" cy="621792"/>
           </a:xfrm>
           <a:prstGeom prst="rect">
             <a:avLst/>
@@ -8164,8 +6839,8 @@
         </p:nvSpPr>
         <p:spPr>
           <a:xfrm>
-            <a:off x="457200" y="1737360"/>
-            <a:ext cx="2011680" cy="365760"/>
+            <a:off x="365760" y="1737360"/>
+            <a:ext cx="2103120" cy="365760"/>
           </a:xfrm>
           <a:prstGeom prst="rect">
             <a:avLst/>
@@ -8203,8 +6878,8 @@
         </p:nvSpPr>
         <p:spPr>
           <a:xfrm>
-            <a:off x="457200" y="2212848"/>
-            <a:ext cx="2011680" cy="621792"/>
+            <a:off x="365760" y="2212848"/>
+            <a:ext cx="2103120" cy="621792"/>
           </a:xfrm>
           <a:prstGeom prst="rect">
             <a:avLst/>
@@ -8242,8 +6917,8 @@
         </p:nvSpPr>
         <p:spPr>
           <a:xfrm>
-            <a:off x="457200" y="2807208"/>
-            <a:ext cx="2011680" cy="365760"/>
+            <a:off x="365760" y="2807208"/>
+            <a:ext cx="2103120" cy="365760"/>
           </a:xfrm>
           <a:prstGeom prst="rect">
             <a:avLst/>
@@ -8281,8 +6956,8 @@
         </p:nvSpPr>
         <p:spPr>
           <a:xfrm>
-            <a:off x="457200" y="3291840"/>
-            <a:ext cx="2011680" cy="621792"/>
+            <a:off x="365760" y="3291840"/>
+            <a:ext cx="2103120" cy="621792"/>
           </a:xfrm>
           <a:prstGeom prst="rect">
             <a:avLst/>
@@ -8320,8 +6995,8 @@
         </p:nvSpPr>
         <p:spPr>
           <a:xfrm>
-            <a:off x="457200" y="3886200"/>
-            <a:ext cx="2011680" cy="365760"/>
+            <a:off x="365760" y="3886200"/>
+            <a:ext cx="2103120" cy="365760"/>
           </a:xfrm>
           <a:prstGeom prst="rect">
             <a:avLst/>
@@ -8362,28 +7037,36 @@
                 <a:ea typeface="Arial" pitchFamily="34" charset="-122"/>
                 <a:cs typeface="Arial" pitchFamily="34" charset="-120"/>
               </a:rPr>
-              <a:t>ou pós-graduação</a:t>
+              <a:t>ou pós-grad.</a:t>
             </a:r>
             <a:endParaRPr lang="en-US" sz="1100" dirty="0"/>
           </a:p>
         </p:txBody>
       </p:sp>
-      <p:graphicFrame>
-        <p:nvGraphicFramePr>
-          <p:cNvPr id="10" name="Chart 0" descr=""/>
-          <p:cNvGraphicFramePr/>
-          <p:nvPr/>
-        </p:nvGraphicFramePr>
-        <p:xfrm>
-          <a:off x="2743200" y="1051560"/>
-          <a:ext cx="6035040" cy="3291840"/>
-        </p:xfrm>
-        <a:graphic xmlns:a="http://schemas.openxmlformats.org/drawingml/2006/main">
-          <a:graphicData uri="http://schemas.openxmlformats.org/drawingml/2006/chart">
-            <c:chart xmlns:c="http://schemas.openxmlformats.org/drawingml/2006/chart" r:id="rId1"/>
-          </a:graphicData>
-        </a:graphic>
-      </p:graphicFrame>
+      <p:pic>
+        <p:nvPicPr>
+          <p:cNvPr id="10" name="Image 0" descr="preencoded.png">    </p:cNvPr>
+          <p:cNvPicPr>
+            <a:picLocks noChangeAspect="1"/>
+          </p:cNvPicPr>
+          <p:nvPr/>
+        </p:nvPicPr>
+        <p:blipFill>
+          <a:blip r:embed="rId1"/>
+          <a:stretch>
+            <a:fillRect/>
+          </a:stretch>
+        </p:blipFill>
+        <p:spPr>
+          <a:xfrm>
+            <a:off x="2743200" y="1051560"/>
+            <a:ext cx="5852160" cy="2962656"/>
+          </a:xfrm>
+          <a:prstGeom prst="rect">
+            <a:avLst/>
+          </a:prstGeom>
+        </p:spPr>
+      </p:pic>
     </p:spTree>
   </p:cSld>
   <p:clrMapOvr>
@@ -8449,7 +7132,7 @@
                 <a:ea typeface="Arial" pitchFamily="34" charset="-122"/>
                 <a:cs typeface="Arial" pitchFamily="34" charset="-120"/>
               </a:rPr>
-              <a:t>Perfil Familiar e Econômico</a:t>
+              <a:t>Perfil Familiar</a:t>
             </a:r>
             <a:endParaRPr lang="en-US" sz="2600" dirty="0"/>
           </a:p>
@@ -8488,44 +7171,60 @@
                 <a:ea typeface="Arial" pitchFamily="34" charset="-122"/>
                 <a:cs typeface="Arial" pitchFamily="34" charset="-120"/>
               </a:rPr>
-              <a:t>Composição familiar e distribuição de renda mensal</a:t>
+              <a:t>Composição do núcleo familiar e número de filhos matriculados</a:t>
             </a:r>
             <a:endParaRPr lang="en-US" sz="1200" dirty="0"/>
           </a:p>
         </p:txBody>
       </p:sp>
-      <p:graphicFrame>
-        <p:nvGraphicFramePr>
-          <p:cNvPr id="4" name="Chart 0" descr=""/>
-          <p:cNvGraphicFramePr/>
-          <p:nvPr/>
-        </p:nvGraphicFramePr>
-        <p:xfrm>
-          <a:off x="457200" y="1051560"/>
-          <a:ext cx="4023360" cy="3474720"/>
-        </p:xfrm>
-        <a:graphic xmlns:a="http://schemas.openxmlformats.org/drawingml/2006/main">
-          <a:graphicData uri="http://schemas.openxmlformats.org/drawingml/2006/chart">
-            <c:chart xmlns:c="http://schemas.openxmlformats.org/drawingml/2006/chart" r:id="rId1"/>
-          </a:graphicData>
-        </a:graphic>
-      </p:graphicFrame>
-      <p:graphicFrame>
-        <p:nvGraphicFramePr>
-          <p:cNvPr id="5" name="Chart 1" descr=""/>
-          <p:cNvGraphicFramePr/>
-          <p:nvPr/>
-        </p:nvGraphicFramePr>
-        <p:xfrm>
-          <a:off x="4846320" y="1051560"/>
-          <a:ext cx="4023360" cy="3474720"/>
-        </p:xfrm>
-        <a:graphic xmlns:a="http://schemas.openxmlformats.org/drawingml/2006/main">
-          <a:graphicData uri="http://schemas.openxmlformats.org/drawingml/2006/chart">
-            <c:chart xmlns:c="http://schemas.openxmlformats.org/drawingml/2006/chart" r:id="rId2"/>
-          </a:graphicData>
-        </a:graphic>
-      </p:graphicFrame>
+      <p:pic>
+        <p:nvPicPr>
+          <p:cNvPr id="4" name="Image 0" descr="preencoded.png">    </p:cNvPr>
+          <p:cNvPicPr>
+            <a:picLocks noChangeAspect="1"/>
+          </p:cNvPicPr>
+          <p:nvPr/>
+        </p:nvPicPr>
+        <p:blipFill>
+          <a:blip r:embed="rId1"/>
+          <a:stretch>
+            <a:fillRect/>
+          </a:stretch>
+        </p:blipFill>
+        <p:spPr>
+          <a:xfrm>
+            <a:off x="365760" y="1051560"/>
+            <a:ext cx="4114800" cy="3401568"/>
+          </a:xfrm>
+          <a:prstGeom prst="rect">
+            <a:avLst/>
+          </a:prstGeom>
+        </p:spPr>
+      </p:pic>
+      <p:pic>
+        <p:nvPicPr>
+          <p:cNvPr id="5" name="Image 1" descr="preencoded.png">    </p:cNvPr>
+          <p:cNvPicPr>
+            <a:picLocks noChangeAspect="1"/>
+          </p:cNvPicPr>
+          <p:nvPr/>
+        </p:nvPicPr>
+        <p:blipFill>
+          <a:blip r:embed="rId2"/>
+          <a:stretch>
+            <a:fillRect/>
+          </a:stretch>
+        </p:blipFill>
+        <p:spPr>
+          <a:xfrm>
+            <a:off x="4709160" y="1051560"/>
+            <a:ext cx="4023360" cy="3282696"/>
+          </a:xfrm>
+          <a:prstGeom prst="rect">
+            <a:avLst/>
+          </a:prstGeom>
+        </p:spPr>
+      </p:pic>
     </p:spTree>
   </p:cSld>
   <p:clrMapOvr>
@@ -8591,7 +7290,7 @@
                 <a:ea typeface="Arial" pitchFamily="34" charset="-122"/>
                 <a:cs typeface="Arial" pitchFamily="34" charset="-120"/>
               </a:rPr>
-              <a:t>Vínculo com a Escola</a:t>
+              <a:t>Perfil Econômico</a:t>
             </a:r>
             <a:endParaRPr lang="en-US" sz="2600" dirty="0"/>
           </a:p>
@@ -8630,7 +7329,7 @@
                 <a:ea typeface="Arial" pitchFamily="34" charset="-122"/>
                 <a:cs typeface="Arial" pitchFamily="34" charset="-120"/>
               </a:rPr>
-              <a:t>Tipo de relação, tempo de casa e formação em antroposofia</a:t>
+              <a:t>Renda familiar mensal dos 143 respondentes (SM = R$ 1.518)</a:t>
             </a:r>
             <a:endParaRPr lang="en-US" sz="1200" dirty="0"/>
           </a:p>
@@ -8644,8 +7343,8 @@
         </p:nvSpPr>
         <p:spPr>
           <a:xfrm>
-            <a:off x="457200" y="1097280"/>
-            <a:ext cx="2377440" cy="621792"/>
+            <a:off x="365760" y="1188720"/>
+            <a:ext cx="2468880" cy="621792"/>
           </a:xfrm>
           <a:prstGeom prst="rect">
             <a:avLst/>
@@ -8663,13 +7362,13 @@
             <a:r>
               <a:rPr lang="en-US" sz="4200" b="1" dirty="0">
                 <a:solidFill>
-                  <a:srgbClr val="7B2230"/>
-                </a:solidFill>
-                <a:latin typeface="Arial" pitchFamily="34" charset="0"/>
-                <a:ea typeface="Arial" pitchFamily="34" charset="-122"/>
-                <a:cs typeface="Arial" pitchFamily="34" charset="-120"/>
-              </a:rPr>
-              <a:t>89,5%</a:t>
+                  <a:srgbClr val="D4821A"/>
+                </a:solidFill>
+                <a:latin typeface="Arial" pitchFamily="34" charset="0"/>
+                <a:ea typeface="Arial" pitchFamily="34" charset="-122"/>
+                <a:cs typeface="Arial" pitchFamily="34" charset="-120"/>
+              </a:rPr>
+              <a:t>57,4%</a:t>
             </a:r>
             <a:endParaRPr lang="en-US" sz="4200" dirty="0"/>
           </a:p>
@@ -8683,8 +7382,8 @@
         </p:nvSpPr>
         <p:spPr>
           <a:xfrm>
-            <a:off x="457200" y="1691640"/>
-            <a:ext cx="2377440" cy="365760"/>
+            <a:off x="365760" y="1783080"/>
+            <a:ext cx="2468880" cy="365760"/>
           </a:xfrm>
           <a:prstGeom prst="rect">
             <a:avLst/>
@@ -8708,10 +7407,27 @@
                 <a:ea typeface="Arial" pitchFamily="34" charset="-122"/>
                 <a:cs typeface="Arial" pitchFamily="34" charset="-120"/>
               </a:rPr>
-              <a:t>mães/pais de aluno(s)</a:t>
+              <a:t>renda entre 3</a:t>
             </a:r>
             <a:endParaRPr lang="en-US" sz="1100" dirty="0"/>
           </a:p>
+          <a:p>
+            <a:pPr algn="ctr" indent="0" marL="0">
+              <a:buNone/>
+            </a:pPr>
+            <a:r>
+              <a:rPr lang="en-US" sz="1100" dirty="0">
+                <a:solidFill>
+                  <a:srgbClr val="8A7070"/>
+                </a:solidFill>
+                <a:latin typeface="Arial" pitchFamily="34" charset="0"/>
+                <a:ea typeface="Arial" pitchFamily="34" charset="-122"/>
+                <a:cs typeface="Arial" pitchFamily="34" charset="-120"/>
+              </a:rPr>
+              <a:t>e 10 SM</a:t>
+            </a:r>
+            <a:endParaRPr lang="en-US" sz="1100" dirty="0"/>
+          </a:p>
         </p:txBody>
       </p:sp>
       <p:sp>
@@ -8722,8 +7438,8 @@
         </p:nvSpPr>
         <p:spPr>
           <a:xfrm>
-            <a:off x="3108960" y="1097280"/>
-            <a:ext cx="2377440" cy="621792"/>
+            <a:off x="365760" y="2286000"/>
+            <a:ext cx="2468880" cy="621792"/>
           </a:xfrm>
           <a:prstGeom prst="rect">
             <a:avLst/>
@@ -8741,13 +7457,13 @@
             <a:r>
               <a:rPr lang="en-US" sz="4200" b="1" dirty="0">
                 <a:solidFill>
-                  <a:srgbClr val="D4821A"/>
-                </a:solidFill>
-                <a:latin typeface="Arial" pitchFamily="34" charset="0"/>
-                <a:ea typeface="Arial" pitchFamily="34" charset="-122"/>
-                <a:cs typeface="Arial" pitchFamily="34" charset="-120"/>
-              </a:rPr>
-              <a:t>26,6%</a:t>
+                  <a:srgbClr val="A83048"/>
+                </a:solidFill>
+                <a:latin typeface="Arial" pitchFamily="34" charset="0"/>
+                <a:ea typeface="Arial" pitchFamily="34" charset="-122"/>
+                <a:cs typeface="Arial" pitchFamily="34" charset="-120"/>
+              </a:rPr>
+              <a:t>9,8%</a:t>
             </a:r>
             <a:endParaRPr lang="en-US" sz="4200" dirty="0"/>
           </a:p>
@@ -8761,8 +7477,8 @@
         </p:nvSpPr>
         <p:spPr>
           <a:xfrm>
-            <a:off x="3108960" y="1691640"/>
-            <a:ext cx="2377440" cy="365760"/>
+            <a:off x="365760" y="2880360"/>
+            <a:ext cx="2468880" cy="365760"/>
           </a:xfrm>
           <a:prstGeom prst="rect">
             <a:avLst/>
@@ -8786,7 +7502,7 @@
                 <a:ea typeface="Arial" pitchFamily="34" charset="-122"/>
                 <a:cs typeface="Arial" pitchFamily="34" charset="-120"/>
               </a:rPr>
-              <a:t>entraram em 2025</a:t>
+              <a:t>até 3 SM</a:t>
             </a:r>
             <a:endParaRPr lang="en-US" sz="1100" dirty="0"/>
           </a:p>
@@ -8800,8 +7516,8 @@
         </p:nvSpPr>
         <p:spPr>
           <a:xfrm>
-            <a:off x="5852160" y="1097280"/>
-            <a:ext cx="2377440" cy="621792"/>
+            <a:off x="365760" y="3383280"/>
+            <a:ext cx="2468880" cy="621792"/>
           </a:xfrm>
           <a:prstGeom prst="rect">
             <a:avLst/>
@@ -8825,7 +7541,7 @@
                 <a:ea typeface="Arial" pitchFamily="34" charset="-122"/>
                 <a:cs typeface="Arial" pitchFamily="34" charset="-120"/>
               </a:rPr>
-              <a:t>32,9%</a:t>
+              <a:t>29,4%</a:t>
             </a:r>
             <a:endParaRPr lang="en-US" sz="4200" dirty="0"/>
           </a:p>
@@ -8839,8 +7555,8 @@
         </p:nvSpPr>
         <p:spPr>
           <a:xfrm>
-            <a:off x="5852160" y="1691640"/>
-            <a:ext cx="2377440" cy="365760"/>
+            <a:off x="365760" y="3977640"/>
+            <a:ext cx="2468880" cy="365760"/>
           </a:xfrm>
           <a:prstGeom prst="rect">
             <a:avLst/>
@@ -8864,45 +7580,36 @@
                 <a:ea typeface="Arial" pitchFamily="34" charset="-122"/>
                 <a:cs typeface="Arial" pitchFamily="34" charset="-120"/>
               </a:rPr>
-              <a:t>têm formação</a:t>
+              <a:t>acima de 10 SM</a:t>
             </a:r>
             <a:endParaRPr lang="en-US" sz="1100" dirty="0"/>
           </a:p>
-          <a:p>
-            <a:pPr algn="ctr" indent="0" marL="0">
-              <a:buNone/>
-            </a:pPr>
-            <a:r>
-              <a:rPr lang="en-US" sz="1100" dirty="0">
-                <a:solidFill>
-                  <a:srgbClr val="8A7070"/>
-                </a:solidFill>
-                <a:latin typeface="Arial" pitchFamily="34" charset="0"/>
-                <a:ea typeface="Arial" pitchFamily="34" charset="-122"/>
-                <a:cs typeface="Arial" pitchFamily="34" charset="-120"/>
-              </a:rPr>
-              <a:t>em antroposofia</a:t>
-            </a:r>
-            <a:endParaRPr lang="en-US" sz="1100" dirty="0"/>
-          </a:p>
-        </p:txBody>
-      </p:sp>
-      <p:graphicFrame>
-        <p:nvGraphicFramePr>
-          <p:cNvPr id="10" name="Chart 0" descr=""/>
-          <p:cNvGraphicFramePr/>
-          <p:nvPr/>
-        </p:nvGraphicFramePr>
-        <p:xfrm>
-          <a:off x="457200" y="2468880"/>
-          <a:ext cx="8229600" cy="2423160"/>
-        </p:xfrm>
-        <a:graphic xmlns:a="http://schemas.openxmlformats.org/drawingml/2006/main">
-          <a:graphicData uri="http://schemas.openxmlformats.org/drawingml/2006/chart">
-            <c:chart xmlns:c="http://schemas.openxmlformats.org/drawingml/2006/chart" r:id="rId1"/>
-          </a:graphicData>
-        </a:graphic>
-      </p:graphicFrame>
+        </p:txBody>
+      </p:sp>
+      <p:pic>
+        <p:nvPicPr>
+          <p:cNvPr id="10" name="Image 0" descr="preencoded.png">    </p:cNvPr>
+          <p:cNvPicPr>
+            <a:picLocks noChangeAspect="1"/>
+          </p:cNvPicPr>
+          <p:nvPr/>
+        </p:nvPicPr>
+        <p:blipFill>
+          <a:blip r:embed="rId1"/>
+          <a:stretch>
+            <a:fillRect/>
+          </a:stretch>
+        </p:blipFill>
+        <p:spPr>
+          <a:xfrm>
+            <a:off x="3200400" y="1051560"/>
+            <a:ext cx="5486400" cy="3611880"/>
+          </a:xfrm>
+          <a:prstGeom prst="rect">
+            <a:avLst/>
+          </a:prstGeom>
+        </p:spPr>
+      </p:pic>
     </p:spTree>
   </p:cSld>
   <p:clrMapOvr>
@@ -8914,6 +7621,415 @@
 <file path=ppt/slides/slide6.xml><?xml version="1.0" encoding="utf-8"?>
 <p:sld xmlns:a="http://schemas.openxmlformats.org/drawingml/2006/main" xmlns:r="http://schemas.openxmlformats.org/officeDocument/2006/relationships" xmlns:p="http://schemas.openxmlformats.org/presentationml/2006/main">
   <p:cSld name="Slide 6">
+    <p:bg>
+      <p:bgPr>
+        <a:solidFill>
+          <a:srgbClr val="FFFFFF"/>
+        </a:solidFill>
+      </p:bgPr>
+    </p:bg>
+    <p:spTree>
+      <p:nvGrpSpPr>
+        <p:cNvPr id="1" name=""/>
+        <p:cNvGrpSpPr/>
+        <p:nvPr/>
+      </p:nvGrpSpPr>
+      <p:grpSpPr>
+        <a:xfrm>
+          <a:off x="0" y="0"/>
+          <a:ext cx="0" cy="0"/>
+          <a:chOff x="0" y="0"/>
+          <a:chExt cx="0" cy="0"/>
+        </a:xfrm>
+      </p:grpSpPr>
+      <p:sp>
+        <p:nvSpPr>
+          <p:cNvPr id="2" name="Text 0"/>
+          <p:cNvSpPr/>
+          <p:nvPr/>
+        </p:nvSpPr>
+        <p:spPr>
+          <a:xfrm>
+            <a:off x="457200" y="201168"/>
+            <a:ext cx="8229600" cy="530352"/>
+          </a:xfrm>
+          <a:prstGeom prst="rect">
+            <a:avLst/>
+          </a:prstGeom>
+          <a:noFill/>
+          <a:ln/>
+        </p:spPr>
+        <p:txBody>
+          <a:bodyPr wrap="square" rtlCol="0" anchor="ctr"/>
+          <a:lstStyle/>
+          <a:p>
+            <a:pPr algn="l" indent="0" marL="0">
+              <a:buNone/>
+            </a:pPr>
+            <a:r>
+              <a:rPr lang="en-US" sz="2600" b="1" dirty="0">
+                <a:solidFill>
+                  <a:srgbClr val="7B2230"/>
+                </a:solidFill>
+                <a:latin typeface="Arial" pitchFamily="34" charset="0"/>
+                <a:ea typeface="Arial" pitchFamily="34" charset="-122"/>
+                <a:cs typeface="Arial" pitchFamily="34" charset="-120"/>
+              </a:rPr>
+              <a:t>Vínculo com a Escola</a:t>
+            </a:r>
+            <a:endParaRPr lang="en-US" sz="2600" dirty="0"/>
+          </a:p>
+        </p:txBody>
+      </p:sp>
+      <p:sp>
+        <p:nvSpPr>
+          <p:cNvPr id="3" name="Text 1"/>
+          <p:cNvSpPr/>
+          <p:nvPr/>
+        </p:nvSpPr>
+        <p:spPr>
+          <a:xfrm>
+            <a:off x="457200" y="768096"/>
+            <a:ext cx="8229600" cy="256032"/>
+          </a:xfrm>
+          <a:prstGeom prst="rect">
+            <a:avLst/>
+          </a:prstGeom>
+          <a:noFill/>
+          <a:ln/>
+        </p:spPr>
+        <p:txBody>
+          <a:bodyPr wrap="square" rtlCol="0" anchor="ctr"/>
+          <a:lstStyle/>
+          <a:p>
+            <a:pPr algn="l" indent="0" marL="0">
+              <a:buNone/>
+            </a:pPr>
+            <a:r>
+              <a:rPr lang="en-US" sz="1200" i="1" dirty="0">
+                <a:solidFill>
+                  <a:srgbClr val="8A7070"/>
+                </a:solidFill>
+                <a:latin typeface="Arial" pitchFamily="34" charset="0"/>
+                <a:ea typeface="Arial" pitchFamily="34" charset="-122"/>
+                <a:cs typeface="Arial" pitchFamily="34" charset="-120"/>
+              </a:rPr>
+              <a:t>Tipo de relação, ano de entrada e distribuição das turmas dos filhos</a:t>
+            </a:r>
+            <a:endParaRPr lang="en-US" sz="1200" dirty="0"/>
+          </a:p>
+        </p:txBody>
+      </p:sp>
+      <p:sp>
+        <p:nvSpPr>
+          <p:cNvPr id="4" name="Text 2"/>
+          <p:cNvSpPr/>
+          <p:nvPr/>
+        </p:nvSpPr>
+        <p:spPr>
+          <a:xfrm>
+            <a:off x="365760" y="960120"/>
+            <a:ext cx="2468880" cy="621792"/>
+          </a:xfrm>
+          <a:prstGeom prst="rect">
+            <a:avLst/>
+          </a:prstGeom>
+          <a:noFill/>
+          <a:ln/>
+        </p:spPr>
+        <p:txBody>
+          <a:bodyPr wrap="square" lIns="0" tIns="0" rIns="0" bIns="0" rtlCol="0" anchor="ctr"/>
+          <a:lstStyle/>
+          <a:p>
+            <a:pPr algn="ctr" indent="0" marL="0">
+              <a:buNone/>
+            </a:pPr>
+            <a:r>
+              <a:rPr lang="en-US" sz="4200" b="1" dirty="0">
+                <a:solidFill>
+                  <a:srgbClr val="7B2230"/>
+                </a:solidFill>
+                <a:latin typeface="Arial" pitchFamily="34" charset="0"/>
+                <a:ea typeface="Arial" pitchFamily="34" charset="-122"/>
+                <a:cs typeface="Arial" pitchFamily="34" charset="-120"/>
+              </a:rPr>
+              <a:t>89,5%</a:t>
+            </a:r>
+            <a:endParaRPr lang="en-US" sz="4200" dirty="0"/>
+          </a:p>
+        </p:txBody>
+      </p:sp>
+      <p:sp>
+        <p:nvSpPr>
+          <p:cNvPr id="5" name="Text 3"/>
+          <p:cNvSpPr/>
+          <p:nvPr/>
+        </p:nvSpPr>
+        <p:spPr>
+          <a:xfrm>
+            <a:off x="365760" y="1554480"/>
+            <a:ext cx="2468880" cy="365760"/>
+          </a:xfrm>
+          <a:prstGeom prst="rect">
+            <a:avLst/>
+          </a:prstGeom>
+          <a:noFill/>
+          <a:ln/>
+        </p:spPr>
+        <p:txBody>
+          <a:bodyPr wrap="square" lIns="0" tIns="0" rIns="0" bIns="0" rtlCol="0" anchor="ctr"/>
+          <a:lstStyle/>
+          <a:p>
+            <a:pPr algn="ctr" indent="0" marL="0">
+              <a:buNone/>
+            </a:pPr>
+            <a:r>
+              <a:rPr lang="en-US" sz="1100" dirty="0">
+                <a:solidFill>
+                  <a:srgbClr val="8A7070"/>
+                </a:solidFill>
+                <a:latin typeface="Arial" pitchFamily="34" charset="0"/>
+                <a:ea typeface="Arial" pitchFamily="34" charset="-122"/>
+                <a:cs typeface="Arial" pitchFamily="34" charset="-120"/>
+              </a:rPr>
+              <a:t>mães/pais de aluno(s)</a:t>
+            </a:r>
+            <a:endParaRPr lang="en-US" sz="1100" dirty="0"/>
+          </a:p>
+        </p:txBody>
+      </p:sp>
+      <p:sp>
+        <p:nvSpPr>
+          <p:cNvPr id="6" name="Text 4"/>
+          <p:cNvSpPr/>
+          <p:nvPr/>
+        </p:nvSpPr>
+        <p:spPr>
+          <a:xfrm>
+            <a:off x="3063240" y="960120"/>
+            <a:ext cx="2468880" cy="621792"/>
+          </a:xfrm>
+          <a:prstGeom prst="rect">
+            <a:avLst/>
+          </a:prstGeom>
+          <a:noFill/>
+          <a:ln/>
+        </p:spPr>
+        <p:txBody>
+          <a:bodyPr wrap="square" lIns="0" tIns="0" rIns="0" bIns="0" rtlCol="0" anchor="ctr"/>
+          <a:lstStyle/>
+          <a:p>
+            <a:pPr algn="ctr" indent="0" marL="0">
+              <a:buNone/>
+            </a:pPr>
+            <a:r>
+              <a:rPr lang="en-US" sz="4200" b="1" dirty="0">
+                <a:solidFill>
+                  <a:srgbClr val="D4821A"/>
+                </a:solidFill>
+                <a:latin typeface="Arial" pitchFamily="34" charset="0"/>
+                <a:ea typeface="Arial" pitchFamily="34" charset="-122"/>
+                <a:cs typeface="Arial" pitchFamily="34" charset="-120"/>
+              </a:rPr>
+              <a:t>26,6%</a:t>
+            </a:r>
+            <a:endParaRPr lang="en-US" sz="4200" dirty="0"/>
+          </a:p>
+        </p:txBody>
+      </p:sp>
+      <p:sp>
+        <p:nvSpPr>
+          <p:cNvPr id="7" name="Text 5"/>
+          <p:cNvSpPr/>
+          <p:nvPr/>
+        </p:nvSpPr>
+        <p:spPr>
+          <a:xfrm>
+            <a:off x="3063240" y="1554480"/>
+            <a:ext cx="2468880" cy="365760"/>
+          </a:xfrm>
+          <a:prstGeom prst="rect">
+            <a:avLst/>
+          </a:prstGeom>
+          <a:noFill/>
+          <a:ln/>
+        </p:spPr>
+        <p:txBody>
+          <a:bodyPr wrap="square" lIns="0" tIns="0" rIns="0" bIns="0" rtlCol="0" anchor="ctr"/>
+          <a:lstStyle/>
+          <a:p>
+            <a:pPr algn="ctr" indent="0" marL="0">
+              <a:buNone/>
+            </a:pPr>
+            <a:r>
+              <a:rPr lang="en-US" sz="1100" dirty="0">
+                <a:solidFill>
+                  <a:srgbClr val="8A7070"/>
+                </a:solidFill>
+                <a:latin typeface="Arial" pitchFamily="34" charset="0"/>
+                <a:ea typeface="Arial" pitchFamily="34" charset="-122"/>
+                <a:cs typeface="Arial" pitchFamily="34" charset="-120"/>
+              </a:rPr>
+              <a:t>entraram em 2025</a:t>
+            </a:r>
+            <a:endParaRPr lang="en-US" sz="1100" dirty="0"/>
+          </a:p>
+        </p:txBody>
+      </p:sp>
+      <p:sp>
+        <p:nvSpPr>
+          <p:cNvPr id="8" name="Text 6"/>
+          <p:cNvSpPr/>
+          <p:nvPr/>
+        </p:nvSpPr>
+        <p:spPr>
+          <a:xfrm>
+            <a:off x="5760720" y="960120"/>
+            <a:ext cx="2468880" cy="621792"/>
+          </a:xfrm>
+          <a:prstGeom prst="rect">
+            <a:avLst/>
+          </a:prstGeom>
+          <a:noFill/>
+          <a:ln/>
+        </p:spPr>
+        <p:txBody>
+          <a:bodyPr wrap="square" lIns="0" tIns="0" rIns="0" bIns="0" rtlCol="0" anchor="ctr"/>
+          <a:lstStyle/>
+          <a:p>
+            <a:pPr algn="ctr" indent="0" marL="0">
+              <a:buNone/>
+            </a:pPr>
+            <a:r>
+              <a:rPr lang="en-US" sz="4200" b="1" dirty="0">
+                <a:solidFill>
+                  <a:srgbClr val="2D6A4F"/>
+                </a:solidFill>
+                <a:latin typeface="Arial" pitchFamily="34" charset="0"/>
+                <a:ea typeface="Arial" pitchFamily="34" charset="-122"/>
+                <a:cs typeface="Arial" pitchFamily="34" charset="-120"/>
+              </a:rPr>
+              <a:t>32,9%</a:t>
+            </a:r>
+            <a:endParaRPr lang="en-US" sz="4200" dirty="0"/>
+          </a:p>
+        </p:txBody>
+      </p:sp>
+      <p:sp>
+        <p:nvSpPr>
+          <p:cNvPr id="9" name="Text 7"/>
+          <p:cNvSpPr/>
+          <p:nvPr/>
+        </p:nvSpPr>
+        <p:spPr>
+          <a:xfrm>
+            <a:off x="5760720" y="1554480"/>
+            <a:ext cx="2468880" cy="365760"/>
+          </a:xfrm>
+          <a:prstGeom prst="rect">
+            <a:avLst/>
+          </a:prstGeom>
+          <a:noFill/>
+          <a:ln/>
+        </p:spPr>
+        <p:txBody>
+          <a:bodyPr wrap="square" lIns="0" tIns="0" rIns="0" bIns="0" rtlCol="0" anchor="ctr"/>
+          <a:lstStyle/>
+          <a:p>
+            <a:pPr algn="ctr" indent="0" marL="0">
+              <a:buNone/>
+            </a:pPr>
+            <a:r>
+              <a:rPr lang="en-US" sz="1100" dirty="0">
+                <a:solidFill>
+                  <a:srgbClr val="8A7070"/>
+                </a:solidFill>
+                <a:latin typeface="Arial" pitchFamily="34" charset="0"/>
+                <a:ea typeface="Arial" pitchFamily="34" charset="-122"/>
+                <a:cs typeface="Arial" pitchFamily="34" charset="-120"/>
+              </a:rPr>
+              <a:t>formação em</a:t>
+            </a:r>
+            <a:endParaRPr lang="en-US" sz="1100" dirty="0"/>
+          </a:p>
+          <a:p>
+            <a:pPr algn="ctr" indent="0" marL="0">
+              <a:buNone/>
+            </a:pPr>
+            <a:r>
+              <a:rPr lang="en-US" sz="1100" dirty="0">
+                <a:solidFill>
+                  <a:srgbClr val="8A7070"/>
+                </a:solidFill>
+                <a:latin typeface="Arial" pitchFamily="34" charset="0"/>
+                <a:ea typeface="Arial" pitchFamily="34" charset="-122"/>
+                <a:cs typeface="Arial" pitchFamily="34" charset="-120"/>
+              </a:rPr>
+              <a:t>antroposofia</a:t>
+            </a:r>
+            <a:endParaRPr lang="en-US" sz="1100" dirty="0"/>
+          </a:p>
+        </p:txBody>
+      </p:sp>
+      <p:pic>
+        <p:nvPicPr>
+          <p:cNvPr id="10" name="Image 0" descr="preencoded.png">    </p:cNvPr>
+          <p:cNvPicPr>
+            <a:picLocks noChangeAspect="1"/>
+          </p:cNvPicPr>
+          <p:nvPr/>
+        </p:nvPicPr>
+        <p:blipFill>
+          <a:blip r:embed="rId1"/>
+          <a:stretch>
+            <a:fillRect/>
+          </a:stretch>
+        </p:blipFill>
+        <p:spPr>
+          <a:xfrm>
+            <a:off x="365760" y="1965960"/>
+            <a:ext cx="4572000" cy="1984248"/>
+          </a:xfrm>
+          <a:prstGeom prst="rect">
+            <a:avLst/>
+          </a:prstGeom>
+        </p:spPr>
+      </p:pic>
+      <p:pic>
+        <p:nvPicPr>
+          <p:cNvPr id="11" name="Image 1" descr="preencoded.png">    </p:cNvPr>
+          <p:cNvPicPr>
+            <a:picLocks noChangeAspect="1"/>
+          </p:cNvPicPr>
+          <p:nvPr/>
+        </p:nvPicPr>
+        <p:blipFill>
+          <a:blip r:embed="rId2"/>
+          <a:stretch>
+            <a:fillRect/>
+          </a:stretch>
+        </p:blipFill>
+        <p:spPr>
+          <a:xfrm>
+            <a:off x="5303520" y="960120"/>
+            <a:ext cx="3383280" cy="3401568"/>
+          </a:xfrm>
+          <a:prstGeom prst="rect">
+            <a:avLst/>
+          </a:prstGeom>
+        </p:spPr>
+      </p:pic>
+    </p:spTree>
+  </p:cSld>
+  <p:clrMapOvr>
+    <a:masterClrMapping/>
+  </p:clrMapOvr>
+</p:sld>
+</file>
+
+<file path=ppt/slides/slide7.xml><?xml version="1.0" encoding="utf-8"?>
+<p:sld xmlns:a="http://schemas.openxmlformats.org/drawingml/2006/main" xmlns:r="http://schemas.openxmlformats.org/officeDocument/2006/relationships" xmlns:p="http://schemas.openxmlformats.org/presentationml/2006/main">
+  <p:cSld name="Slide 7">
     <p:bg>
       <p:bgPr>
         <a:solidFill>
@@ -9075,179 +8191,6 @@
           </a:p>
         </p:txBody>
       </p:sp>
-    </p:spTree>
-  </p:cSld>
-  <p:clrMapOvr>
-    <a:masterClrMapping/>
-  </p:clrMapOvr>
-</p:sld>
-</file>
-
-<file path=ppt/slides/slide7.xml><?xml version="1.0" encoding="utf-8"?>
-<p:sld xmlns:a="http://schemas.openxmlformats.org/drawingml/2006/main" xmlns:r="http://schemas.openxmlformats.org/officeDocument/2006/relationships" xmlns:p="http://schemas.openxmlformats.org/presentationml/2006/main">
-  <p:cSld name="Slide 7">
-    <p:bg>
-      <p:bgPr>
-        <a:solidFill>
-          <a:srgbClr val="FFFFFF"/>
-        </a:solidFill>
-      </p:bgPr>
-    </p:bg>
-    <p:spTree>
-      <p:nvGrpSpPr>
-        <p:cNvPr id="1" name=""/>
-        <p:cNvGrpSpPr/>
-        <p:nvPr/>
-      </p:nvGrpSpPr>
-      <p:grpSpPr>
-        <a:xfrm>
-          <a:off x="0" y="0"/>
-          <a:ext cx="0" cy="0"/>
-          <a:chOff x="0" y="0"/>
-          <a:chExt cx="0" cy="0"/>
-        </a:xfrm>
-      </p:grpSpPr>
-      <p:sp>
-        <p:nvSpPr>
-          <p:cNvPr id="2" name="Text 0"/>
-          <p:cNvSpPr/>
-          <p:nvPr/>
-        </p:nvSpPr>
-        <p:spPr>
-          <a:xfrm>
-            <a:off x="457200" y="201168"/>
-            <a:ext cx="8229600" cy="530352"/>
-          </a:xfrm>
-          <a:prstGeom prst="rect">
-            <a:avLst/>
-          </a:prstGeom>
-          <a:noFill/>
-          <a:ln/>
-        </p:spPr>
-        <p:txBody>
-          <a:bodyPr wrap="square" rtlCol="0" anchor="ctr"/>
-          <a:lstStyle/>
-          <a:p>
-            <a:pPr algn="l" indent="0" marL="0">
-              <a:buNone/>
-            </a:pPr>
-            <a:r>
-              <a:rPr lang="en-US" sz="2600" b="1" dirty="0">
-                <a:solidFill>
-                  <a:srgbClr val="7B2230"/>
-                </a:solidFill>
-                <a:latin typeface="Arial" pitchFamily="34" charset="0"/>
-                <a:ea typeface="Arial" pitchFamily="34" charset="-122"/>
-                <a:cs typeface="Arial" pitchFamily="34" charset="-120"/>
-              </a:rPr>
-              <a:t>A Curva dos 7 Processos Sociais</a:t>
-            </a:r>
-            <a:endParaRPr lang="en-US" sz="2600" dirty="0"/>
-          </a:p>
-        </p:txBody>
-      </p:sp>
-      <p:sp>
-        <p:nvSpPr>
-          <p:cNvPr id="3" name="Text 1"/>
-          <p:cNvSpPr/>
-          <p:nvPr/>
-        </p:nvSpPr>
-        <p:spPr>
-          <a:xfrm>
-            <a:off x="457200" y="768096"/>
-            <a:ext cx="8229600" cy="256032"/>
-          </a:xfrm>
-          <a:prstGeom prst="rect">
-            <a:avLst/>
-          </a:prstGeom>
-          <a:noFill/>
-          <a:ln/>
-        </p:spPr>
-        <p:txBody>
-          <a:bodyPr wrap="square" rtlCol="0" anchor="ctr"/>
-          <a:lstStyle/>
-          <a:p>
-            <a:pPr algn="l" indent="0" marL="0">
-              <a:buNone/>
-            </a:pPr>
-            <a:r>
-              <a:rPr lang="en-US" sz="1200" i="1" dirty="0">
-                <a:solidFill>
-                  <a:srgbClr val="8A7070"/>
-                </a:solidFill>
-                <a:latin typeface="Arial" pitchFamily="34" charset="0"/>
-                <a:ea typeface="Arial" pitchFamily="34" charset="-122"/>
-                <a:cs typeface="Arial" pitchFamily="34" charset="-120"/>
-              </a:rPr>
-              <a:t>Uma trajetória de amadurecimento do indivíduo na comunidade escolar</a:t>
-            </a:r>
-            <a:endParaRPr lang="en-US" sz="1200" dirty="0"/>
-          </a:p>
-        </p:txBody>
-      </p:sp>
-      <p:sp>
-        <p:nvSpPr>
-          <p:cNvPr id="4" name="Text 2"/>
-          <p:cNvSpPr/>
-          <p:nvPr/>
-        </p:nvSpPr>
-        <p:spPr>
-          <a:xfrm>
-            <a:off x="457200" y="1051560"/>
-            <a:ext cx="8229600" cy="438912"/>
-          </a:xfrm>
-          <a:prstGeom prst="rect">
-            <a:avLst/>
-          </a:prstGeom>
-          <a:noFill/>
-          <a:ln/>
-        </p:spPr>
-        <p:txBody>
-          <a:bodyPr wrap="square" lIns="0" tIns="0" rIns="0" bIns="0" rtlCol="0" anchor="ctr"/>
-          <a:lstStyle/>
-          <a:p>
-            <a:pPr indent="0" marL="0">
-              <a:buNone/>
-            </a:pPr>
-            <a:r>
-              <a:rPr lang="en-US" sz="1200" dirty="0">
-                <a:solidFill>
-                  <a:srgbClr val="1B2420"/>
-                </a:solidFill>
-                <a:latin typeface="Arial" pitchFamily="34" charset="0"/>
-                <a:ea typeface="Arial" pitchFamily="34" charset="-122"/>
-                <a:cs typeface="Arial" pitchFamily="34" charset="-120"/>
-              </a:rPr>
-              <a:t>Originada da antroposofia, a curva descreve como cada membro da comunidade desenvolve seu pertencimento e contribuição. O ponto de virada — Comprometido — é o momento em que a pessoa diz SIM para o ser da escola.</a:t>
-            </a:r>
-            <a:endParaRPr lang="en-US" sz="1200" dirty="0"/>
-          </a:p>
-        </p:txBody>
-      </p:sp>
-      <p:pic>
-        <p:nvPicPr>
-          <p:cNvPr id="5" name="Image 0" descr="preencoded.png">    </p:cNvPr>
-          <p:cNvPicPr>
-            <a:picLocks noChangeAspect="1"/>
-          </p:cNvPicPr>
-          <p:nvPr/>
-        </p:nvPicPr>
-        <p:blipFill>
-          <a:blip r:embed="rId1"/>
-          <a:stretch>
-            <a:fillRect/>
-          </a:stretch>
-        </p:blipFill>
-        <p:spPr>
-          <a:xfrm>
-            <a:off x="457200" y="1508760"/>
-            <a:ext cx="8229600" cy="3429000"/>
-          </a:xfrm>
-          <a:prstGeom prst="rect">
-            <a:avLst/>
-          </a:prstGeom>
-        </p:spPr>
-      </p:pic>
     </p:spTree>
   </p:cSld>
   <p:clrMapOvr>
@@ -9313,7 +8256,7 @@
                 <a:ea typeface="Arial" pitchFamily="34" charset="-122"/>
                 <a:cs typeface="Arial" pitchFamily="34" charset="-120"/>
               </a:rPr>
-              <a:t>Metodologia de Inferência do Estágio</a:t>
+              <a:t>A Curva dos 7 Processos Sociais</a:t>
             </a:r>
             <a:endParaRPr lang="en-US" sz="2600" dirty="0"/>
           </a:p>
@@ -9352,7 +8295,7 @@
                 <a:ea typeface="Arial" pitchFamily="34" charset="-122"/>
                 <a:cs typeface="Arial" pitchFamily="34" charset="-120"/>
               </a:rPr>
-              <a:t>Como as respostas foram interpretadas para posicionar cada pessoa na curva</a:t>
+              <a:t>Uma trajetória de amadurecimento do indivíduo na comunidade escolar</a:t>
             </a:r>
             <a:endParaRPr lang="en-US" sz="1200" dirty="0"/>
           </a:p>
@@ -9367,7 +8310,7 @@
         <p:spPr>
           <a:xfrm>
             <a:off x="457200" y="1051560"/>
-            <a:ext cx="8229600" cy="320040"/>
+            <a:ext cx="8229600" cy="438912"/>
           </a:xfrm>
           <a:prstGeom prst="rect">
             <a:avLst/>
@@ -9391,591 +8334,36 @@
                 <a:ea typeface="Arial" pitchFamily="34" charset="-122"/>
                 <a:cs typeface="Arial" pitchFamily="34" charset="-120"/>
               </a:rPr>
-              <a:t>Para cada respondente, o estágio foi inferido combinando cinco dimensões de análise:</a:t>
+              <a:t>Originada da antroposofia, a curva descreve como cada membro da comunidade desenvolve seu pertencimento e contribuição. O ponto de virada — Comprometido — é o momento em que a pessoa diz SIM para o ser da escola.</a:t>
             </a:r>
             <a:endParaRPr lang="en-US" sz="1200" dirty="0"/>
           </a:p>
         </p:txBody>
       </p:sp>
-      <p:sp>
-        <p:nvSpPr>
-          <p:cNvPr id="5" name="Shape 3"/>
-          <p:cNvSpPr/>
-          <p:nvPr/>
-        </p:nvSpPr>
-        <p:spPr>
-          <a:xfrm>
-            <a:off x="457200" y="1371600"/>
-            <a:ext cx="164592" cy="475488"/>
-          </a:xfrm>
-          <a:prstGeom prst="rect">
-            <a:avLst/>
-          </a:prstGeom>
-          <a:solidFill>
-            <a:srgbClr val="7B2230"/>
-          </a:solidFill>
-          <a:ln w="12700">
-            <a:solidFill>
-              <a:srgbClr val="7B2230"/>
-            </a:solidFill>
-            <a:prstDash val="solid"/>
-          </a:ln>
-        </p:spPr>
-      </p:sp>
-      <p:sp>
-        <p:nvSpPr>
-          <p:cNvPr id="6" name="Text 4"/>
-          <p:cNvSpPr/>
-          <p:nvPr/>
-        </p:nvSpPr>
-        <p:spPr>
-          <a:xfrm>
-            <a:off x="713232" y="1371600"/>
-            <a:ext cx="3200400" cy="237744"/>
-          </a:xfrm>
-          <a:prstGeom prst="rect">
-            <a:avLst/>
-          </a:prstGeom>
-          <a:noFill/>
-          <a:ln/>
-        </p:spPr>
-        <p:txBody>
-          <a:bodyPr wrap="square" lIns="0" tIns="0" rIns="0" bIns="0" rtlCol="0" anchor="ctr"/>
-          <a:lstStyle/>
-          <a:p>
-            <a:pPr indent="0" marL="0">
-              <a:buNone/>
-            </a:pPr>
-            <a:r>
-              <a:rPr lang="en-US" sz="1200" b="1" dirty="0">
-                <a:solidFill>
-                  <a:srgbClr val="1B2420"/>
-                </a:solidFill>
-                <a:latin typeface="Arial" pitchFamily="34" charset="0"/>
-                <a:ea typeface="Arial" pitchFamily="34" charset="-122"/>
-                <a:cs typeface="Arial" pitchFamily="34" charset="-120"/>
-              </a:rPr>
-              <a:t>Conhecimento Institucional</a:t>
-            </a:r>
-            <a:endParaRPr lang="en-US" sz="1200" dirty="0"/>
-          </a:p>
-        </p:txBody>
-      </p:sp>
-      <p:sp>
-        <p:nvSpPr>
-          <p:cNvPr id="7" name="Text 5"/>
-          <p:cNvSpPr/>
-          <p:nvPr/>
-        </p:nvSpPr>
-        <p:spPr>
-          <a:xfrm>
-            <a:off x="713232" y="1600200"/>
-            <a:ext cx="7315200" cy="237744"/>
-          </a:xfrm>
-          <a:prstGeom prst="rect">
-            <a:avLst/>
-          </a:prstGeom>
-          <a:noFill/>
-          <a:ln/>
-        </p:spPr>
-        <p:txBody>
-          <a:bodyPr wrap="square" lIns="0" tIns="0" rIns="0" bIns="0" rtlCol="0" anchor="ctr"/>
-          <a:lstStyle/>
-          <a:p>
-            <a:pPr indent="0" marL="0">
-              <a:buNone/>
-            </a:pPr>
-            <a:r>
-              <a:rPr lang="en-US" sz="1000" dirty="0">
-                <a:solidFill>
-                  <a:srgbClr val="8A7070"/>
-                </a:solidFill>
-                <a:latin typeface="Arial" pitchFamily="34" charset="0"/>
-                <a:ea typeface="Arial" pitchFamily="34" charset="-122"/>
-                <a:cs typeface="Arial" pitchFamily="34" charset="-120"/>
-              </a:rPr>
-              <a:t>Sim/Não sobre 4 aspectos-chave (missão, processos, pedagogia)</a:t>
-            </a:r>
-            <a:endParaRPr lang="en-US" sz="1000" dirty="0"/>
-          </a:p>
-        </p:txBody>
-      </p:sp>
-      <p:sp>
-        <p:nvSpPr>
-          <p:cNvPr id="8" name="Shape 6"/>
-          <p:cNvSpPr/>
-          <p:nvPr/>
-        </p:nvSpPr>
-        <p:spPr>
-          <a:xfrm>
-            <a:off x="457200" y="1993392"/>
-            <a:ext cx="164592" cy="475488"/>
-          </a:xfrm>
-          <a:prstGeom prst="rect">
-            <a:avLst/>
-          </a:prstGeom>
-          <a:solidFill>
-            <a:srgbClr val="457B9D"/>
-          </a:solidFill>
-          <a:ln w="12700">
-            <a:solidFill>
-              <a:srgbClr val="457B9D"/>
-            </a:solidFill>
-            <a:prstDash val="solid"/>
-          </a:ln>
-        </p:spPr>
-      </p:sp>
-      <p:sp>
-        <p:nvSpPr>
-          <p:cNvPr id="9" name="Text 7"/>
-          <p:cNvSpPr/>
-          <p:nvPr/>
-        </p:nvSpPr>
-        <p:spPr>
-          <a:xfrm>
-            <a:off x="713232" y="1993392"/>
-            <a:ext cx="3200400" cy="237744"/>
-          </a:xfrm>
-          <a:prstGeom prst="rect">
-            <a:avLst/>
-          </a:prstGeom>
-          <a:noFill/>
-          <a:ln/>
-        </p:spPr>
-        <p:txBody>
-          <a:bodyPr wrap="square" lIns="0" tIns="0" rIns="0" bIns="0" rtlCol="0" anchor="ctr"/>
-          <a:lstStyle/>
-          <a:p>
-            <a:pPr indent="0" marL="0">
-              <a:buNone/>
-            </a:pPr>
-            <a:r>
-              <a:rPr lang="en-US" sz="1200" b="1" dirty="0">
-                <a:solidFill>
-                  <a:srgbClr val="1B2420"/>
-                </a:solidFill>
-                <a:latin typeface="Arial" pitchFamily="34" charset="0"/>
-                <a:ea typeface="Arial" pitchFamily="34" charset="-122"/>
-                <a:cs typeface="Arial" pitchFamily="34" charset="-120"/>
-              </a:rPr>
-              <a:t>Pertencimento Cultural</a:t>
-            </a:r>
-            <a:endParaRPr lang="en-US" sz="1200" dirty="0"/>
-          </a:p>
-        </p:txBody>
-      </p:sp>
-      <p:sp>
-        <p:nvSpPr>
-          <p:cNvPr id="10" name="Text 8"/>
-          <p:cNvSpPr/>
-          <p:nvPr/>
-        </p:nvSpPr>
-        <p:spPr>
-          <a:xfrm>
-            <a:off x="713232" y="2221992"/>
-            <a:ext cx="7315200" cy="237744"/>
-          </a:xfrm>
-          <a:prstGeom prst="rect">
-            <a:avLst/>
-          </a:prstGeom>
-          <a:noFill/>
-          <a:ln/>
-        </p:spPr>
-        <p:txBody>
-          <a:bodyPr wrap="square" lIns="0" tIns="0" rIns="0" bIns="0" rtlCol="0" anchor="ctr"/>
-          <a:lstStyle/>
-          <a:p>
-            <a:pPr indent="0" marL="0">
-              <a:buNone/>
-            </a:pPr>
-            <a:r>
-              <a:rPr lang="en-US" sz="1000" dirty="0">
-                <a:solidFill>
-                  <a:srgbClr val="8A7070"/>
-                </a:solidFill>
-                <a:latin typeface="Arial" pitchFamily="34" charset="0"/>
-                <a:ea typeface="Arial" pitchFamily="34" charset="-122"/>
-                <a:cs typeface="Arial" pitchFamily="34" charset="-120"/>
-              </a:rPr>
-              <a:t>8 afirmações sobre identificação e conexão com os valores</a:t>
-            </a:r>
-            <a:endParaRPr lang="en-US" sz="1000" dirty="0"/>
-          </a:p>
-        </p:txBody>
-      </p:sp>
-      <p:sp>
-        <p:nvSpPr>
-          <p:cNvPr id="11" name="Shape 9"/>
-          <p:cNvSpPr/>
-          <p:nvPr/>
-        </p:nvSpPr>
-        <p:spPr>
-          <a:xfrm>
-            <a:off x="457200" y="2615184"/>
-            <a:ext cx="164592" cy="475488"/>
-          </a:xfrm>
-          <a:prstGeom prst="rect">
-            <a:avLst/>
-          </a:prstGeom>
-          <a:solidFill>
-            <a:srgbClr val="2D6A4F"/>
-          </a:solidFill>
-          <a:ln w="12700">
-            <a:solidFill>
-              <a:srgbClr val="2D6A4F"/>
-            </a:solidFill>
-            <a:prstDash val="solid"/>
-          </a:ln>
-        </p:spPr>
-      </p:sp>
-      <p:sp>
-        <p:nvSpPr>
-          <p:cNvPr id="12" name="Text 10"/>
-          <p:cNvSpPr/>
-          <p:nvPr/>
-        </p:nvSpPr>
-        <p:spPr>
-          <a:xfrm>
-            <a:off x="713232" y="2615184"/>
-            <a:ext cx="3200400" cy="237744"/>
-          </a:xfrm>
-          <a:prstGeom prst="rect">
-            <a:avLst/>
-          </a:prstGeom>
-          <a:noFill/>
-          <a:ln/>
-        </p:spPr>
-        <p:txBody>
-          <a:bodyPr wrap="square" lIns="0" tIns="0" rIns="0" bIns="0" rtlCol="0" anchor="ctr"/>
-          <a:lstStyle/>
-          <a:p>
-            <a:pPr indent="0" marL="0">
-              <a:buNone/>
-            </a:pPr>
-            <a:r>
-              <a:rPr lang="en-US" sz="1200" b="1" dirty="0">
-                <a:solidFill>
-                  <a:srgbClr val="1B2420"/>
-                </a:solidFill>
-                <a:latin typeface="Arial" pitchFamily="34" charset="0"/>
-                <a:ea typeface="Arial" pitchFamily="34" charset="-122"/>
-                <a:cs typeface="Arial" pitchFamily="34" charset="-120"/>
-              </a:rPr>
-              <a:t>Acordos Sociais</a:t>
-            </a:r>
-            <a:endParaRPr lang="en-US" sz="1200" dirty="0"/>
-          </a:p>
-        </p:txBody>
-      </p:sp>
-      <p:sp>
-        <p:nvSpPr>
-          <p:cNvPr id="13" name="Text 11"/>
-          <p:cNvSpPr/>
-          <p:nvPr/>
-        </p:nvSpPr>
-        <p:spPr>
-          <a:xfrm>
-            <a:off x="713232" y="2843784"/>
-            <a:ext cx="7315200" cy="237744"/>
-          </a:xfrm>
-          <a:prstGeom prst="rect">
-            <a:avLst/>
-          </a:prstGeom>
-          <a:noFill/>
-          <a:ln/>
-        </p:spPr>
-        <p:txBody>
-          <a:bodyPr wrap="square" lIns="0" tIns="0" rIns="0" bIns="0" rtlCol="0" anchor="ctr"/>
-          <a:lstStyle/>
-          <a:p>
-            <a:pPr indent="0" marL="0">
-              <a:buNone/>
-            </a:pPr>
-            <a:r>
-              <a:rPr lang="en-US" sz="1000" dirty="0">
-                <a:solidFill>
-                  <a:srgbClr val="8A7070"/>
-                </a:solidFill>
-                <a:latin typeface="Arial" pitchFamily="34" charset="0"/>
-                <a:ea typeface="Arial" pitchFamily="34" charset="-122"/>
-                <a:cs typeface="Arial" pitchFamily="34" charset="-120"/>
-              </a:rPr>
-              <a:t>9 afirmações sobre práticas comunitárias e acordos coletivos</a:t>
-            </a:r>
-            <a:endParaRPr lang="en-US" sz="1000" dirty="0"/>
-          </a:p>
-        </p:txBody>
-      </p:sp>
-      <p:sp>
-        <p:nvSpPr>
-          <p:cNvPr id="14" name="Shape 12"/>
-          <p:cNvSpPr/>
-          <p:nvPr/>
-        </p:nvSpPr>
-        <p:spPr>
-          <a:xfrm>
-            <a:off x="457200" y="3236976"/>
-            <a:ext cx="164592" cy="475488"/>
-          </a:xfrm>
-          <a:prstGeom prst="rect">
-            <a:avLst/>
-          </a:prstGeom>
-          <a:solidFill>
-            <a:srgbClr val="D4821A"/>
-          </a:solidFill>
-          <a:ln w="12700">
-            <a:solidFill>
-              <a:srgbClr val="D4821A"/>
-            </a:solidFill>
-            <a:prstDash val="solid"/>
-          </a:ln>
-        </p:spPr>
-      </p:sp>
-      <p:sp>
-        <p:nvSpPr>
-          <p:cNvPr id="15" name="Text 13"/>
-          <p:cNvSpPr/>
-          <p:nvPr/>
-        </p:nvSpPr>
-        <p:spPr>
-          <a:xfrm>
-            <a:off x="713232" y="3236976"/>
-            <a:ext cx="3200400" cy="237744"/>
-          </a:xfrm>
-          <a:prstGeom prst="rect">
-            <a:avLst/>
-          </a:prstGeom>
-          <a:noFill/>
-          <a:ln/>
-        </p:spPr>
-        <p:txBody>
-          <a:bodyPr wrap="square" lIns="0" tIns="0" rIns="0" bIns="0" rtlCol="0" anchor="ctr"/>
-          <a:lstStyle/>
-          <a:p>
-            <a:pPr indent="0" marL="0">
-              <a:buNone/>
-            </a:pPr>
-            <a:r>
-              <a:rPr lang="en-US" sz="1200" b="1" dirty="0">
-                <a:solidFill>
-                  <a:srgbClr val="1B2420"/>
-                </a:solidFill>
-                <a:latin typeface="Arial" pitchFamily="34" charset="0"/>
-                <a:ea typeface="Arial" pitchFamily="34" charset="-122"/>
-                <a:cs typeface="Arial" pitchFamily="34" charset="-120"/>
-              </a:rPr>
-              <a:t>Prática da Ec. Fraterna</a:t>
-            </a:r>
-            <a:endParaRPr lang="en-US" sz="1200" dirty="0"/>
-          </a:p>
-        </p:txBody>
-      </p:sp>
-      <p:sp>
-        <p:nvSpPr>
-          <p:cNvPr id="16" name="Text 14"/>
-          <p:cNvSpPr/>
-          <p:nvPr/>
-        </p:nvSpPr>
-        <p:spPr>
-          <a:xfrm>
-            <a:off x="713232" y="3465576"/>
-            <a:ext cx="7315200" cy="237744"/>
-          </a:xfrm>
-          <a:prstGeom prst="rect">
-            <a:avLst/>
-          </a:prstGeom>
-          <a:noFill/>
-          <a:ln/>
-        </p:spPr>
-        <p:txBody>
-          <a:bodyPr wrap="square" lIns="0" tIns="0" rIns="0" bIns="0" rtlCol="0" anchor="ctr"/>
-          <a:lstStyle/>
-          <a:p>
-            <a:pPr indent="0" marL="0">
-              <a:buNone/>
-            </a:pPr>
-            <a:r>
-              <a:rPr lang="en-US" sz="1000" dirty="0">
-                <a:solidFill>
-                  <a:srgbClr val="8A7070"/>
-                </a:solidFill>
-                <a:latin typeface="Arial" pitchFamily="34" charset="0"/>
-                <a:ea typeface="Arial" pitchFamily="34" charset="-122"/>
-                <a:cs typeface="Arial" pitchFamily="34" charset="-120"/>
-              </a:rPr>
-              <a:t>8 afirmações sobre práticas de economia solidária e doação</a:t>
-            </a:r>
-            <a:endParaRPr lang="en-US" sz="1000" dirty="0"/>
-          </a:p>
-        </p:txBody>
-      </p:sp>
-      <p:sp>
-        <p:nvSpPr>
-          <p:cNvPr id="17" name="Shape 15"/>
-          <p:cNvSpPr/>
-          <p:nvPr/>
-        </p:nvSpPr>
-        <p:spPr>
-          <a:xfrm>
-            <a:off x="457200" y="3858768"/>
-            <a:ext cx="164592" cy="475488"/>
-          </a:xfrm>
-          <a:prstGeom prst="rect">
-            <a:avLst/>
-          </a:prstGeom>
-          <a:solidFill>
-            <a:srgbClr val="6B46C1"/>
-          </a:solidFill>
-          <a:ln w="12700">
-            <a:solidFill>
-              <a:srgbClr val="6B46C1"/>
-            </a:solidFill>
-            <a:prstDash val="solid"/>
-          </a:ln>
-        </p:spPr>
-      </p:sp>
-      <p:sp>
-        <p:nvSpPr>
-          <p:cNvPr id="18" name="Text 16"/>
-          <p:cNvSpPr/>
-          <p:nvPr/>
-        </p:nvSpPr>
-        <p:spPr>
-          <a:xfrm>
-            <a:off x="713232" y="3858768"/>
-            <a:ext cx="3200400" cy="237744"/>
-          </a:xfrm>
-          <a:prstGeom prst="rect">
-            <a:avLst/>
-          </a:prstGeom>
-          <a:noFill/>
-          <a:ln/>
-        </p:spPr>
-        <p:txBody>
-          <a:bodyPr wrap="square" lIns="0" tIns="0" rIns="0" bIns="0" rtlCol="0" anchor="ctr"/>
-          <a:lstStyle/>
-          <a:p>
-            <a:pPr indent="0" marL="0">
-              <a:buNone/>
-            </a:pPr>
-            <a:r>
-              <a:rPr lang="en-US" sz="1200" b="1" dirty="0">
-                <a:solidFill>
-                  <a:srgbClr val="1B2420"/>
-                </a:solidFill>
-                <a:latin typeface="Arial" pitchFamily="34" charset="0"/>
-                <a:ea typeface="Arial" pitchFamily="34" charset="-122"/>
-                <a:cs typeface="Arial" pitchFamily="34" charset="-120"/>
-              </a:rPr>
-              <a:t>Engajamento</a:t>
-            </a:r>
-            <a:endParaRPr lang="en-US" sz="1200" dirty="0"/>
-          </a:p>
-        </p:txBody>
-      </p:sp>
-      <p:sp>
-        <p:nvSpPr>
-          <p:cNvPr id="19" name="Text 17"/>
-          <p:cNvSpPr/>
-          <p:nvPr/>
-        </p:nvSpPr>
-        <p:spPr>
-          <a:xfrm>
-            <a:off x="713232" y="4087368"/>
-            <a:ext cx="7315200" cy="237744"/>
-          </a:xfrm>
-          <a:prstGeom prst="rect">
-            <a:avLst/>
-          </a:prstGeom>
-          <a:noFill/>
-          <a:ln/>
-        </p:spPr>
-        <p:txBody>
-          <a:bodyPr wrap="square" lIns="0" tIns="0" rIns="0" bIns="0" rtlCol="0" anchor="ctr"/>
-          <a:lstStyle/>
-          <a:p>
-            <a:pPr indent="0" marL="0">
-              <a:buNone/>
-            </a:pPr>
-            <a:r>
-              <a:rPr lang="en-US" sz="1000" dirty="0">
-                <a:solidFill>
-                  <a:srgbClr val="8A7070"/>
-                </a:solidFill>
-                <a:latin typeface="Arial" pitchFamily="34" charset="0"/>
-                <a:ea typeface="Arial" pitchFamily="34" charset="-122"/>
-                <a:cs typeface="Arial" pitchFamily="34" charset="-120"/>
-              </a:rPr>
-              <a:t>5 papéis institucionais: Sou atualmente / Já fui / Nunca fui</a:t>
-            </a:r>
-            <a:endParaRPr lang="en-US" sz="1000" dirty="0"/>
-          </a:p>
-        </p:txBody>
-      </p:sp>
-      <p:sp>
-        <p:nvSpPr>
-          <p:cNvPr id="20" name="Shape 18"/>
-          <p:cNvSpPr/>
-          <p:nvPr/>
-        </p:nvSpPr>
-        <p:spPr>
-          <a:xfrm>
-            <a:off x="457200" y="4443984"/>
-            <a:ext cx="8229600" cy="402336"/>
-          </a:xfrm>
-          <a:prstGeom prst="rect">
-            <a:avLst/>
-          </a:prstGeom>
-          <a:solidFill>
-            <a:srgbClr val="FDF6F4"/>
-          </a:solidFill>
-          <a:ln w="12700">
-            <a:solidFill>
-              <a:srgbClr val="E8D5D0"/>
-            </a:solidFill>
-            <a:prstDash val="solid"/>
-          </a:ln>
-        </p:spPr>
-      </p:sp>
-      <p:sp>
-        <p:nvSpPr>
-          <p:cNvPr id="21" name="Text 19"/>
-          <p:cNvSpPr/>
-          <p:nvPr/>
-        </p:nvSpPr>
-        <p:spPr>
-          <a:xfrm>
-            <a:off x="548640" y="4480560"/>
-            <a:ext cx="8046720" cy="329184"/>
-          </a:xfrm>
-          <a:prstGeom prst="rect">
-            <a:avLst/>
-          </a:prstGeom>
-          <a:noFill/>
-          <a:ln/>
-        </p:spPr>
-        <p:txBody>
-          <a:bodyPr wrap="square" lIns="0" tIns="0" rIns="0" bIns="0" rtlCol="0" anchor="ctr"/>
-          <a:lstStyle/>
-          <a:p>
-            <a:pPr indent="0" marL="0">
-              <a:buNone/>
-            </a:pPr>
-            <a:r>
-              <a:rPr lang="en-US" sz="950" dirty="0">
-                <a:solidFill>
-                  <a:srgbClr val="1B2420"/>
-                </a:solidFill>
-                <a:latin typeface="Arial" pitchFamily="34" charset="0"/>
-                <a:ea typeface="Arial" pitchFamily="34" charset="-122"/>
-                <a:cs typeface="Arial" pitchFamily="34" charset="-120"/>
-              </a:rPr>
-              <a:t>Net Signal: Concordo×1,0 + Concordo parc.×0,4 + Não sei×(−0,2) + Discordo×(−0,8) → normalizado [0, 1]. Modificadores: novatos (≤1 ano) limitados a Inserindo; veteranos (≥5 anos) sem comprometimento → Inserindo/Adaptando.</a:t>
-            </a:r>
-            <a:endParaRPr lang="en-US" sz="950" dirty="0"/>
-          </a:p>
-        </p:txBody>
-      </p:sp>
+      <p:pic>
+        <p:nvPicPr>
+          <p:cNvPr id="5" name="Image 0" descr="preencoded.png">    </p:cNvPr>
+          <p:cNvPicPr>
+            <a:picLocks noChangeAspect="1"/>
+          </p:cNvPicPr>
+          <p:nvPr/>
+        </p:nvPicPr>
+        <p:blipFill>
+          <a:blip r:embed="rId1"/>
+          <a:stretch>
+            <a:fillRect/>
+          </a:stretch>
+        </p:blipFill>
+        <p:spPr>
+          <a:xfrm>
+            <a:off x="1188720" y="1536192"/>
+            <a:ext cx="6583680" cy="3429000"/>
+          </a:xfrm>
+          <a:prstGeom prst="rect">
+            <a:avLst/>
+          </a:prstGeom>
+        </p:spPr>
+      </p:pic>
     </p:spTree>
   </p:cSld>
   <p:clrMapOvr>
@@ -10041,7 +8429,7 @@
                 <a:ea typeface="Arial" pitchFamily="34" charset="-122"/>
                 <a:cs typeface="Arial" pitchFamily="34" charset="-120"/>
               </a:rPr>
-              <a:t>Distribuição na Curva dos 7 Estágios</a:t>
+              <a:t>Como a Comunidade se Enxerga na Curva</a:t>
             </a:r>
             <a:endParaRPr lang="en-US" sz="2600" dirty="0"/>
           </a:p>
@@ -10080,852 +8468,36 @@
                 <a:ea typeface="Arial" pitchFamily="34" charset="-122"/>
                 <a:cs typeface="Arial" pitchFamily="34" charset="-120"/>
               </a:rPr>
-              <a:t>Posicionamento inferido com base nas respostas — N = 143</a:t>
+              <a:t>Autoposicionamento (Q10) vs. nível inferido pelas respostas — N=143</a:t>
             </a:r>
             <a:endParaRPr lang="en-US" sz="1200" dirty="0"/>
           </a:p>
         </p:txBody>
       </p:sp>
-      <p:graphicFrame>
-        <p:nvGraphicFramePr>
-          <p:cNvPr id="4" name="Chart 0" descr=""/>
-          <p:cNvGraphicFramePr/>
-          <p:nvPr/>
-        </p:nvGraphicFramePr>
-        <p:xfrm>
-          <a:off x="457200" y="1051560"/>
-          <a:ext cx="8229600" cy="1463040"/>
-        </p:xfrm>
-        <a:graphic xmlns:a="http://schemas.openxmlformats.org/drawingml/2006/main">
-          <a:graphicData uri="http://schemas.openxmlformats.org/drawingml/2006/chart">
-            <c:chart xmlns:c="http://schemas.openxmlformats.org/drawingml/2006/chart" r:id="rId1"/>
-          </a:graphicData>
-        </a:graphic>
-      </p:graphicFrame>
-      <p:sp>
-        <p:nvSpPr>
-          <p:cNvPr id="5" name="Shape 2"/>
-          <p:cNvSpPr/>
-          <p:nvPr/>
-        </p:nvSpPr>
-        <p:spPr>
-          <a:xfrm>
-            <a:off x="457200" y="2880360"/>
-            <a:ext cx="2029968" cy="1645920"/>
-          </a:xfrm>
-          <a:prstGeom prst="rect">
-            <a:avLst/>
-          </a:prstGeom>
-          <a:solidFill>
-            <a:srgbClr val="FDF6F4"/>
-          </a:solidFill>
-          <a:ln w="12700">
-            <a:solidFill>
-              <a:srgbClr val="C04060"/>
-            </a:solidFill>
-            <a:prstDash val="solid"/>
-          </a:ln>
-        </p:spPr>
-      </p:sp>
-      <p:sp>
-        <p:nvSpPr>
-          <p:cNvPr id="6" name="Shape 3"/>
-          <p:cNvSpPr/>
-          <p:nvPr/>
-        </p:nvSpPr>
-        <p:spPr>
-          <a:xfrm>
-            <a:off x="457200" y="2880360"/>
-            <a:ext cx="2029968" cy="256032"/>
-          </a:xfrm>
-          <a:prstGeom prst="rect">
-            <a:avLst/>
-          </a:prstGeom>
-          <a:solidFill>
-            <a:srgbClr val="C04060"/>
-          </a:solidFill>
-          <a:ln w="12700">
-            <a:solidFill>
-              <a:srgbClr val="C04060"/>
-            </a:solidFill>
-            <a:prstDash val="solid"/>
-          </a:ln>
-        </p:spPr>
-      </p:sp>
-      <p:sp>
-        <p:nvSpPr>
-          <p:cNvPr id="7" name="Text 4"/>
-          <p:cNvSpPr/>
-          <p:nvPr/>
-        </p:nvSpPr>
-        <p:spPr>
-          <a:xfrm>
-            <a:off x="457200" y="2880360"/>
-            <a:ext cx="2029968" cy="256032"/>
-          </a:xfrm>
-          <a:prstGeom prst="rect">
-            <a:avLst/>
-          </a:prstGeom>
-          <a:noFill/>
-          <a:ln/>
-        </p:spPr>
-        <p:txBody>
-          <a:bodyPr wrap="square" lIns="0" tIns="0" rIns="0" bIns="0" rtlCol="0" anchor="ctr"/>
-          <a:lstStyle/>
-          <a:p>
-            <a:pPr algn="ctr" indent="0" marL="0">
-              <a:buNone/>
-            </a:pPr>
-            <a:r>
-              <a:rPr lang="en-US" sz="1000" b="1" dirty="0">
-                <a:solidFill>
-                  <a:srgbClr val="FFFFFF"/>
-                </a:solidFill>
-                <a:latin typeface="Arial" pitchFamily="34" charset="0"/>
-                <a:ea typeface="Arial" pitchFamily="34" charset="-122"/>
-                <a:cs typeface="Arial" pitchFamily="34" charset="-120"/>
-              </a:rPr>
-              <a:t>Inserindo</a:t>
-            </a:r>
-            <a:endParaRPr lang="en-US" sz="1000" dirty="0"/>
-          </a:p>
-        </p:txBody>
-      </p:sp>
-      <p:sp>
-        <p:nvSpPr>
-          <p:cNvPr id="8" name="Text 5"/>
-          <p:cNvSpPr/>
-          <p:nvPr/>
-        </p:nvSpPr>
-        <p:spPr>
-          <a:xfrm>
-            <a:off x="457200" y="3154680"/>
-            <a:ext cx="2029968" cy="438912"/>
-          </a:xfrm>
-          <a:prstGeom prst="rect">
-            <a:avLst/>
-          </a:prstGeom>
-          <a:noFill/>
-          <a:ln/>
-        </p:spPr>
-        <p:txBody>
-          <a:bodyPr wrap="square" lIns="0" tIns="0" rIns="0" bIns="0" rtlCol="0" anchor="ctr"/>
-          <a:lstStyle/>
-          <a:p>
-            <a:pPr algn="ctr" indent="0" marL="0">
-              <a:buNone/>
-            </a:pPr>
-            <a:r>
-              <a:rPr lang="en-US" sz="3000" b="1" dirty="0">
-                <a:solidFill>
-                  <a:srgbClr val="C04060"/>
-                </a:solidFill>
-                <a:latin typeface="Arial" pitchFamily="34" charset="0"/>
-                <a:ea typeface="Arial" pitchFamily="34" charset="-122"/>
-                <a:cs typeface="Arial" pitchFamily="34" charset="-120"/>
-              </a:rPr>
-              <a:t>32,2%</a:t>
-            </a:r>
-            <a:endParaRPr lang="en-US" sz="3000" dirty="0"/>
-          </a:p>
-        </p:txBody>
-      </p:sp>
-      <p:sp>
-        <p:nvSpPr>
-          <p:cNvPr id="9" name="Text 6"/>
-          <p:cNvSpPr/>
-          <p:nvPr/>
-        </p:nvSpPr>
-        <p:spPr>
-          <a:xfrm>
-            <a:off x="457200" y="3621024"/>
-            <a:ext cx="2029968" cy="228600"/>
-          </a:xfrm>
-          <a:prstGeom prst="rect">
-            <a:avLst/>
-          </a:prstGeom>
-          <a:noFill/>
-          <a:ln/>
-        </p:spPr>
-        <p:txBody>
-          <a:bodyPr wrap="square" lIns="0" tIns="0" rIns="0" bIns="0" rtlCol="0" anchor="ctr"/>
-          <a:lstStyle/>
-          <a:p>
-            <a:pPr algn="ctr" indent="0" marL="0">
-              <a:buNone/>
-            </a:pPr>
-            <a:r>
-              <a:rPr lang="en-US" sz="1100" dirty="0">
-                <a:solidFill>
-                  <a:srgbClr val="8A7070"/>
-                </a:solidFill>
-                <a:latin typeface="Arial" pitchFamily="34" charset="0"/>
-                <a:ea typeface="Arial" pitchFamily="34" charset="-122"/>
-                <a:cs typeface="Arial" pitchFamily="34" charset="-120"/>
-              </a:rPr>
-              <a:t>N = 46</a:t>
-            </a:r>
-            <a:endParaRPr lang="en-US" sz="1100" dirty="0"/>
-          </a:p>
-        </p:txBody>
-      </p:sp>
-      <p:sp>
-        <p:nvSpPr>
-          <p:cNvPr id="10" name="Text 7"/>
-          <p:cNvSpPr/>
-          <p:nvPr/>
-        </p:nvSpPr>
-        <p:spPr>
-          <a:xfrm>
-            <a:off x="530352" y="3877056"/>
-            <a:ext cx="1901952" cy="548640"/>
-          </a:xfrm>
-          <a:prstGeom prst="rect">
-            <a:avLst/>
-          </a:prstGeom>
-          <a:noFill/>
-          <a:ln/>
-        </p:spPr>
-        <p:txBody>
-          <a:bodyPr wrap="square" lIns="0" tIns="0" rIns="0" bIns="0" rtlCol="0" anchor="ctr"/>
-          <a:lstStyle/>
-          <a:p>
-            <a:pPr algn="ctr" indent="0" marL="0">
-              <a:buNone/>
-            </a:pPr>
-            <a:r>
-              <a:rPr lang="en-US" sz="950" dirty="0">
-                <a:solidFill>
-                  <a:srgbClr val="1B2420"/>
-                </a:solidFill>
-                <a:latin typeface="Arial" pitchFamily="34" charset="0"/>
-                <a:ea typeface="Arial" pitchFamily="34" charset="-122"/>
-                <a:cs typeface="Arial" pitchFamily="34" charset="-120"/>
-              </a:rPr>
-              <a:t>No ponto de virada — decidir SIM ou NÃO</a:t>
-            </a:r>
-            <a:endParaRPr lang="en-US" sz="950" dirty="0"/>
-          </a:p>
-        </p:txBody>
-      </p:sp>
-      <p:sp>
-        <p:nvSpPr>
-          <p:cNvPr id="11" name="Shape 8"/>
-          <p:cNvSpPr/>
-          <p:nvPr/>
-        </p:nvSpPr>
-        <p:spPr>
-          <a:xfrm>
-            <a:off x="2633472" y="2880360"/>
-            <a:ext cx="2029968" cy="1645920"/>
-          </a:xfrm>
-          <a:prstGeom prst="rect">
-            <a:avLst/>
-          </a:prstGeom>
-          <a:solidFill>
-            <a:srgbClr val="FDF6F4"/>
-          </a:solidFill>
-          <a:ln w="12700">
-            <a:solidFill>
-              <a:srgbClr val="2A9D8F"/>
-            </a:solidFill>
-            <a:prstDash val="solid"/>
-          </a:ln>
-        </p:spPr>
-      </p:sp>
-      <p:sp>
-        <p:nvSpPr>
-          <p:cNvPr id="12" name="Shape 9"/>
-          <p:cNvSpPr/>
-          <p:nvPr/>
-        </p:nvSpPr>
-        <p:spPr>
-          <a:xfrm>
-            <a:off x="2633472" y="2880360"/>
-            <a:ext cx="2029968" cy="256032"/>
-          </a:xfrm>
-          <a:prstGeom prst="rect">
-            <a:avLst/>
-          </a:prstGeom>
-          <a:solidFill>
-            <a:srgbClr val="2A9D8F"/>
-          </a:solidFill>
-          <a:ln w="12700">
-            <a:solidFill>
-              <a:srgbClr val="2A9D8F"/>
-            </a:solidFill>
-            <a:prstDash val="solid"/>
-          </a:ln>
-        </p:spPr>
-      </p:sp>
-      <p:sp>
-        <p:nvSpPr>
-          <p:cNvPr id="13" name="Text 10"/>
-          <p:cNvSpPr/>
-          <p:nvPr/>
-        </p:nvSpPr>
-        <p:spPr>
-          <a:xfrm>
-            <a:off x="2633472" y="2880360"/>
-            <a:ext cx="2029968" cy="256032"/>
-          </a:xfrm>
-          <a:prstGeom prst="rect">
-            <a:avLst/>
-          </a:prstGeom>
-          <a:noFill/>
-          <a:ln/>
-        </p:spPr>
-        <p:txBody>
-          <a:bodyPr wrap="square" lIns="0" tIns="0" rIns="0" bIns="0" rtlCol="0" anchor="ctr"/>
-          <a:lstStyle/>
-          <a:p>
-            <a:pPr algn="ctr" indent="0" marL="0">
-              <a:buNone/>
-            </a:pPr>
-            <a:r>
-              <a:rPr lang="en-US" sz="1000" b="1" dirty="0">
-                <a:solidFill>
-                  <a:srgbClr val="FFFFFF"/>
-                </a:solidFill>
-                <a:latin typeface="Arial" pitchFamily="34" charset="0"/>
-                <a:ea typeface="Arial" pitchFamily="34" charset="-122"/>
-                <a:cs typeface="Arial" pitchFamily="34" charset="-120"/>
-              </a:rPr>
-              <a:t>Comprometido</a:t>
-            </a:r>
-            <a:endParaRPr lang="en-US" sz="1000" dirty="0"/>
-          </a:p>
-        </p:txBody>
-      </p:sp>
-      <p:sp>
-        <p:nvSpPr>
-          <p:cNvPr id="14" name="Text 11"/>
-          <p:cNvSpPr/>
-          <p:nvPr/>
-        </p:nvSpPr>
-        <p:spPr>
-          <a:xfrm>
-            <a:off x="2633472" y="3154680"/>
-            <a:ext cx="2029968" cy="438912"/>
-          </a:xfrm>
-          <a:prstGeom prst="rect">
-            <a:avLst/>
-          </a:prstGeom>
-          <a:noFill/>
-          <a:ln/>
-        </p:spPr>
-        <p:txBody>
-          <a:bodyPr wrap="square" lIns="0" tIns="0" rIns="0" bIns="0" rtlCol="0" anchor="ctr"/>
-          <a:lstStyle/>
-          <a:p>
-            <a:pPr algn="ctr" indent="0" marL="0">
-              <a:buNone/>
-            </a:pPr>
-            <a:r>
-              <a:rPr lang="en-US" sz="3000" b="1" dirty="0">
-                <a:solidFill>
-                  <a:srgbClr val="2A9D8F"/>
-                </a:solidFill>
-                <a:latin typeface="Arial" pitchFamily="34" charset="0"/>
-                <a:ea typeface="Arial" pitchFamily="34" charset="-122"/>
-                <a:cs typeface="Arial" pitchFamily="34" charset="-120"/>
-              </a:rPr>
-              <a:t>44,8%</a:t>
-            </a:r>
-            <a:endParaRPr lang="en-US" sz="3000" dirty="0"/>
-          </a:p>
-        </p:txBody>
-      </p:sp>
-      <p:sp>
-        <p:nvSpPr>
-          <p:cNvPr id="15" name="Text 12"/>
-          <p:cNvSpPr/>
-          <p:nvPr/>
-        </p:nvSpPr>
-        <p:spPr>
-          <a:xfrm>
-            <a:off x="2633472" y="3621024"/>
-            <a:ext cx="2029968" cy="228600"/>
-          </a:xfrm>
-          <a:prstGeom prst="rect">
-            <a:avLst/>
-          </a:prstGeom>
-          <a:noFill/>
-          <a:ln/>
-        </p:spPr>
-        <p:txBody>
-          <a:bodyPr wrap="square" lIns="0" tIns="0" rIns="0" bIns="0" rtlCol="0" anchor="ctr"/>
-          <a:lstStyle/>
-          <a:p>
-            <a:pPr algn="ctr" indent="0" marL="0">
-              <a:buNone/>
-            </a:pPr>
-            <a:r>
-              <a:rPr lang="en-US" sz="1100" dirty="0">
-                <a:solidFill>
-                  <a:srgbClr val="8A7070"/>
-                </a:solidFill>
-                <a:latin typeface="Arial" pitchFamily="34" charset="0"/>
-                <a:ea typeface="Arial" pitchFamily="34" charset="-122"/>
-                <a:cs typeface="Arial" pitchFamily="34" charset="-120"/>
-              </a:rPr>
-              <a:t>N = 64</a:t>
-            </a:r>
-            <a:endParaRPr lang="en-US" sz="1100" dirty="0"/>
-          </a:p>
-        </p:txBody>
-      </p:sp>
-      <p:sp>
-        <p:nvSpPr>
-          <p:cNvPr id="16" name="Text 13"/>
-          <p:cNvSpPr/>
-          <p:nvPr/>
-        </p:nvSpPr>
-        <p:spPr>
-          <a:xfrm>
-            <a:off x="2706624" y="3877056"/>
-            <a:ext cx="1901952" cy="548640"/>
-          </a:xfrm>
-          <a:prstGeom prst="rect">
-            <a:avLst/>
-          </a:prstGeom>
-          <a:noFill/>
-          <a:ln/>
-        </p:spPr>
-        <p:txBody>
-          <a:bodyPr wrap="square" lIns="0" tIns="0" rIns="0" bIns="0" rtlCol="0" anchor="ctr"/>
-          <a:lstStyle/>
-          <a:p>
-            <a:pPr algn="ctr" indent="0" marL="0">
-              <a:buNone/>
-            </a:pPr>
-            <a:r>
-              <a:rPr lang="en-US" sz="950" dirty="0">
-                <a:solidFill>
-                  <a:srgbClr val="1B2420"/>
-                </a:solidFill>
-                <a:latin typeface="Arial" pitchFamily="34" charset="0"/>
-                <a:ea typeface="Arial" pitchFamily="34" charset="-122"/>
-                <a:cs typeface="Arial" pitchFamily="34" charset="-120"/>
-              </a:rPr>
-              <a:t>Disse SIM, sem papel ativo estruturado</a:t>
-            </a:r>
-            <a:endParaRPr lang="en-US" sz="950" dirty="0"/>
-          </a:p>
-        </p:txBody>
-      </p:sp>
-      <p:sp>
-        <p:nvSpPr>
-          <p:cNvPr id="17" name="Shape 14"/>
-          <p:cNvSpPr/>
-          <p:nvPr/>
-        </p:nvSpPr>
-        <p:spPr>
-          <a:xfrm>
-            <a:off x="4809744" y="2880360"/>
-            <a:ext cx="2029968" cy="1645920"/>
-          </a:xfrm>
-          <a:prstGeom prst="rect">
-            <a:avLst/>
-          </a:prstGeom>
-          <a:solidFill>
-            <a:srgbClr val="FDF6F4"/>
-          </a:solidFill>
-          <a:ln w="12700">
-            <a:solidFill>
-              <a:srgbClr val="3B82C4"/>
-            </a:solidFill>
-            <a:prstDash val="solid"/>
-          </a:ln>
-        </p:spPr>
-      </p:sp>
-      <p:sp>
-        <p:nvSpPr>
-          <p:cNvPr id="18" name="Shape 15"/>
-          <p:cNvSpPr/>
-          <p:nvPr/>
-        </p:nvSpPr>
-        <p:spPr>
-          <a:xfrm>
-            <a:off x="4809744" y="2880360"/>
-            <a:ext cx="2029968" cy="256032"/>
-          </a:xfrm>
-          <a:prstGeom prst="rect">
-            <a:avLst/>
-          </a:prstGeom>
-          <a:solidFill>
-            <a:srgbClr val="3B82C4"/>
-          </a:solidFill>
-          <a:ln w="12700">
-            <a:solidFill>
-              <a:srgbClr val="3B82C4"/>
-            </a:solidFill>
-            <a:prstDash val="solid"/>
-          </a:ln>
-        </p:spPr>
-      </p:sp>
-      <p:sp>
-        <p:nvSpPr>
-          <p:cNvPr id="19" name="Text 16"/>
-          <p:cNvSpPr/>
-          <p:nvPr/>
-        </p:nvSpPr>
-        <p:spPr>
-          <a:xfrm>
-            <a:off x="4809744" y="2880360"/>
-            <a:ext cx="2029968" cy="256032"/>
-          </a:xfrm>
-          <a:prstGeom prst="rect">
-            <a:avLst/>
-          </a:prstGeom>
-          <a:noFill/>
-          <a:ln/>
-        </p:spPr>
-        <p:txBody>
-          <a:bodyPr wrap="square" lIns="0" tIns="0" rIns="0" bIns="0" rtlCol="0" anchor="ctr"/>
-          <a:lstStyle/>
-          <a:p>
-            <a:pPr algn="ctr" indent="0" marL="0">
-              <a:buNone/>
-            </a:pPr>
-            <a:r>
-              <a:rPr lang="en-US" sz="1000" b="1" dirty="0">
-                <a:solidFill>
-                  <a:srgbClr val="FFFFFF"/>
-                </a:solidFill>
-                <a:latin typeface="Arial" pitchFamily="34" charset="0"/>
-                <a:ea typeface="Arial" pitchFamily="34" charset="-122"/>
-                <a:cs typeface="Arial" pitchFamily="34" charset="-120"/>
-              </a:rPr>
-              <a:t>Ativo no Motivo</a:t>
-            </a:r>
-            <a:endParaRPr lang="en-US" sz="1000" dirty="0"/>
-          </a:p>
-        </p:txBody>
-      </p:sp>
-      <p:sp>
-        <p:nvSpPr>
-          <p:cNvPr id="20" name="Text 17"/>
-          <p:cNvSpPr/>
-          <p:nvPr/>
-        </p:nvSpPr>
-        <p:spPr>
-          <a:xfrm>
-            <a:off x="4809744" y="3154680"/>
-            <a:ext cx="2029968" cy="438912"/>
-          </a:xfrm>
-          <a:prstGeom prst="rect">
-            <a:avLst/>
-          </a:prstGeom>
-          <a:noFill/>
-          <a:ln/>
-        </p:spPr>
-        <p:txBody>
-          <a:bodyPr wrap="square" lIns="0" tIns="0" rIns="0" bIns="0" rtlCol="0" anchor="ctr"/>
-          <a:lstStyle/>
-          <a:p>
-            <a:pPr algn="ctr" indent="0" marL="0">
-              <a:buNone/>
-            </a:pPr>
-            <a:r>
-              <a:rPr lang="en-US" sz="3000" b="1" dirty="0">
-                <a:solidFill>
-                  <a:srgbClr val="3B82C4"/>
-                </a:solidFill>
-                <a:latin typeface="Arial" pitchFamily="34" charset="0"/>
-                <a:ea typeface="Arial" pitchFamily="34" charset="-122"/>
-                <a:cs typeface="Arial" pitchFamily="34" charset="-120"/>
-              </a:rPr>
-              <a:t>11,9%</a:t>
-            </a:r>
-            <a:endParaRPr lang="en-US" sz="3000" dirty="0"/>
-          </a:p>
-        </p:txBody>
-      </p:sp>
-      <p:sp>
-        <p:nvSpPr>
-          <p:cNvPr id="21" name="Text 18"/>
-          <p:cNvSpPr/>
-          <p:nvPr/>
-        </p:nvSpPr>
-        <p:spPr>
-          <a:xfrm>
-            <a:off x="4809744" y="3621024"/>
-            <a:ext cx="2029968" cy="228600"/>
-          </a:xfrm>
-          <a:prstGeom prst="rect">
-            <a:avLst/>
-          </a:prstGeom>
-          <a:noFill/>
-          <a:ln/>
-        </p:spPr>
-        <p:txBody>
-          <a:bodyPr wrap="square" lIns="0" tIns="0" rIns="0" bIns="0" rtlCol="0" anchor="ctr"/>
-          <a:lstStyle/>
-          <a:p>
-            <a:pPr algn="ctr" indent="0" marL="0">
-              <a:buNone/>
-            </a:pPr>
-            <a:r>
-              <a:rPr lang="en-US" sz="1100" dirty="0">
-                <a:solidFill>
-                  <a:srgbClr val="8A7070"/>
-                </a:solidFill>
-                <a:latin typeface="Arial" pitchFamily="34" charset="0"/>
-                <a:ea typeface="Arial" pitchFamily="34" charset="-122"/>
-                <a:cs typeface="Arial" pitchFamily="34" charset="-120"/>
-              </a:rPr>
-              <a:t>N = 17</a:t>
-            </a:r>
-            <a:endParaRPr lang="en-US" sz="1100" dirty="0"/>
-          </a:p>
-        </p:txBody>
-      </p:sp>
-      <p:sp>
-        <p:nvSpPr>
-          <p:cNvPr id="22" name="Text 19"/>
-          <p:cNvSpPr/>
-          <p:nvPr/>
-        </p:nvSpPr>
-        <p:spPr>
-          <a:xfrm>
-            <a:off x="4882896" y="3877056"/>
-            <a:ext cx="1901952" cy="548640"/>
-          </a:xfrm>
-          <a:prstGeom prst="rect">
-            <a:avLst/>
-          </a:prstGeom>
-          <a:noFill/>
-          <a:ln/>
-        </p:spPr>
-        <p:txBody>
-          <a:bodyPr wrap="square" lIns="0" tIns="0" rIns="0" bIns="0" rtlCol="0" anchor="ctr"/>
-          <a:lstStyle/>
-          <a:p>
-            <a:pPr algn="ctr" indent="0" marL="0">
-              <a:buNone/>
-            </a:pPr>
-            <a:r>
-              <a:rPr lang="en-US" sz="950" dirty="0">
-                <a:solidFill>
-                  <a:srgbClr val="1B2420"/>
-                </a:solidFill>
-                <a:latin typeface="Arial" pitchFamily="34" charset="0"/>
-                <a:ea typeface="Arial" pitchFamily="34" charset="-122"/>
-                <a:cs typeface="Arial" pitchFamily="34" charset="-120"/>
-              </a:rPr>
-              <a:t>Engajado com ao menos 1 papel ativo</a:t>
-            </a:r>
-            <a:endParaRPr lang="en-US" sz="950" dirty="0"/>
-          </a:p>
-        </p:txBody>
-      </p:sp>
-      <p:sp>
-        <p:nvSpPr>
-          <p:cNvPr id="23" name="Shape 20"/>
-          <p:cNvSpPr/>
-          <p:nvPr/>
-        </p:nvSpPr>
-        <p:spPr>
-          <a:xfrm>
-            <a:off x="6986016" y="2880360"/>
-            <a:ext cx="2029968" cy="1645920"/>
-          </a:xfrm>
-          <a:prstGeom prst="rect">
-            <a:avLst/>
-          </a:prstGeom>
-          <a:solidFill>
-            <a:srgbClr val="FDF6F4"/>
-          </a:solidFill>
-          <a:ln w="12700">
-            <a:solidFill>
-              <a:srgbClr val="1D5B7A"/>
-            </a:solidFill>
-            <a:prstDash val="solid"/>
-          </a:ln>
-        </p:spPr>
-      </p:sp>
-      <p:sp>
-        <p:nvSpPr>
-          <p:cNvPr id="24" name="Shape 21"/>
-          <p:cNvSpPr/>
-          <p:nvPr/>
-        </p:nvSpPr>
-        <p:spPr>
-          <a:xfrm>
-            <a:off x="6986016" y="2880360"/>
-            <a:ext cx="2029968" cy="256032"/>
-          </a:xfrm>
-          <a:prstGeom prst="rect">
-            <a:avLst/>
-          </a:prstGeom>
-          <a:solidFill>
-            <a:srgbClr val="1D5B7A"/>
-          </a:solidFill>
-          <a:ln w="12700">
-            <a:solidFill>
-              <a:srgbClr val="1D5B7A"/>
-            </a:solidFill>
-            <a:prstDash val="solid"/>
-          </a:ln>
-        </p:spPr>
-      </p:sp>
-      <p:sp>
-        <p:nvSpPr>
-          <p:cNvPr id="25" name="Text 22"/>
-          <p:cNvSpPr/>
-          <p:nvPr/>
-        </p:nvSpPr>
-        <p:spPr>
-          <a:xfrm>
-            <a:off x="6986016" y="2880360"/>
-            <a:ext cx="2029968" cy="256032"/>
-          </a:xfrm>
-          <a:prstGeom prst="rect">
-            <a:avLst/>
-          </a:prstGeom>
-          <a:noFill/>
-          <a:ln/>
-        </p:spPr>
-        <p:txBody>
-          <a:bodyPr wrap="square" lIns="0" tIns="0" rIns="0" bIns="0" rtlCol="0" anchor="ctr"/>
-          <a:lstStyle/>
-          <a:p>
-            <a:pPr algn="ctr" indent="0" marL="0">
-              <a:buNone/>
-            </a:pPr>
-            <a:r>
-              <a:rPr lang="en-US" sz="1000" b="1" dirty="0">
-                <a:solidFill>
-                  <a:srgbClr val="FFFFFF"/>
-                </a:solidFill>
-                <a:latin typeface="Arial" pitchFamily="34" charset="0"/>
-                <a:ea typeface="Arial" pitchFamily="34" charset="-122"/>
-                <a:cs typeface="Arial" pitchFamily="34" charset="-120"/>
-              </a:rPr>
-              <a:t>Emb + Coc</a:t>
-            </a:r>
-            <a:endParaRPr lang="en-US" sz="1000" dirty="0"/>
-          </a:p>
-        </p:txBody>
-      </p:sp>
-      <p:sp>
-        <p:nvSpPr>
-          <p:cNvPr id="26" name="Text 23"/>
-          <p:cNvSpPr/>
-          <p:nvPr/>
-        </p:nvSpPr>
-        <p:spPr>
-          <a:xfrm>
-            <a:off x="6986016" y="3154680"/>
-            <a:ext cx="2029968" cy="438912"/>
-          </a:xfrm>
-          <a:prstGeom prst="rect">
-            <a:avLst/>
-          </a:prstGeom>
-          <a:noFill/>
-          <a:ln/>
-        </p:spPr>
-        <p:txBody>
-          <a:bodyPr wrap="square" lIns="0" tIns="0" rIns="0" bIns="0" rtlCol="0" anchor="ctr"/>
-          <a:lstStyle/>
-          <a:p>
-            <a:pPr algn="ctr" indent="0" marL="0">
-              <a:buNone/>
-            </a:pPr>
-            <a:r>
-              <a:rPr lang="en-US" sz="3000" b="1" dirty="0">
-                <a:solidFill>
-                  <a:srgbClr val="1D5B7A"/>
-                </a:solidFill>
-                <a:latin typeface="Arial" pitchFamily="34" charset="0"/>
-                <a:ea typeface="Arial" pitchFamily="34" charset="-122"/>
-                <a:cs typeface="Arial" pitchFamily="34" charset="-120"/>
-              </a:rPr>
-              <a:t>10,5%</a:t>
-            </a:r>
-            <a:endParaRPr lang="en-US" sz="3000" dirty="0"/>
-          </a:p>
-        </p:txBody>
-      </p:sp>
-      <p:sp>
-        <p:nvSpPr>
-          <p:cNvPr id="27" name="Text 24"/>
-          <p:cNvSpPr/>
-          <p:nvPr/>
-        </p:nvSpPr>
-        <p:spPr>
-          <a:xfrm>
-            <a:off x="6986016" y="3621024"/>
-            <a:ext cx="2029968" cy="228600"/>
-          </a:xfrm>
-          <a:prstGeom prst="rect">
-            <a:avLst/>
-          </a:prstGeom>
-          <a:noFill/>
-          <a:ln/>
-        </p:spPr>
-        <p:txBody>
-          <a:bodyPr wrap="square" lIns="0" tIns="0" rIns="0" bIns="0" rtlCol="0" anchor="ctr"/>
-          <a:lstStyle/>
-          <a:p>
-            <a:pPr algn="ctr" indent="0" marL="0">
-              <a:buNone/>
-            </a:pPr>
-            <a:r>
-              <a:rPr lang="en-US" sz="1100" dirty="0">
-                <a:solidFill>
-                  <a:srgbClr val="8A7070"/>
-                </a:solidFill>
-                <a:latin typeface="Arial" pitchFamily="34" charset="0"/>
-                <a:ea typeface="Arial" pitchFamily="34" charset="-122"/>
-                <a:cs typeface="Arial" pitchFamily="34" charset="-120"/>
-              </a:rPr>
-              <a:t>N = 15</a:t>
-            </a:r>
-            <a:endParaRPr lang="en-US" sz="1100" dirty="0"/>
-          </a:p>
-        </p:txBody>
-      </p:sp>
-      <p:sp>
-        <p:nvSpPr>
-          <p:cNvPr id="28" name="Text 25"/>
-          <p:cNvSpPr/>
-          <p:nvPr/>
-        </p:nvSpPr>
-        <p:spPr>
-          <a:xfrm>
-            <a:off x="7059168" y="3877056"/>
-            <a:ext cx="1901952" cy="548640"/>
-          </a:xfrm>
-          <a:prstGeom prst="rect">
-            <a:avLst/>
-          </a:prstGeom>
-          <a:noFill/>
-          <a:ln/>
-        </p:spPr>
-        <p:txBody>
-          <a:bodyPr wrap="square" lIns="0" tIns="0" rIns="0" bIns="0" rtlCol="0" anchor="ctr"/>
-          <a:lstStyle/>
-          <a:p>
-            <a:pPr algn="ctr" indent="0" marL="0">
-              <a:buNone/>
-            </a:pPr>
-            <a:r>
-              <a:rPr lang="en-US" sz="950" dirty="0">
-                <a:solidFill>
-                  <a:srgbClr val="1B2420"/>
-                </a:solidFill>
-                <a:latin typeface="Arial" pitchFamily="34" charset="0"/>
-                <a:ea typeface="Arial" pitchFamily="34" charset="-122"/>
-                <a:cs typeface="Arial" pitchFamily="34" charset="-120"/>
-              </a:rPr>
-              <a:t>Referências comunitárias e co-criadores</a:t>
-            </a:r>
-            <a:endParaRPr lang="en-US" sz="950" dirty="0"/>
-          </a:p>
-        </p:txBody>
-      </p:sp>
+      <p:pic>
+        <p:nvPicPr>
+          <p:cNvPr id="4" name="Image 0" descr="preencoded.png">    </p:cNvPr>
+          <p:cNvPicPr>
+            <a:picLocks noChangeAspect="1"/>
+          </p:cNvPicPr>
+          <p:nvPr/>
+        </p:nvPicPr>
+        <p:blipFill>
+          <a:blip r:embed="rId1"/>
+          <a:stretch>
+            <a:fillRect/>
+          </a:stretch>
+        </p:blipFill>
+        <p:spPr>
+          <a:xfrm>
+            <a:off x="548640" y="1005840"/>
+            <a:ext cx="8046720" cy="3904488"/>
+          </a:xfrm>
+          <a:prstGeom prst="rect">
+            <a:avLst/>
+          </a:prstGeom>
+        </p:spPr>
+      </p:pic>
     </p:spTree>
   </p:cSld>
   <p:clrMapOvr>
